--- a/docs/ML_Project01_Agent_KIO_Routing.pptx
+++ b/docs/ML_Project01_Agent_KIO_Routing.pptx
@@ -18,9 +18,10 @@
     <p:sldId id="266" r:id="rId12"/>
     <p:sldId id="267" r:id="rId13"/>
     <p:sldId id="268" r:id="rId14"/>
+    <p:sldId id="269" r:id="rId15"/>
   </p:sldIdLst>
   <p:notesMasterIdLst>
-    <p:notesMasterId r:id="rId15"/>
+    <p:notesMasterId r:id="rId16"/>
   </p:notesMasterIdLst>
   <p:sldSz cx="12192000" cy="6858000"/>
   <p:notesSz cx="6858000" cy="12192000"/>
@@ -119,7 +120,7 @@
   <p:extLst>
     <p:ext uri="{521415D9-36F7-43E2-AB2F-B90AF26B5E84}">
       <p14:sectionLst xmlns:p14="http://schemas.microsoft.com/office/powerpoint/2010/main">
-        <p14:section name="Ahmed — problem and dataset" id="{e7bafc0e-0162-2839-fab6-2c21b64272ad}">
+        <p14:section name="Ahmed — problem and dataset" id="{cc9d641a-9acb-9985-db92-e21f9ac83c73}">
           <p14:sldIdLst>
             <p14:sldId id="256"/>
             <p14:sldId id="257"/>
@@ -128,20 +129,21 @@
             <p14:sldId id="260"/>
           </p14:sldIdLst>
         </p14:section>
-        <p14:section name="Moaaz — decision model" id="{d792b349-30ed-c549-78b4-12890fd95c8c}">
+        <p14:section name="Moaaz — decision model" id="{8d54d995-b2a9-592c-a1b1-bec5176d3a2f}">
           <p14:sldIdLst>
             <p14:sldId id="261"/>
             <p14:sldId id="262"/>
             <p14:sldId id="263"/>
           </p14:sldIdLst>
         </p14:section>
-        <p14:section name="Omar — ML classifier, comparison, recommendation" id="{b90fd10e-ddbe-e55a-4b5e-81ac4d40764d}">
+        <p14:section name="Omar — ML classifier, comparison, recommendation" id="{3caa8f83-72ef-0b74-ca1b-1930f54e8286}">
           <p14:sldIdLst>
             <p14:sldId id="264"/>
             <p14:sldId id="265"/>
             <p14:sldId id="266"/>
             <p14:sldId id="267"/>
             <p14:sldId id="268"/>
+            <p14:sldId id="269"/>
           </p14:sldIdLst>
         </p14:section>
       </p14:sectionLst>
@@ -348,13 +350,13 @@
                 <c:formatCode>General</c:formatCode>
                 <c:ptCount val="3"/>
                 <c:pt idx="0">
-                  <c:v>100</c:v>
+                  <c:v>80</c:v>
                 </c:pt>
                 <c:pt idx="1">
                   <c:v>100</c:v>
                 </c:pt>
                 <c:pt idx="2">
-                  <c:v>100</c:v>
+                  <c:v>62.5</c:v>
                 </c:pt>
               </c:numCache>
             </c:numRef>
@@ -923,7 +925,7 @@
           <a:p>
             <a:r>
               <a:rPr lang="en-US" dirty="0"/>
-              <a:t>Ahmed opens. 15 seconds: who we are and the question — can a decision model route Agent KIO requests better than the trained classifier the agency uses today?</a:t>
+              <a:t>AHMED (15 s): Good morning. We are Ahmed, Moaaz and Omar. Our question: should Agent KIO keep routing customers with a trained ML classifier, or switch to a decision model? I will explain the problem and our data, Moaaz the decision model, Omar the classifier and our recommendation.</a:t>
             </a:r>
             <a:endParaRPr lang="en-US" dirty="0"/>
           </a:p>
@@ -1011,7 +1013,7 @@
           <a:p>
             <a:r>
               <a:rPr lang="en-US" dirty="0"/>
-              <a:t>Read the plot: x is problem cues, y is purchase cues. Blue region is flag 0, orange region is flag 1. Circles are training messages, squares are test messages. The two circled points are the mixed-intent messages the classifier gets wrong: it counts words, it cannot apply a priority rule.</a:t>
+              <a:t>OMAR (40 s): Blue region is support, orange is sales. On the test set the classifier is perfect, 20 of 20, and over 200 random splits it averages 96 percent. The circled points are mixed-intent messages: purchase words outnumber problem words, so it routes them to sales.</a:t>
             </a:r>
             <a:endParaRPr lang="en-US" dirty="0"/>
           </a:p>
@@ -1099,7 +1101,7 @@
           <a:p>
             <a:r>
               <a:rPr lang="en-US" dirty="0"/>
-              <a:t>On the ordinary test set both approaches are perfect. The difference appears only on hard messages: mixed intent 2 of 4 versus 4 of 4, and our 8 new hard messages 5 of 8 versus 8 of 8. Every ML error comes from a keyword pulling the wrong way: “quote” inside a complaint, “can’t” inside a sales question.</a:t>
+              <a:t>OMAR (40 s): On clear messages the classifier wins, 100 versus 80 percent. On mixed intent the decision model wins, 4 of 4 versus 2 of 4. On our hard messages both score 5 of 8, but they fail on different messages: the classifier is fooled by single keywords like quote, the decision model by friendly or repeat-purchase wording.</a:t>
             </a:r>
             <a:endParaRPr lang="en-US" dirty="0"/>
           </a:p>
@@ -1187,7 +1189,7 @@
           <a:p>
             <a:r>
               <a:rPr lang="en-US" dirty="0"/>
-              <a:t>Our recommendation in one sentence: the decision model for routing, the classifier as a cheap fallback. Then one line on next steps: a real, hand-labeled test before trusting either number. Thank you — questions.</a:t>
+              <a:t>OMAR (35 s): Our recommendation is a hybrid. Keep the fast classifier for clear messages and send only mixed messages to the decision model. On our data that gave 19 of 20, 3 of 4 and 6 of 8. Honest caveat: we designed this rule after seeing the results, so it needs a fresh test on real KIO messages. Thank you, we are happy to take questions.</a:t>
             </a:r>
             <a:endParaRPr lang="en-US" dirty="0"/>
           </a:p>
@@ -1275,7 +1277,7 @@
           <a:p>
             <a:r>
               <a:rPr lang="en-US" dirty="0"/>
-              <a:t>Backup slide; leave it on screen during questions.</a:t>
+              <a:t>Backup. If the doctor asks how we got the numbers, open the notebook and run the demo cell with a new message.</a:t>
             </a:r>
             <a:endParaRPr lang="en-US" dirty="0"/>
           </a:p>
@@ -1299,6 +1301,94 @@
             <a:fld id="{F7021451-1387-4CA6-816F-3879F97B5CBC}" type="slidenum">
               <a:rPr lang="en-US"/>
               <a:t>13</a:t>
+            </a:fld>
+            <a:endParaRPr lang="en-US"/>
+          </a:p>
+        </p:txBody>
+      </p:sp>
+    </p:spTree>
+    <p:extLst>
+      <p:ext uri="{BB962C8B-B14F-4D97-AF65-F5344CB8AC3E}">
+        <p14:creationId xmlns:p14="http://schemas.microsoft.com/office/powerpoint/2010/main" val="1024086991"/>
+      </p:ext>
+    </p:extLst>
+  </p:cSld>
+  <p:clrMapOvr>
+    <a:masterClrMapping/>
+  </p:clrMapOvr>
+</p:notes>
+</file>
+
+<file path=ppt/notesSlides/notesSlide14.xml><?xml version="1.0" encoding="utf-8"?>
+<p:notes xmlns:a="http://schemas.openxmlformats.org/drawingml/2006/main" xmlns:r="http://schemas.openxmlformats.org/officeDocument/2006/relationships" xmlns:p="http://schemas.openxmlformats.org/presentationml/2006/main">
+  <p:cSld>
+    <p:spTree>
+      <p:nvGrpSpPr>
+        <p:cNvPr id="1" name=""/>
+        <p:cNvGrpSpPr/>
+        <p:nvPr/>
+      </p:nvGrpSpPr>
+      <p:grpSpPr>
+        <a:xfrm>
+          <a:off x="0" y="0"/>
+          <a:ext cx="0" cy="0"/>
+          <a:chOff x="0" y="0"/>
+          <a:chExt cx="0" cy="0"/>
+        </a:xfrm>
+      </p:grpSpPr>
+      <p:sp>
+        <p:nvSpPr>
+          <p:cNvPr id="2" name="Slide Image Placeholder 1"/>
+          <p:cNvSpPr>
+            <a:spLocks noGrp="1" noRot="1" noChangeAspect="1"/>
+          </p:cNvSpPr>
+          <p:nvPr>
+            <p:ph type="sldImg"/>
+          </p:nvPr>
+        </p:nvSpPr>
+        <p:spPr/>
+      </p:sp>
+      <p:sp>
+        <p:nvSpPr>
+          <p:cNvPr id="3" name="Notes Placeholder 2"/>
+          <p:cNvSpPr>
+            <a:spLocks noGrp="1"/>
+          </p:cNvSpPr>
+          <p:nvPr>
+            <p:ph type="body" idx="1"/>
+          </p:nvPr>
+        </p:nvSpPr>
+        <p:spPr/>
+        <p:txBody>
+          <a:bodyPr/>
+          <a:lstStyle/>
+          <a:p>
+            <a:r>
+              <a:rPr lang="en-US" dirty="0"/>
+              <a:t>Backup slide for questions.</a:t>
+            </a:r>
+            <a:endParaRPr lang="en-US" dirty="0"/>
+          </a:p>
+        </p:txBody>
+      </p:sp>
+      <p:sp>
+        <p:nvSpPr>
+          <p:cNvPr id="4" name="Slide Number Placeholder 3"/>
+          <p:cNvSpPr>
+            <a:spLocks noGrp="1"/>
+          </p:cNvSpPr>
+          <p:nvPr>
+            <p:ph type="sldNum" sz="quarter" idx="10"/>
+          </p:nvPr>
+        </p:nvSpPr>
+        <p:spPr/>
+        <p:txBody>
+          <a:bodyPr/>
+          <a:lstStyle/>
+          <a:p>
+            <a:fld id="{F7021451-1387-4CA6-816F-3879F97B5CBC}" type="slidenum">
+              <a:rPr lang="en-US"/>
+              <a:t>14</a:t>
             </a:fld>
             <a:endParaRPr lang="en-US"/>
           </a:p>
@@ -1363,7 +1453,7 @@
           <a:p>
             <a:r>
               <a:rPr lang="en-US" dirty="0"/>
-              <a:t>Agent KIO is a customer chatbot built on an LLM and search tools. Behind it are two specialist agents. Our job is only the router in the middle: read the message, output 0 for support or 1 for sales. In our demo both agents are simple Python functions that print their names. Routing chooses the workflow, retrieval then works inside it, so a wrong route means the wrong knowledge base.</a:t>
+              <a:t>AHMED (40 s): KIO is the chat entry point. Behind it are a support agent and a sales agent. Our job is only the router in the middle: read the message, output 0 for support or 1 for sales. Why it matters: routing selects the workflow, retrieval works inside it, so a wrong route sends the customer to the wrong knowledge base.</a:t>
             </a:r>
             <a:endParaRPr lang="en-US" dirty="0"/>
           </a:p>
@@ -1451,7 +1541,7 @@
           <a:p>
             <a:r>
               <a:rPr lang="en-US" dirty="0"/>
-              <a:t>Generation: 15 customer intents per class, each written as an original and a paraphrase, all about an industrial equipment supplier. We drafted them with an AI assistant and reviewed every label as a team before any test. Split by group, not by single message, so a paraphrase never leaks from training into test. Seed 42, balanced: 20 support and 20 sales for training, 10 and 10 for testing.</a:t>
+              <a:t>AHMED (50 s): We generated 60 English messages: 15 intents per class, each with a paraphrase. We used an AI assistant to draft them and reviewed every label together before testing. Labeling rule in one sentence. We split by group, not by message, so a paraphrase never leaks from training into test. On purpose we added negation, mixed intent and late orders that use purchase words.</a:t>
             </a:r>
             <a:endParaRPr lang="en-US" dirty="0"/>
           </a:p>
@@ -1539,7 +1629,7 @@
           <a:p>
             <a:r>
               <a:rPr lang="en-US" dirty="0"/>
-              <a:t>Point at two rows only: M05, where negation flips the meaning, and M08, where a purchase and a problem are mixed and our rule says support. These two kinds of rows are where the two approaches will differ.</a:t>
+              <a:t>AHMED (25 s): Point at M05: negation flips the meaning. M08: a purchase and a problem in one message, our rule says support. These are exactly the rows where the two approaches will differ.</a:t>
             </a:r>
             <a:endParaRPr lang="en-US" dirty="0"/>
           </a:p>
@@ -1627,7 +1717,7 @@
           <a:p>
             <a:r>
               <a:rPr lang="en-US" dirty="0"/>
-              <a:t>The classifier only knows what it saw in 40 examples, turned into numbers. The decision model reads the message itself and follows written routing instructions, so a business rule like “mixed intent goes to support” is one sentence, not new training data. Both end in the same flag: 0 support, 1 sales. Hand over to Moaaz.</a:t>
+              <a:t>AHMED (35 s): The classifier only knows what it saw in 40 examples turned into numbers. The decision model reads the sentence itself and compares it with written options, so a business rule is text, not new training data. Both end in the same flag. Moaaz will now show the decision model.</a:t>
             </a:r>
             <a:endParaRPr lang="en-US" dirty="0"/>
           </a:p>
@@ -1715,7 +1805,7 @@
           <a:p>
             <a:r>
               <a:rPr lang="en-US" dirty="0"/>
-              <a:t>We did not have a Jev API key; it is a paid early-access API. The project allows a similar decision model, so we used Claude with a fixed structured-output wrapper: the same options and instructions a Jev Choice question would get. The Jev call is already written in decision_router.py. Validation: the wrapper accepts only the two option names; anything else becomes flag 0, because sending a real problem to sales is the worse error.</a:t>
+              <a:t>MOAAZ (45 s): We used facebook/bart-large-mnli, an open-source model under the MIT licence. It is a natural-language-inference model: for each of our two routing options it gives a probability that the message entails it. Our wrapper turns that into a structured answer, validates it, and anything invalid falls back to support. The threshold 0.90 was chosen on the 40 training messages only, never on the test.</a:t>
             </a:r>
             <a:endParaRPr lang="en-US" dirty="0"/>
           </a:p>
@@ -1803,7 +1893,7 @@
           <a:p>
             <a:r>
               <a:rPr lang="en-US" dirty="0"/>
-              <a:t>Show the three numbers, then read one hard example aloud. The decision model handles meaning, not words: “quote” appears in a support message and “can’t” appears in a sales message, and it still routes both correctly. The 8 extra messages are a stress test written after the split, with the same labeling rule.</a:t>
+              <a:t>MOAAZ (40 s): Results from our Colab run. Test 16 of 20, all four mixed-intent messages correct, 5 of 8 new hard messages. Every test error goes the same way: a sales message about maintenance or service contracts was sent to support. The words maintenance and service made the model think of an existing service.</a:t>
             </a:r>
             <a:endParaRPr lang="en-US" dirty="0"/>
           </a:p>
@@ -1891,7 +1981,7 @@
           <a:p>
             <a:r>
               <a:rPr lang="en-US" dirty="0"/>
-              <a:t>Be honest here; it earns marks. Our decision model scored 100 percent, but the AI that answered also helped write the messages, so it shares our labeling rule. With only 28 scored messages, one mistake would move accuracy a lot. In production it costs money per request and adds latency. Hand over to Omar.</a:t>
+              <a:t>MOAAZ (30 s): The model understands the problems-first rule and its mistakes are the safer kind. But it gives a high support score to almost every message, so we needed a strict threshold, and business words like maintenance confuse it. It is also slower. Omar will now show the trained classifier.</a:t>
             </a:r>
             <a:endParaRPr lang="en-US" dirty="0"/>
           </a:p>
@@ -1979,7 +2069,7 @@
           <a:p>
             <a:r>
               <a:rPr lang="en-US" dirty="0"/>
-              <a:t>Model choice: logistic regression with degree-2 polynomial features, one of the three allowed options. Features: two numbers, so we can draw the boundary. Settings: scaling, degree 2, C equals 1. The failed first attempt: learning word weights from only 40 messages reached 40 percent, because test messages use words the model never saw. Cue counts generalize better. Honest note: the cue lists were written by our team, which knows the dataset.</a:t>
+              <a:t>OMAR (50 s): We chose logistic regression with degree-2 polynomial features, one of the allowed options. Each message becomes two numbers: problem cues and purchase cues, with negation counted as minus one. Scaling, degree 2, C equals 1. Our first attempt, learning word weights, only reached 40 percent because 40 messages are too few. We also checked an SVM with a polynomial kernel: 95 percent on test.</a:t>
             </a:r>
             <a:endParaRPr lang="en-US" dirty="0"/>
           </a:p>
@@ -2085,8 +2175,8 @@
         </p:nvSpPr>
         <p:spPr>
           <a:xfrm>
-            <a:off x="548640" y="685800"/>
-            <a:ext cx="11094415" cy="822960"/>
+            <a:off x="548640" y="713232"/>
+            <a:ext cx="11094415" cy="777240"/>
           </a:xfrm>
           <a:prstGeom prst="rect">
             <a:avLst/>
@@ -2099,7 +2189,7 @@
           <a:lstStyle>
             <a:lvl1pPr algn="l" indent="0" marL="0">
               <a:buNone/>
-              <a:defRPr lang="en-US" sz="3400" b="1" dirty="0">
+              <a:defRPr lang="en-US" sz="3200" b="1" dirty="0">
                 <a:solidFill>
                   <a:srgbClr val="14213D"/>
                 </a:solidFill>
@@ -2110,7 +2200,7 @@
             <a:pPr algn="l" indent="0" marL="0">
               <a:buNone/>
             </a:pPr>
-            <a:endParaRPr lang="en-US" sz="3400" dirty="0"/>
+            <a:endParaRPr lang="en-US" sz="3200" dirty="0"/>
           </a:p>
         </p:txBody>
       </p:sp>
@@ -2201,7 +2291,7 @@
         </p:nvSpPr>
         <p:spPr>
           <a:xfrm>
-            <a:off x="548640" y="685800"/>
+            <a:off x="548640" y="713232"/>
             <a:ext cx="11094415" cy="1371600"/>
           </a:xfrm>
           <a:prstGeom prst="rect">
@@ -2215,7 +2305,7 @@
           <a:lstStyle>
             <a:lvl1pPr algn="l" indent="0" marL="0">
               <a:buNone/>
-              <a:defRPr lang="en-US" sz="3600" b="1" dirty="0">
+              <a:defRPr lang="en-US" sz="3400" b="1" dirty="0">
                 <a:solidFill>
                   <a:srgbClr val="F7F6F2"/>
                 </a:solidFill>
@@ -2226,7 +2316,7 @@
             <a:pPr algn="l" indent="0" marL="0">
               <a:buNone/>
             </a:pPr>
-            <a:endParaRPr lang="en-US" sz="3600" dirty="0"/>
+            <a:endParaRPr lang="en-US" sz="3400" dirty="0"/>
           </a:p>
         </p:txBody>
       </p:sp>
@@ -2626,7 +2716,7 @@
         </p:nvSpPr>
         <p:spPr>
           <a:xfrm>
-            <a:off x="548640" y="2011680"/>
+            <a:off x="548640" y="1828800"/>
             <a:ext cx="11094415" cy="1005840"/>
           </a:xfrm>
           <a:prstGeom prst="rect">
@@ -2662,7 +2752,7 @@
         </p:nvSpPr>
         <p:spPr>
           <a:xfrm>
-            <a:off x="548640" y="3154680"/>
+            <a:off x="548640" y="2971800"/>
             <a:ext cx="9601200" cy="1005840"/>
           </a:xfrm>
           <a:prstGeom prst="rect">
@@ -2684,7 +2774,7 @@
                   <a:srgbClr val="C9D3E3"/>
                 </a:solidFill>
               </a:rPr>
-              <a:t>A trained ML classifier vs. a decision model for sending manufacturing customers to </a:t>
+              <a:t>A trained ML classifier vs. an open-source decision model for sending manufacturing customers to </a:t>
             </a:r>
             <a:pPr indent="0" marL="0">
               <a:buNone/>
@@ -2731,7 +2821,7 @@
         </p:nvSpPr>
         <p:spPr>
           <a:xfrm>
-            <a:off x="548640" y="5349240"/>
+            <a:off x="548640" y="5257800"/>
             <a:ext cx="3566160" cy="274320"/>
           </a:xfrm>
           <a:prstGeom prst="rect">
@@ -2748,12 +2838,12 @@
               <a:buNone/>
             </a:pPr>
             <a:r>
-              <a:rPr lang="en-US" sz="1200" dirty="0">
-                <a:solidFill>
-                  <a:srgbClr val="8A97AD"/>
-                </a:solidFill>
-              </a:rPr>
-              <a:t>Student 1 · Problem &amp; dataset</a:t>
+              <a:rPr lang="en-US" sz="1200" b="1" dirty="0">
+                <a:solidFill>
+                  <a:srgbClr val="8FB8EE"/>
+                </a:solidFill>
+              </a:rPr>
+              <a:t>Problem &amp; dataset</a:t>
             </a:r>
             <a:endParaRPr lang="en-US" sz="1200" dirty="0"/>
           </a:p>
@@ -2767,7 +2857,7 @@
         </p:nvSpPr>
         <p:spPr>
           <a:xfrm>
-            <a:off x="548640" y="5623560"/>
+            <a:off x="548640" y="5532120"/>
             <a:ext cx="3566160" cy="411480"/>
           </a:xfrm>
           <a:prstGeom prst="rect">
@@ -2803,7 +2893,7 @@
         </p:nvSpPr>
         <p:spPr>
           <a:xfrm>
-            <a:off x="4297680" y="5349240"/>
+            <a:off x="4297680" y="5257800"/>
             <a:ext cx="3566160" cy="274320"/>
           </a:xfrm>
           <a:prstGeom prst="rect">
@@ -2820,12 +2910,12 @@
               <a:buNone/>
             </a:pPr>
             <a:r>
-              <a:rPr lang="en-US" sz="1200" dirty="0">
-                <a:solidFill>
-                  <a:srgbClr val="8A97AD"/>
-                </a:solidFill>
-              </a:rPr>
-              <a:t>Student 2 · Decision model</a:t>
+              <a:rPr lang="en-US" sz="1200" b="1" dirty="0">
+                <a:solidFill>
+                  <a:srgbClr val="F5A27F"/>
+                </a:solidFill>
+              </a:rPr>
+              <a:t>Decision model</a:t>
             </a:r>
             <a:endParaRPr lang="en-US" sz="1200" dirty="0"/>
           </a:p>
@@ -2839,7 +2929,7 @@
         </p:nvSpPr>
         <p:spPr>
           <a:xfrm>
-            <a:off x="4297680" y="5623560"/>
+            <a:off x="4297680" y="5532120"/>
             <a:ext cx="3566160" cy="411480"/>
           </a:xfrm>
           <a:prstGeom prst="rect">
@@ -2875,7 +2965,7 @@
         </p:nvSpPr>
         <p:spPr>
           <a:xfrm>
-            <a:off x="8046720" y="5349240"/>
+            <a:off x="8046720" y="5257800"/>
             <a:ext cx="3566160" cy="274320"/>
           </a:xfrm>
           <a:prstGeom prst="rect">
@@ -2892,12 +2982,12 @@
               <a:buNone/>
             </a:pPr>
             <a:r>
-              <a:rPr lang="en-US" sz="1200" dirty="0">
-                <a:solidFill>
-                  <a:srgbClr val="8A97AD"/>
-                </a:solidFill>
-              </a:rPr>
-              <a:t>Student 3 · ML classifier</a:t>
+              <a:rPr lang="en-US" sz="1200" b="1" dirty="0">
+                <a:solidFill>
+                  <a:srgbClr val="7FD1A8"/>
+                </a:solidFill>
+              </a:rPr>
+              <a:t>ML classifier &amp; comparison</a:t>
             </a:r>
             <a:endParaRPr lang="en-US" sz="1200" dirty="0"/>
           </a:p>
@@ -2911,7 +3001,7 @@
         </p:nvSpPr>
         <p:spPr>
           <a:xfrm>
-            <a:off x="8046720" y="5623560"/>
+            <a:off x="8046720" y="5532120"/>
             <a:ext cx="3566160" cy="411480"/>
           </a:xfrm>
           <a:prstGeom prst="rect">
@@ -2947,7 +3037,7 @@
         </p:nvSpPr>
         <p:spPr>
           <a:xfrm>
-            <a:off x="548640" y="6217920"/>
+            <a:off x="548640" y="6172200"/>
             <a:ext cx="11094415" cy="274320"/>
           </a:xfrm>
           <a:prstGeom prst="rect">
@@ -2985,7 +3075,7 @@
         </p:nvSpPr>
         <p:spPr>
           <a:xfrm>
-            <a:off x="548640" y="685800"/>
+            <a:off x="548640" y="713232"/>
             <a:ext cx="11094415" cy="1371600"/>
           </a:xfrm>
           <a:prstGeom prst="rect">
@@ -3001,7 +3091,7 @@
             <a:pPr algn="l" indent="0" marL="0">
               <a:buNone/>
             </a:pPr>
-            <a:endParaRPr lang="en-US" sz="3600" dirty="0"/>
+            <a:endParaRPr lang="en-US" sz="3400" dirty="0"/>
           </a:p>
         </p:txBody>
       </p:sp>
@@ -3032,14 +3122,41 @@
       </p:grpSpPr>
       <p:sp>
         <p:nvSpPr>
-          <p:cNvPr id="2" name="Text 0"/>
+          <p:cNvPr id="2" name="Shape 0"/>
+          <p:cNvSpPr/>
+          <p:nvPr/>
+        </p:nvSpPr>
+        <p:spPr>
+          <a:xfrm>
+            <a:off x="548640" y="329184"/>
+            <a:ext cx="960120" cy="274320"/>
+          </a:xfrm>
+          <a:prstGeom prst="roundRect">
+            <a:avLst>
+              <a:gd name="adj" fmla="val 50000"/>
+            </a:avLst>
+          </a:prstGeom>
+          <a:solidFill>
+            <a:srgbClr val="1B8A5A"/>
+          </a:solidFill>
+          <a:ln w="12700">
+            <a:solidFill>
+              <a:srgbClr val="1B8A5A"/>
+            </a:solidFill>
+            <a:prstDash val="solid"/>
+          </a:ln>
+        </p:spPr>
+      </p:sp>
+      <p:sp>
+        <p:nvSpPr>
+          <p:cNvPr id="3" name="Text 1"/>
           <p:cNvSpPr txBox="1"/>
           <p:nvPr/>
         </p:nvSpPr>
         <p:spPr>
           <a:xfrm>
-            <a:off x="548640" y="365760"/>
-            <a:ext cx="11094415" cy="274320"/>
+            <a:off x="548640" y="329184"/>
+            <a:ext cx="960120" cy="274320"/>
           </a:xfrm>
           <a:prstGeom prst="rect">
             <a:avLst/>
@@ -3051,27 +3168,63 @@
           <a:bodyPr wrap="square" lIns="0" tIns="0" rIns="0" bIns="0" rtlCol="0" anchor="ctr"/>
           <a:lstStyle/>
           <a:p>
+            <a:pPr algn="ctr" indent="0" marL="0">
+              <a:buNone/>
+            </a:pPr>
+            <a:r>
+              <a:rPr lang="en-US" sz="1000" b="1" spc="100" kern="0" dirty="0">
+                <a:solidFill>
+                  <a:srgbClr val="FFFFFF"/>
+                </a:solidFill>
+              </a:rPr>
+              <a:t>OMAR</a:t>
+            </a:r>
+            <a:endParaRPr lang="en-US" sz="1000" dirty="0"/>
+          </a:p>
+        </p:txBody>
+      </p:sp>
+      <p:sp>
+        <p:nvSpPr>
+          <p:cNvPr id="4" name="Text 2"/>
+          <p:cNvSpPr txBox="1"/>
+          <p:nvPr/>
+        </p:nvSpPr>
+        <p:spPr>
+          <a:xfrm>
+            <a:off x="1645920" y="356616"/>
+            <a:ext cx="8229600" cy="274320"/>
+          </a:xfrm>
+          <a:prstGeom prst="rect">
+            <a:avLst/>
+          </a:prstGeom>
+          <a:noFill/>
+          <a:ln/>
+        </p:spPr>
+        <p:txBody>
+          <a:bodyPr wrap="square" lIns="0" tIns="0" rIns="0" bIns="0" rtlCol="0" anchor="t"/>
+          <a:lstStyle/>
+          <a:p>
             <a:pPr indent="0" marL="0">
               <a:buNone/>
             </a:pPr>
             <a:r>
-              <a:rPr lang="en-US" sz="1200" b="1" spc="200" kern="0" dirty="0">
-                <a:solidFill>
-                  <a:srgbClr val="2A78D6"/>
+              <a:rPr lang="en-US" sz="1100" b="1" spc="200" kern="0" dirty="0">
+                <a:solidFill>
+                  <a:srgbClr val="1B8A5A"/>
                 </a:solidFill>
                 <a:latin typeface="Courier New" pitchFamily="34" charset="0"/>
                 <a:ea typeface="Courier New" pitchFamily="34" charset="-122"/>
                 <a:cs typeface="Courier New" pitchFamily="34" charset="-120"/>
               </a:rPr>
-              <a:t>TRADITIONAL ML · BOUNDARY</a:t>
-            </a:r>
-            <a:endParaRPr lang="en-US" sz="1200" dirty="0"/>
-          </a:p>
-        </p:txBody>
-      </p:sp>
-      <p:sp>
-        <p:nvSpPr>
-          <p:cNvPr id="3" name="Text 0"/>
+              <a:t>TRADITIONAL ML · BOUNDARY AND RESULTS</a:t>
+            </a:r>
+            <a:endParaRPr lang="en-US" sz="1100" dirty="0"/>
+          </a:p>
+        </p:txBody>
+      </p:sp>
+      <p:sp>
+        <p:nvSpPr>
+          <p:cNvPr id="5" name="Text 0"/>
           <p:cNvSpPr/>
           <p:nvPr>
             <p:ph idx="100" type="title" hasCustomPrompt="1"/>
@@ -3079,8 +3232,8 @@
         </p:nvSpPr>
         <p:spPr>
           <a:xfrm>
-            <a:off x="548640" y="685800"/>
-            <a:ext cx="11094415" cy="822960"/>
+            <a:off x="548640" y="713232"/>
+            <a:ext cx="11094415" cy="777240"/>
           </a:xfrm>
           <a:prstGeom prst="rect">
             <a:avLst/>
@@ -3096,20 +3249,20 @@
               <a:buNone/>
             </a:pPr>
             <a:r>
-              <a:rPr lang="en-US" sz="3400" b="1" dirty="0">
+              <a:rPr lang="en-US" sz="3200" b="1" dirty="0">
                 <a:solidFill>
                   <a:srgbClr val="14213D"/>
                 </a:solidFill>
               </a:rPr>
               <a:t>Sales only when purchase cues outweigh problem cues</a:t>
             </a:r>
-            <a:endParaRPr lang="en-US" sz="3400" dirty="0"/>
+            <a:endParaRPr lang="en-US" sz="3200" dirty="0"/>
           </a:p>
         </p:txBody>
       </p:sp>
       <p:pic>
         <p:nvPicPr>
-          <p:cNvPr id="4" name="Image 0" descr="Scatter plot of support_score against sales_score with the degree-2 logistic regression boundary; two mixed-intent training messages are circled as misrouted.">    </p:cNvPr>
+          <p:cNvPr id="6" name="Image 0" descr="Decision boundary of the degree-2 logistic regression over support_score and sales_score; two mixed-intent training messages circled as misrouted.">    </p:cNvPr>
           <p:cNvPicPr>
             <a:picLocks noChangeAspect="1"/>
           </p:cNvPicPr>
@@ -3124,7 +3277,7 @@
         <p:spPr>
           <a:xfrm>
             <a:off x="548640" y="1600200"/>
-            <a:ext cx="6217920" cy="4663440"/>
+            <a:ext cx="6035040" cy="4526280"/>
           </a:xfrm>
           <a:prstGeom prst="rect">
             <a:avLst/>
@@ -3133,122 +3286,30 @@
       </p:pic>
       <p:sp>
         <p:nvSpPr>
-          <p:cNvPr id="5" name="Text 2"/>
-          <p:cNvSpPr txBox="1"/>
+          <p:cNvPr id="7" name="Shape 4"/>
+          <p:cNvSpPr/>
           <p:nvPr/>
         </p:nvSpPr>
         <p:spPr>
           <a:xfrm>
-            <a:off x="7132320" y="2011680"/>
-            <a:ext cx="4480560" cy="1188720"/>
-          </a:xfrm>
-          <a:prstGeom prst="rect">
-            <a:avLst/>
-          </a:prstGeom>
-          <a:noFill/>
-          <a:ln/>
-        </p:spPr>
-        <p:txBody>
-          <a:bodyPr wrap="square" lIns="0" tIns="0" rIns="0" bIns="0" rtlCol="0" anchor="t"/>
-          <a:lstStyle/>
-          <a:p>
-            <a:pPr indent="0" marL="0">
-              <a:buNone/>
-            </a:pPr>
-            <a:r>
-              <a:rPr lang="en-US" sz="1600" dirty="0">
-                <a:solidFill>
-                  <a:srgbClr val="4A5568"/>
-                </a:solidFill>
-              </a:rPr>
-              <a:t>The curve bends: a message needs more purchase cues before it counts as sales as its problem cues rise.</a:t>
-            </a:r>
-            <a:endParaRPr lang="en-US" sz="1600" dirty="0"/>
-          </a:p>
-        </p:txBody>
-      </p:sp>
-      <p:sp>
-        <p:nvSpPr>
-          <p:cNvPr id="6" name="Text 3"/>
-          <p:cNvSpPr txBox="1"/>
-          <p:nvPr/>
-        </p:nvSpPr>
-        <p:spPr>
-          <a:xfrm>
-            <a:off x="7132320" y="3383280"/>
-            <a:ext cx="4480560" cy="1463040"/>
-          </a:xfrm>
-          <a:prstGeom prst="rect">
-            <a:avLst/>
-          </a:prstGeom>
-          <a:noFill/>
-          <a:ln/>
-        </p:spPr>
-        <p:txBody>
-          <a:bodyPr wrap="square" lIns="0" tIns="0" rIns="0" bIns="0" rtlCol="0" anchor="t"/>
-          <a:lstStyle/>
-          <a:p>
-            <a:pPr indent="0" marL="0">
-              <a:buNone/>
-            </a:pPr>
-            <a:r>
-              <a:rPr lang="en-US" sz="1600" b="1" dirty="0">
-                <a:solidFill>
-                  <a:srgbClr val="14213D"/>
-                </a:solidFill>
-              </a:rPr>
-              <a:t>Circled: </a:t>
-            </a:r>
-            <a:pPr indent="0" marL="0">
-              <a:buNone/>
-            </a:pPr>
-            <a:r>
-              <a:rPr lang="en-US" sz="1600" dirty="0">
-                <a:solidFill>
-                  <a:srgbClr val="4A5568"/>
-                </a:solidFill>
-              </a:rPr>
-              <a:t>two mixed-intent messages (M08, M27). Their purchase words outnumber their problem words, so the model sends them to sales, against our rule.</a:t>
-            </a:r>
-            <a:endParaRPr lang="en-US" sz="1600" dirty="0"/>
-          </a:p>
-        </p:txBody>
-      </p:sp>
-      <p:sp>
-        <p:nvSpPr>
-          <p:cNvPr id="7" name="Text 4"/>
-          <p:cNvSpPr txBox="1"/>
-          <p:nvPr/>
-        </p:nvSpPr>
-        <p:spPr>
-          <a:xfrm>
-            <a:off x="7132320" y="5120640"/>
-            <a:ext cx="4480560" cy="457200"/>
-          </a:xfrm>
-          <a:prstGeom prst="rect">
-            <a:avLst/>
-          </a:prstGeom>
-          <a:noFill/>
-          <a:ln/>
-        </p:spPr>
-        <p:txBody>
-          <a:bodyPr wrap="square" lIns="0" tIns="0" rIns="0" bIns="0" rtlCol="0" anchor="t"/>
-          <a:lstStyle/>
-          <a:p>
-            <a:pPr indent="0" marL="0">
-              <a:buNone/>
-            </a:pPr>
-            <a:r>
-              <a:rPr lang="en-US" sz="1200" dirty="0">
-                <a:solidFill>
-                  <a:srgbClr val="6B7689"/>
-                </a:solidFill>
-              </a:rPr>
-              <a:t>Points are jittered slightly so overlapping messages stay visible.</a:t>
-            </a:r>
-            <a:endParaRPr lang="en-US" sz="1200" dirty="0"/>
-          </a:p>
-        </p:txBody>
+            <a:off x="6903720" y="1691640"/>
+            <a:ext cx="2286000" cy="1234440"/>
+          </a:xfrm>
+          <a:prstGeom prst="roundRect">
+            <a:avLst>
+              <a:gd name="adj" fmla="val 7407"/>
+            </a:avLst>
+          </a:prstGeom>
+          <a:solidFill>
+            <a:srgbClr val="FFFFFF"/>
+          </a:solidFill>
+          <a:ln w="12700">
+            <a:solidFill>
+              <a:srgbClr val="D5D8DE"/>
+            </a:solidFill>
+            <a:prstDash val="solid"/>
+          </a:ln>
+        </p:spPr>
       </p:sp>
       <p:sp>
         <p:nvSpPr>
@@ -3258,6 +3319,260 @@
         </p:nvSpPr>
         <p:spPr>
           <a:xfrm>
+            <a:off x="7132320" y="1828800"/>
+            <a:ext cx="1828800" cy="640080"/>
+          </a:xfrm>
+          <a:prstGeom prst="rect">
+            <a:avLst/>
+          </a:prstGeom>
+          <a:noFill/>
+          <a:ln/>
+        </p:spPr>
+        <p:txBody>
+          <a:bodyPr wrap="square" lIns="0" tIns="0" rIns="0" bIns="0" rtlCol="0" anchor="t"/>
+          <a:lstStyle/>
+          <a:p>
+            <a:pPr indent="0" marL="0">
+              <a:buNone/>
+            </a:pPr>
+            <a:r>
+              <a:rPr lang="en-US" sz="3200" b="1" dirty="0">
+                <a:solidFill>
+                  <a:srgbClr val="1B8A5A"/>
+                </a:solidFill>
+              </a:rPr>
+              <a:t>20 / 20</a:t>
+            </a:r>
+            <a:endParaRPr lang="en-US" sz="3200" dirty="0"/>
+          </a:p>
+        </p:txBody>
+      </p:sp>
+      <p:sp>
+        <p:nvSpPr>
+          <p:cNvPr id="9" name="Text 6"/>
+          <p:cNvSpPr txBox="1"/>
+          <p:nvPr/>
+        </p:nvSpPr>
+        <p:spPr>
+          <a:xfrm>
+            <a:off x="7132320" y="2468880"/>
+            <a:ext cx="1828800" cy="365760"/>
+          </a:xfrm>
+          <a:prstGeom prst="rect">
+            <a:avLst/>
+          </a:prstGeom>
+          <a:noFill/>
+          <a:ln/>
+        </p:spPr>
+        <p:txBody>
+          <a:bodyPr wrap="square" lIns="0" tIns="0" rIns="0" bIns="0" rtlCol="0" anchor="t"/>
+          <a:lstStyle/>
+          <a:p>
+            <a:pPr indent="0" marL="0">
+              <a:buNone/>
+            </a:pPr>
+            <a:r>
+              <a:rPr lang="en-US" sz="1300" dirty="0">
+                <a:solidFill>
+                  <a:srgbClr val="4A5568"/>
+                </a:solidFill>
+              </a:rPr>
+              <a:t>test set</a:t>
+            </a:r>
+            <a:endParaRPr lang="en-US" sz="1300" dirty="0"/>
+          </a:p>
+        </p:txBody>
+      </p:sp>
+      <p:sp>
+        <p:nvSpPr>
+          <p:cNvPr id="10" name="Shape 7"/>
+          <p:cNvSpPr/>
+          <p:nvPr/>
+        </p:nvSpPr>
+        <p:spPr>
+          <a:xfrm>
+            <a:off x="9372600" y="1691640"/>
+            <a:ext cx="2286000" cy="1234440"/>
+          </a:xfrm>
+          <a:prstGeom prst="roundRect">
+            <a:avLst>
+              <a:gd name="adj" fmla="val 7407"/>
+            </a:avLst>
+          </a:prstGeom>
+          <a:solidFill>
+            <a:srgbClr val="FFFFFF"/>
+          </a:solidFill>
+          <a:ln w="12700">
+            <a:solidFill>
+              <a:srgbClr val="D5D8DE"/>
+            </a:solidFill>
+            <a:prstDash val="solid"/>
+          </a:ln>
+        </p:spPr>
+      </p:sp>
+      <p:sp>
+        <p:nvSpPr>
+          <p:cNvPr id="11" name="Text 8"/>
+          <p:cNvSpPr txBox="1"/>
+          <p:nvPr/>
+        </p:nvSpPr>
+        <p:spPr>
+          <a:xfrm>
+            <a:off x="9601200" y="1828800"/>
+            <a:ext cx="1828800" cy="640080"/>
+          </a:xfrm>
+          <a:prstGeom prst="rect">
+            <a:avLst/>
+          </a:prstGeom>
+          <a:noFill/>
+          <a:ln/>
+        </p:spPr>
+        <p:txBody>
+          <a:bodyPr wrap="square" lIns="0" tIns="0" rIns="0" bIns="0" rtlCol="0" anchor="t"/>
+          <a:lstStyle/>
+          <a:p>
+            <a:pPr indent="0" marL="0">
+              <a:buNone/>
+            </a:pPr>
+            <a:r>
+              <a:rPr lang="en-US" sz="3200" b="1" dirty="0">
+                <a:solidFill>
+                  <a:srgbClr val="14213D"/>
+                </a:solidFill>
+              </a:rPr>
+              <a:t>96%</a:t>
+            </a:r>
+            <a:endParaRPr lang="en-US" sz="3200" dirty="0"/>
+          </a:p>
+        </p:txBody>
+      </p:sp>
+      <p:sp>
+        <p:nvSpPr>
+          <p:cNvPr id="12" name="Text 9"/>
+          <p:cNvSpPr txBox="1"/>
+          <p:nvPr/>
+        </p:nvSpPr>
+        <p:spPr>
+          <a:xfrm>
+            <a:off x="9601200" y="2468880"/>
+            <a:ext cx="1828800" cy="365760"/>
+          </a:xfrm>
+          <a:prstGeom prst="rect">
+            <a:avLst/>
+          </a:prstGeom>
+          <a:noFill/>
+          <a:ln/>
+        </p:spPr>
+        <p:txBody>
+          <a:bodyPr wrap="square" lIns="0" tIns="0" rIns="0" bIns="0" rtlCol="0" anchor="t"/>
+          <a:lstStyle/>
+          <a:p>
+            <a:pPr indent="0" marL="0">
+              <a:buNone/>
+            </a:pPr>
+            <a:r>
+              <a:rPr lang="en-US" sz="1300" dirty="0">
+                <a:solidFill>
+                  <a:srgbClr val="4A5568"/>
+                </a:solidFill>
+              </a:rPr>
+              <a:t>mean of 200 random splits (worst 85%)</a:t>
+            </a:r>
+            <a:endParaRPr lang="en-US" sz="1300" dirty="0"/>
+          </a:p>
+        </p:txBody>
+      </p:sp>
+      <p:sp>
+        <p:nvSpPr>
+          <p:cNvPr id="13" name="Text 10"/>
+          <p:cNvSpPr txBox="1"/>
+          <p:nvPr/>
+        </p:nvSpPr>
+        <p:spPr>
+          <a:xfrm>
+            <a:off x="6903720" y="3200400"/>
+            <a:ext cx="4754880" cy="822960"/>
+          </a:xfrm>
+          <a:prstGeom prst="rect">
+            <a:avLst/>
+          </a:prstGeom>
+          <a:noFill/>
+          <a:ln/>
+        </p:spPr>
+        <p:txBody>
+          <a:bodyPr wrap="square" lIns="0" tIns="0" rIns="0" bIns="0" rtlCol="0" anchor="t"/>
+          <a:lstStyle/>
+          <a:p>
+            <a:pPr indent="0" marL="0">
+              <a:buNone/>
+            </a:pPr>
+            <a:r>
+              <a:rPr lang="en-US" sz="1500" dirty="0">
+                <a:solidFill>
+                  <a:srgbClr val="4A5568"/>
+                </a:solidFill>
+              </a:rPr>
+              <a:t>The curve bends: as problem cues rise, a message needs more purchase cues to count as sales.</a:t>
+            </a:r>
+            <a:endParaRPr lang="en-US" sz="1500" dirty="0"/>
+          </a:p>
+        </p:txBody>
+      </p:sp>
+      <p:sp>
+        <p:nvSpPr>
+          <p:cNvPr id="14" name="Text 11"/>
+          <p:cNvSpPr txBox="1"/>
+          <p:nvPr/>
+        </p:nvSpPr>
+        <p:spPr>
+          <a:xfrm>
+            <a:off x="6903720" y="4114800"/>
+            <a:ext cx="4754880" cy="1463040"/>
+          </a:xfrm>
+          <a:prstGeom prst="rect">
+            <a:avLst/>
+          </a:prstGeom>
+          <a:noFill/>
+          <a:ln/>
+        </p:spPr>
+        <p:txBody>
+          <a:bodyPr wrap="square" lIns="0" tIns="0" rIns="0" bIns="0" rtlCol="0" anchor="t"/>
+          <a:lstStyle/>
+          <a:p>
+            <a:pPr indent="0" marL="0">
+              <a:buNone/>
+            </a:pPr>
+            <a:r>
+              <a:rPr lang="en-US" sz="1500" b="1" dirty="0">
+                <a:solidFill>
+                  <a:srgbClr val="14213D"/>
+                </a:solidFill>
+              </a:rPr>
+              <a:t>Weak spot: </a:t>
+            </a:r>
+            <a:pPr indent="0" marL="0">
+              <a:buNone/>
+            </a:pPr>
+            <a:r>
+              <a:rPr lang="en-US" sz="1500" dirty="0">
+                <a:solidFill>
+                  <a:srgbClr val="4A5568"/>
+                </a:solidFill>
+              </a:rPr>
+              <a:t>mixed intent 2/4. The circled messages have more purchase words than problem words, so it sends them to sales — it counts words, it cannot apply a priority rule.</a:t>
+            </a:r>
+            <a:endParaRPr lang="en-US" sz="1500" dirty="0"/>
+          </a:p>
+        </p:txBody>
+      </p:sp>
+      <p:sp>
+        <p:nvSpPr>
+          <p:cNvPr id="15" name="Text 12"/>
+          <p:cNvSpPr txBox="1"/>
+          <p:nvPr/>
+        </p:nvSpPr>
+        <p:spPr>
+          <a:xfrm>
             <a:off x="548640" y="6400800"/>
             <a:ext cx="10180015" cy="274320"/>
           </a:xfrm>
@@ -3268,21 +3583,21 @@
           <a:ln/>
         </p:spPr>
         <p:txBody>
-          <a:bodyPr wrap="square" lIns="0" tIns="0" rIns="0" bIns="0" rtlCol="0" anchor="ctr"/>
+          <a:bodyPr wrap="square" lIns="0" tIns="0" rIns="0" bIns="0" rtlCol="0" anchor="t"/>
           <a:lstStyle/>
           <a:p>
             <a:pPr indent="0" marL="0">
               <a:buNone/>
             </a:pPr>
             <a:r>
-              <a:rPr lang="en-US" sz="1100" dirty="0">
+              <a:rPr lang="en-US" sz="1000" dirty="0">
                 <a:solidFill>
                   <a:srgbClr val="6B7689"/>
                 </a:solidFill>
               </a:rPr>
-              <a:t>Omar · ML classifier</a:t>
-            </a:r>
-            <a:endParaRPr lang="en-US" sz="1100" dirty="0"/>
+              <a:t>Points are jittered slightly so overlapping messages stay visible</a:t>
+            </a:r>
+            <a:endParaRPr lang="en-US" sz="1000" dirty="0"/>
           </a:p>
         </p:txBody>
       </p:sp>
@@ -3358,14 +3673,41 @@
       </p:grpSpPr>
       <p:sp>
         <p:nvSpPr>
-          <p:cNvPr id="2" name="Text 0"/>
+          <p:cNvPr id="2" name="Shape 0"/>
+          <p:cNvSpPr/>
+          <p:nvPr/>
+        </p:nvSpPr>
+        <p:spPr>
+          <a:xfrm>
+            <a:off x="548640" y="329184"/>
+            <a:ext cx="960120" cy="274320"/>
+          </a:xfrm>
+          <a:prstGeom prst="roundRect">
+            <a:avLst>
+              <a:gd name="adj" fmla="val 50000"/>
+            </a:avLst>
+          </a:prstGeom>
+          <a:solidFill>
+            <a:srgbClr val="1B8A5A"/>
+          </a:solidFill>
+          <a:ln w="12700">
+            <a:solidFill>
+              <a:srgbClr val="1B8A5A"/>
+            </a:solidFill>
+            <a:prstDash val="solid"/>
+          </a:ln>
+        </p:spPr>
+      </p:sp>
+      <p:sp>
+        <p:nvSpPr>
+          <p:cNvPr id="3" name="Text 1"/>
           <p:cNvSpPr txBox="1"/>
           <p:nvPr/>
         </p:nvSpPr>
         <p:spPr>
           <a:xfrm>
-            <a:off x="548640" y="365760"/>
-            <a:ext cx="11094415" cy="274320"/>
+            <a:off x="548640" y="329184"/>
+            <a:ext cx="960120" cy="274320"/>
           </a:xfrm>
           <a:prstGeom prst="rect">
             <a:avLst/>
@@ -3377,27 +3719,63 @@
           <a:bodyPr wrap="square" lIns="0" tIns="0" rIns="0" bIns="0" rtlCol="0" anchor="ctr"/>
           <a:lstStyle/>
           <a:p>
+            <a:pPr algn="ctr" indent="0" marL="0">
+              <a:buNone/>
+            </a:pPr>
+            <a:r>
+              <a:rPr lang="en-US" sz="1000" b="1" spc="100" kern="0" dirty="0">
+                <a:solidFill>
+                  <a:srgbClr val="FFFFFF"/>
+                </a:solidFill>
+              </a:rPr>
+              <a:t>OMAR</a:t>
+            </a:r>
+            <a:endParaRPr lang="en-US" sz="1000" dirty="0"/>
+          </a:p>
+        </p:txBody>
+      </p:sp>
+      <p:sp>
+        <p:nvSpPr>
+          <p:cNvPr id="4" name="Text 2"/>
+          <p:cNvSpPr txBox="1"/>
+          <p:nvPr/>
+        </p:nvSpPr>
+        <p:spPr>
+          <a:xfrm>
+            <a:off x="1645920" y="356616"/>
+            <a:ext cx="8229600" cy="274320"/>
+          </a:xfrm>
+          <a:prstGeom prst="rect">
+            <a:avLst/>
+          </a:prstGeom>
+          <a:noFill/>
+          <a:ln/>
+        </p:spPr>
+        <p:txBody>
+          <a:bodyPr wrap="square" lIns="0" tIns="0" rIns="0" bIns="0" rtlCol="0" anchor="t"/>
+          <a:lstStyle/>
+          <a:p>
             <a:pPr indent="0" marL="0">
               <a:buNone/>
             </a:pPr>
             <a:r>
-              <a:rPr lang="en-US" sz="1200" b="1" spc="200" kern="0" dirty="0">
-                <a:solidFill>
-                  <a:srgbClr val="2A78D6"/>
+              <a:rPr lang="en-US" sz="1100" b="1" spc="200" kern="0" dirty="0">
+                <a:solidFill>
+                  <a:srgbClr val="1B8A5A"/>
                 </a:solidFill>
                 <a:latin typeface="Courier New" pitchFamily="34" charset="0"/>
                 <a:ea typeface="Courier New" pitchFamily="34" charset="-122"/>
                 <a:cs typeface="Courier New" pitchFamily="34" charset="-120"/>
               </a:rPr>
-              <a:t>COMPARISON</a:t>
-            </a:r>
-            <a:endParaRPr lang="en-US" sz="1200" dirty="0"/>
-          </a:p>
-        </p:txBody>
-      </p:sp>
-      <p:sp>
-        <p:nvSpPr>
-          <p:cNvPr id="3" name="Text 0"/>
+              <a:t>HEAD-TO-HEAD</a:t>
+            </a:r>
+            <a:endParaRPr lang="en-US" sz="1100" dirty="0"/>
+          </a:p>
+        </p:txBody>
+      </p:sp>
+      <p:sp>
+        <p:nvSpPr>
+          <p:cNvPr id="5" name="Text 0"/>
           <p:cNvSpPr/>
           <p:nvPr>
             <p:ph idx="100" type="title" hasCustomPrompt="1"/>
@@ -3405,8 +3783,8 @@
         </p:nvSpPr>
         <p:spPr>
           <a:xfrm>
-            <a:off x="548640" y="685800"/>
-            <a:ext cx="11094415" cy="822960"/>
+            <a:off x="548640" y="713232"/>
+            <a:ext cx="11094415" cy="777240"/>
           </a:xfrm>
           <a:prstGeom prst="rect">
             <a:avLst/>
@@ -3422,26 +3800,26 @@
               <a:buNone/>
             </a:pPr>
             <a:r>
-              <a:rPr lang="en-US" sz="3400" b="1" dirty="0">
+              <a:rPr lang="en-US" sz="3200" b="1" dirty="0">
                 <a:solidFill>
                   <a:srgbClr val="14213D"/>
                 </a:solidFill>
               </a:rPr>
-              <a:t>Tied on clear messages, apart on hard ones</a:t>
-            </a:r>
-            <a:endParaRPr lang="en-US" sz="3400" dirty="0"/>
+              <a:t>Each model wins where the other fails</a:t>
+            </a:r>
+            <a:endParaRPr lang="en-US" sz="3200" dirty="0"/>
           </a:p>
         </p:txBody>
       </p:sp>
       <p:graphicFrame>
         <p:nvGraphicFramePr>
-          <p:cNvPr id="4" name="Chart 0" descr=""/>
+          <p:cNvPr id="6" name="Chart 0" descr=""/>
           <p:cNvGraphicFramePr/>
           <p:nvPr/>
         </p:nvGraphicFramePr>
         <p:xfrm>
-          <a:off x="548640" y="1645920"/>
-          <a:ext cx="6675120" cy="4480560"/>
+          <a:off x="548640" y="1600200"/>
+          <a:ext cx="6217920" cy="4526280"/>
         </p:xfrm>
         <a:graphic xmlns:a="http://schemas.openxmlformats.org/drawingml/2006/main">
           <a:graphicData uri="http://schemas.openxmlformats.org/drawingml/2006/chart">
@@ -3449,16 +3827,1157 @@
           </a:graphicData>
         </a:graphic>
       </p:graphicFrame>
-      <p:sp>
-        <p:nvSpPr>
-          <p:cNvPr id="5" name="Text 2"/>
+      <p:graphicFrame>
+        <p:nvGraphicFramePr>
+          <p:cNvPr id="12" name="Table 0"/>
+          <p:cNvGraphicFramePr>
+            <a:graphicFrameLocks noGrp="1"/>
+          </p:cNvGraphicFramePr>
+          <p:nvPr>
+            <p:extLst>
+              <p:ext uri="{D42A27DB-BD31-4B8C-83A1-F6EECF244321}">
+                <p14:modId xmlns:p14="http://schemas.microsoft.com/office/powerpoint/2010/main" val="1579011935"/>
+              </p:ext>
+            </p:extLst>
+          </p:nvPr>
+        </p:nvGraphicFramePr>
+        <p:xfrm>
+          <a:off x="7022592" y="1737360"/>
+          <a:ext cx="4617720" cy="914400"/>
+        </p:xfrm>
+        <a:graphic>
+          <a:graphicData uri="http://schemas.openxmlformats.org/drawingml/2006/table">
+            <a:tbl>
+              <a:tblPr/>
+              <a:tblGrid>
+                <a:gridCol w="3063240"/>
+                <a:gridCol w="685800"/>
+                <a:gridCol w="868680"/>
+              </a:tblGrid>
+              <a:tr h="0">
+                <a:tc>
+                  <a:txBody>
+                    <a:bodyPr/>
+                    <a:lstStyle/>
+                    <a:p>
+                      <a:pPr indent="0" marL="0">
+                        <a:buNone/>
+                      </a:pPr>
+                      <a:r>
+                        <a:rPr lang="en-US" sz="1200" b="1" dirty="0">
+                          <a:solidFill>
+                            <a:srgbClr val="14213D"/>
+                          </a:solidFill>
+                        </a:rPr>
+                        <a:t>Hard message</a:t>
+                      </a:r>
+                      <a:endParaRPr lang="en-US" sz="1200" dirty="0"/>
+                    </a:p>
+                  </a:txBody>
+                  <a:tcPr marL="91440" marR="91440" marT="64008" marB="64008" anchor="ctr">
+                    <a:lnL w="9525" cap="flat" cmpd="sng" algn="ctr">
+                      <a:solidFill>
+                        <a:srgbClr val="D5D8DE"/>
+                      </a:solidFill>
+                      <a:prstDash val="solid"/>
+                      <a:round/>
+                      <a:headEnd type="none" w="med" len="med"/>
+                      <a:tailEnd type="none" w="med" len="med"/>
+                    </a:lnL>
+                    <a:lnR w="9525" cap="flat" cmpd="sng" algn="ctr">
+                      <a:solidFill>
+                        <a:srgbClr val="D5D8DE"/>
+                      </a:solidFill>
+                      <a:prstDash val="solid"/>
+                      <a:round/>
+                      <a:headEnd type="none" w="med" len="med"/>
+                      <a:tailEnd type="none" w="med" len="med"/>
+                    </a:lnR>
+                    <a:lnT w="9525" cap="flat" cmpd="sng" algn="ctr">
+                      <a:solidFill>
+                        <a:srgbClr val="D5D8DE"/>
+                      </a:solidFill>
+                      <a:prstDash val="solid"/>
+                      <a:round/>
+                      <a:headEnd type="none" w="med" len="med"/>
+                      <a:tailEnd type="none" w="med" len="med"/>
+                    </a:lnT>
+                    <a:lnB w="9525" cap="flat" cmpd="sng" algn="ctr">
+                      <a:solidFill>
+                        <a:srgbClr val="D5D8DE"/>
+                      </a:solidFill>
+                      <a:prstDash val="solid"/>
+                      <a:round/>
+                      <a:headEnd type="none" w="med" len="med"/>
+                      <a:tailEnd type="none" w="med" len="med"/>
+                    </a:lnB>
+                    <a:solidFill>
+                      <a:srgbClr val="E4E8EE"/>
+                    </a:solidFill>
+                  </a:tcPr>
+                </a:tc>
+                <a:tc>
+                  <a:txBody>
+                    <a:bodyPr/>
+                    <a:lstStyle/>
+                    <a:p>
+                      <a:pPr indent="0" marL="0">
+                        <a:buNone/>
+                      </a:pPr>
+                      <a:r>
+                        <a:rPr lang="en-US" sz="1200" b="1" dirty="0">
+                          <a:solidFill>
+                            <a:srgbClr val="14213D"/>
+                          </a:solidFill>
+                        </a:rPr>
+                        <a:t>ML</a:t>
+                      </a:r>
+                      <a:endParaRPr lang="en-US" sz="1200" dirty="0"/>
+                    </a:p>
+                  </a:txBody>
+                  <a:tcPr marL="91440" marR="91440" marT="64008" marB="64008" anchor="ctr">
+                    <a:lnL w="9525" cap="flat" cmpd="sng" algn="ctr">
+                      <a:solidFill>
+                        <a:srgbClr val="D5D8DE"/>
+                      </a:solidFill>
+                      <a:prstDash val="solid"/>
+                      <a:round/>
+                      <a:headEnd type="none" w="med" len="med"/>
+                      <a:tailEnd type="none" w="med" len="med"/>
+                    </a:lnL>
+                    <a:lnR w="9525" cap="flat" cmpd="sng" algn="ctr">
+                      <a:solidFill>
+                        <a:srgbClr val="D5D8DE"/>
+                      </a:solidFill>
+                      <a:prstDash val="solid"/>
+                      <a:round/>
+                      <a:headEnd type="none" w="med" len="med"/>
+                      <a:tailEnd type="none" w="med" len="med"/>
+                    </a:lnR>
+                    <a:lnT w="9525" cap="flat" cmpd="sng" algn="ctr">
+                      <a:solidFill>
+                        <a:srgbClr val="D5D8DE"/>
+                      </a:solidFill>
+                      <a:prstDash val="solid"/>
+                      <a:round/>
+                      <a:headEnd type="none" w="med" len="med"/>
+                      <a:tailEnd type="none" w="med" len="med"/>
+                    </a:lnT>
+                    <a:lnB w="9525" cap="flat" cmpd="sng" algn="ctr">
+                      <a:solidFill>
+                        <a:srgbClr val="D5D8DE"/>
+                      </a:solidFill>
+                      <a:prstDash val="solid"/>
+                      <a:round/>
+                      <a:headEnd type="none" w="med" len="med"/>
+                      <a:tailEnd type="none" w="med" len="med"/>
+                    </a:lnB>
+                    <a:solidFill>
+                      <a:srgbClr val="E4E8EE"/>
+                    </a:solidFill>
+                  </a:tcPr>
+                </a:tc>
+                <a:tc>
+                  <a:txBody>
+                    <a:bodyPr/>
+                    <a:lstStyle/>
+                    <a:p>
+                      <a:pPr indent="0" marL="0">
+                        <a:buNone/>
+                      </a:pPr>
+                      <a:r>
+                        <a:rPr lang="en-US" sz="1200" b="1" dirty="0">
+                          <a:solidFill>
+                            <a:srgbClr val="14213D"/>
+                          </a:solidFill>
+                        </a:rPr>
+                        <a:t>Decision</a:t>
+                      </a:r>
+                      <a:endParaRPr lang="en-US" sz="1200" dirty="0"/>
+                    </a:p>
+                  </a:txBody>
+                  <a:tcPr marL="91440" marR="91440" marT="64008" marB="64008" anchor="ctr">
+                    <a:lnL w="9525" cap="flat" cmpd="sng" algn="ctr">
+                      <a:solidFill>
+                        <a:srgbClr val="D5D8DE"/>
+                      </a:solidFill>
+                      <a:prstDash val="solid"/>
+                      <a:round/>
+                      <a:headEnd type="none" w="med" len="med"/>
+                      <a:tailEnd type="none" w="med" len="med"/>
+                    </a:lnL>
+                    <a:lnR w="9525" cap="flat" cmpd="sng" algn="ctr">
+                      <a:solidFill>
+                        <a:srgbClr val="D5D8DE"/>
+                      </a:solidFill>
+                      <a:prstDash val="solid"/>
+                      <a:round/>
+                      <a:headEnd type="none" w="med" len="med"/>
+                      <a:tailEnd type="none" w="med" len="med"/>
+                    </a:lnR>
+                    <a:lnT w="9525" cap="flat" cmpd="sng" algn="ctr">
+                      <a:solidFill>
+                        <a:srgbClr val="D5D8DE"/>
+                      </a:solidFill>
+                      <a:prstDash val="solid"/>
+                      <a:round/>
+                      <a:headEnd type="none" w="med" len="med"/>
+                      <a:tailEnd type="none" w="med" len="med"/>
+                    </a:lnT>
+                    <a:lnB w="9525" cap="flat" cmpd="sng" algn="ctr">
+                      <a:solidFill>
+                        <a:srgbClr val="D5D8DE"/>
+                      </a:solidFill>
+                      <a:prstDash val="solid"/>
+                      <a:round/>
+                      <a:headEnd type="none" w="med" len="med"/>
+                      <a:tailEnd type="none" w="med" len="med"/>
+                    </a:lnB>
+                    <a:solidFill>
+                      <a:srgbClr val="E4E8EE"/>
+                    </a:solidFill>
+                  </a:tcPr>
+                </a:tc>
+              </a:tr>
+              <a:tr h="0">
+                <a:tc>
+                  <a:txBody>
+                    <a:bodyPr/>
+                    <a:lstStyle/>
+                    <a:p>
+                      <a:pPr indent="0" marL="0">
+                        <a:buNone/>
+                      </a:pPr>
+                      <a:r>
+                        <a:rPr lang="en-US" sz="1200" dirty="0">
+                          <a:solidFill>
+                            <a:srgbClr val="14213D"/>
+                          </a:solidFill>
+                        </a:rPr>
+                        <a:t>“Your quote said 4 weeks… isn’t commissioned” (support)</a:t>
+                      </a:r>
+                      <a:endParaRPr lang="en-US" sz="1200" dirty="0"/>
+                    </a:p>
+                  </a:txBody>
+                  <a:tcPr marL="91440" marR="91440" marT="64008" marB="64008" anchor="ctr">
+                    <a:lnL w="9525" cap="flat" cmpd="sng" algn="ctr">
+                      <a:solidFill>
+                        <a:srgbClr val="D5D8DE"/>
+                      </a:solidFill>
+                      <a:prstDash val="solid"/>
+                      <a:round/>
+                      <a:headEnd type="none" w="med" len="med"/>
+                      <a:tailEnd type="none" w="med" len="med"/>
+                    </a:lnL>
+                    <a:lnR w="9525" cap="flat" cmpd="sng" algn="ctr">
+                      <a:solidFill>
+                        <a:srgbClr val="D5D8DE"/>
+                      </a:solidFill>
+                      <a:prstDash val="solid"/>
+                      <a:round/>
+                      <a:headEnd type="none" w="med" len="med"/>
+                      <a:tailEnd type="none" w="med" len="med"/>
+                    </a:lnR>
+                    <a:lnT w="9525" cap="flat" cmpd="sng" algn="ctr">
+                      <a:solidFill>
+                        <a:srgbClr val="D5D8DE"/>
+                      </a:solidFill>
+                      <a:prstDash val="solid"/>
+                      <a:round/>
+                      <a:headEnd type="none" w="med" len="med"/>
+                      <a:tailEnd type="none" w="med" len="med"/>
+                    </a:lnT>
+                    <a:lnB w="9525" cap="flat" cmpd="sng" algn="ctr">
+                      <a:solidFill>
+                        <a:srgbClr val="D5D8DE"/>
+                      </a:solidFill>
+                      <a:prstDash val="solid"/>
+                      <a:round/>
+                      <a:headEnd type="none" w="med" len="med"/>
+                      <a:tailEnd type="none" w="med" len="med"/>
+                    </a:lnB>
+                    <a:solidFill>
+                      <a:srgbClr val="FFFFFF"/>
+                    </a:solidFill>
+                  </a:tcPr>
+                </a:tc>
+                <a:tc>
+                  <a:txBody>
+                    <a:bodyPr/>
+                    <a:lstStyle/>
+                    <a:p>
+                      <a:pPr indent="0" marL="0">
+                        <a:buNone/>
+                      </a:pPr>
+                      <a:r>
+                        <a:rPr lang="en-US" sz="1200" dirty="0">
+                          <a:solidFill>
+                            <a:srgbClr val="14213D"/>
+                          </a:solidFill>
+                        </a:rPr>
+                        <a:t>✗</a:t>
+                      </a:r>
+                      <a:endParaRPr lang="en-US" sz="1200" dirty="0"/>
+                    </a:p>
+                  </a:txBody>
+                  <a:tcPr marL="91440" marR="91440" marT="64008" marB="64008" anchor="ctr">
+                    <a:lnL w="9525" cap="flat" cmpd="sng" algn="ctr">
+                      <a:solidFill>
+                        <a:srgbClr val="D5D8DE"/>
+                      </a:solidFill>
+                      <a:prstDash val="solid"/>
+                      <a:round/>
+                      <a:headEnd type="none" w="med" len="med"/>
+                      <a:tailEnd type="none" w="med" len="med"/>
+                    </a:lnL>
+                    <a:lnR w="9525" cap="flat" cmpd="sng" algn="ctr">
+                      <a:solidFill>
+                        <a:srgbClr val="D5D8DE"/>
+                      </a:solidFill>
+                      <a:prstDash val="solid"/>
+                      <a:round/>
+                      <a:headEnd type="none" w="med" len="med"/>
+                      <a:tailEnd type="none" w="med" len="med"/>
+                    </a:lnR>
+                    <a:lnT w="9525" cap="flat" cmpd="sng" algn="ctr">
+                      <a:solidFill>
+                        <a:srgbClr val="D5D8DE"/>
+                      </a:solidFill>
+                      <a:prstDash val="solid"/>
+                      <a:round/>
+                      <a:headEnd type="none" w="med" len="med"/>
+                      <a:tailEnd type="none" w="med" len="med"/>
+                    </a:lnT>
+                    <a:lnB w="9525" cap="flat" cmpd="sng" algn="ctr">
+                      <a:solidFill>
+                        <a:srgbClr val="D5D8DE"/>
+                      </a:solidFill>
+                      <a:prstDash val="solid"/>
+                      <a:round/>
+                      <a:headEnd type="none" w="med" len="med"/>
+                      <a:tailEnd type="none" w="med" len="med"/>
+                    </a:lnB>
+                    <a:solidFill>
+                      <a:srgbClr val="FFFFFF"/>
+                    </a:solidFill>
+                  </a:tcPr>
+                </a:tc>
+                <a:tc>
+                  <a:txBody>
+                    <a:bodyPr/>
+                    <a:lstStyle/>
+                    <a:p>
+                      <a:pPr indent="0" marL="0">
+                        <a:buNone/>
+                      </a:pPr>
+                      <a:r>
+                        <a:rPr lang="en-US" sz="1200" dirty="0">
+                          <a:solidFill>
+                            <a:srgbClr val="14213D"/>
+                          </a:solidFill>
+                        </a:rPr>
+                        <a:t>✓</a:t>
+                      </a:r>
+                      <a:endParaRPr lang="en-US" sz="1200" dirty="0"/>
+                    </a:p>
+                  </a:txBody>
+                  <a:tcPr marL="91440" marR="91440" marT="64008" marB="64008" anchor="ctr">
+                    <a:lnL w="9525" cap="flat" cmpd="sng" algn="ctr">
+                      <a:solidFill>
+                        <a:srgbClr val="D5D8DE"/>
+                      </a:solidFill>
+                      <a:prstDash val="solid"/>
+                      <a:round/>
+                      <a:headEnd type="none" w="med" len="med"/>
+                      <a:tailEnd type="none" w="med" len="med"/>
+                    </a:lnL>
+                    <a:lnR w="9525" cap="flat" cmpd="sng" algn="ctr">
+                      <a:solidFill>
+                        <a:srgbClr val="D5D8DE"/>
+                      </a:solidFill>
+                      <a:prstDash val="solid"/>
+                      <a:round/>
+                      <a:headEnd type="none" w="med" len="med"/>
+                      <a:tailEnd type="none" w="med" len="med"/>
+                    </a:lnR>
+                    <a:lnT w="9525" cap="flat" cmpd="sng" algn="ctr">
+                      <a:solidFill>
+                        <a:srgbClr val="D5D8DE"/>
+                      </a:solidFill>
+                      <a:prstDash val="solid"/>
+                      <a:round/>
+                      <a:headEnd type="none" w="med" len="med"/>
+                      <a:tailEnd type="none" w="med" len="med"/>
+                    </a:lnT>
+                    <a:lnB w="9525" cap="flat" cmpd="sng" algn="ctr">
+                      <a:solidFill>
+                        <a:srgbClr val="D5D8DE"/>
+                      </a:solidFill>
+                      <a:prstDash val="solid"/>
+                      <a:round/>
+                      <a:headEnd type="none" w="med" len="med"/>
+                      <a:tailEnd type="none" w="med" len="med"/>
+                    </a:lnB>
+                    <a:solidFill>
+                      <a:srgbClr val="FFFFFF"/>
+                    </a:solidFill>
+                  </a:tcPr>
+                </a:tc>
+              </a:tr>
+              <a:tr h="0">
+                <a:tc>
+                  <a:txBody>
+                    <a:bodyPr/>
+                    <a:lstStyle/>
+                    <a:p>
+                      <a:pPr indent="0" marL="0">
+                        <a:buNone/>
+                      </a:pPr>
+                      <a:r>
+                        <a:rPr lang="en-US" sz="1200" dirty="0">
+                          <a:solidFill>
+                            <a:srgbClr val="14213D"/>
+                          </a:solidFill>
+                        </a:rPr>
+                        <a:t>“Please quote the repair cost…” (support)</a:t>
+                      </a:r>
+                      <a:endParaRPr lang="en-US" sz="1200" dirty="0"/>
+                    </a:p>
+                  </a:txBody>
+                  <a:tcPr marL="91440" marR="91440" marT="64008" marB="64008" anchor="ctr">
+                    <a:lnL w="9525" cap="flat" cmpd="sng" algn="ctr">
+                      <a:solidFill>
+                        <a:srgbClr val="D5D8DE"/>
+                      </a:solidFill>
+                      <a:prstDash val="solid"/>
+                      <a:round/>
+                      <a:headEnd type="none" w="med" len="med"/>
+                      <a:tailEnd type="none" w="med" len="med"/>
+                    </a:lnL>
+                    <a:lnR w="9525" cap="flat" cmpd="sng" algn="ctr">
+                      <a:solidFill>
+                        <a:srgbClr val="D5D8DE"/>
+                      </a:solidFill>
+                      <a:prstDash val="solid"/>
+                      <a:round/>
+                      <a:headEnd type="none" w="med" len="med"/>
+                      <a:tailEnd type="none" w="med" len="med"/>
+                    </a:lnR>
+                    <a:lnT w="9525" cap="flat" cmpd="sng" algn="ctr">
+                      <a:solidFill>
+                        <a:srgbClr val="D5D8DE"/>
+                      </a:solidFill>
+                      <a:prstDash val="solid"/>
+                      <a:round/>
+                      <a:headEnd type="none" w="med" len="med"/>
+                      <a:tailEnd type="none" w="med" len="med"/>
+                    </a:lnT>
+                    <a:lnB w="9525" cap="flat" cmpd="sng" algn="ctr">
+                      <a:solidFill>
+                        <a:srgbClr val="D5D8DE"/>
+                      </a:solidFill>
+                      <a:prstDash val="solid"/>
+                      <a:round/>
+                      <a:headEnd type="none" w="med" len="med"/>
+                      <a:tailEnd type="none" w="med" len="med"/>
+                    </a:lnB>
+                    <a:solidFill>
+                      <a:srgbClr val="EEF0F3"/>
+                    </a:solidFill>
+                  </a:tcPr>
+                </a:tc>
+                <a:tc>
+                  <a:txBody>
+                    <a:bodyPr/>
+                    <a:lstStyle/>
+                    <a:p>
+                      <a:pPr indent="0" marL="0">
+                        <a:buNone/>
+                      </a:pPr>
+                      <a:r>
+                        <a:rPr lang="en-US" sz="1200" dirty="0">
+                          <a:solidFill>
+                            <a:srgbClr val="14213D"/>
+                          </a:solidFill>
+                        </a:rPr>
+                        <a:t>✗</a:t>
+                      </a:r>
+                      <a:endParaRPr lang="en-US" sz="1200" dirty="0"/>
+                    </a:p>
+                  </a:txBody>
+                  <a:tcPr marL="91440" marR="91440" marT="64008" marB="64008" anchor="ctr">
+                    <a:lnL w="9525" cap="flat" cmpd="sng" algn="ctr">
+                      <a:solidFill>
+                        <a:srgbClr val="D5D8DE"/>
+                      </a:solidFill>
+                      <a:prstDash val="solid"/>
+                      <a:round/>
+                      <a:headEnd type="none" w="med" len="med"/>
+                      <a:tailEnd type="none" w="med" len="med"/>
+                    </a:lnL>
+                    <a:lnR w="9525" cap="flat" cmpd="sng" algn="ctr">
+                      <a:solidFill>
+                        <a:srgbClr val="D5D8DE"/>
+                      </a:solidFill>
+                      <a:prstDash val="solid"/>
+                      <a:round/>
+                      <a:headEnd type="none" w="med" len="med"/>
+                      <a:tailEnd type="none" w="med" len="med"/>
+                    </a:lnR>
+                    <a:lnT w="9525" cap="flat" cmpd="sng" algn="ctr">
+                      <a:solidFill>
+                        <a:srgbClr val="D5D8DE"/>
+                      </a:solidFill>
+                      <a:prstDash val="solid"/>
+                      <a:round/>
+                      <a:headEnd type="none" w="med" len="med"/>
+                      <a:tailEnd type="none" w="med" len="med"/>
+                    </a:lnT>
+                    <a:lnB w="9525" cap="flat" cmpd="sng" algn="ctr">
+                      <a:solidFill>
+                        <a:srgbClr val="D5D8DE"/>
+                      </a:solidFill>
+                      <a:prstDash val="solid"/>
+                      <a:round/>
+                      <a:headEnd type="none" w="med" len="med"/>
+                      <a:tailEnd type="none" w="med" len="med"/>
+                    </a:lnB>
+                    <a:solidFill>
+                      <a:srgbClr val="EEF0F3"/>
+                    </a:solidFill>
+                  </a:tcPr>
+                </a:tc>
+                <a:tc>
+                  <a:txBody>
+                    <a:bodyPr/>
+                    <a:lstStyle/>
+                    <a:p>
+                      <a:pPr indent="0" marL="0">
+                        <a:buNone/>
+                      </a:pPr>
+                      <a:r>
+                        <a:rPr lang="en-US" sz="1200" dirty="0">
+                          <a:solidFill>
+                            <a:srgbClr val="14213D"/>
+                          </a:solidFill>
+                        </a:rPr>
+                        <a:t>✓</a:t>
+                      </a:r>
+                      <a:endParaRPr lang="en-US" sz="1200" dirty="0"/>
+                    </a:p>
+                  </a:txBody>
+                  <a:tcPr marL="91440" marR="91440" marT="64008" marB="64008" anchor="ctr">
+                    <a:lnL w="9525" cap="flat" cmpd="sng" algn="ctr">
+                      <a:solidFill>
+                        <a:srgbClr val="D5D8DE"/>
+                      </a:solidFill>
+                      <a:prstDash val="solid"/>
+                      <a:round/>
+                      <a:headEnd type="none" w="med" len="med"/>
+                      <a:tailEnd type="none" w="med" len="med"/>
+                    </a:lnL>
+                    <a:lnR w="9525" cap="flat" cmpd="sng" algn="ctr">
+                      <a:solidFill>
+                        <a:srgbClr val="D5D8DE"/>
+                      </a:solidFill>
+                      <a:prstDash val="solid"/>
+                      <a:round/>
+                      <a:headEnd type="none" w="med" len="med"/>
+                      <a:tailEnd type="none" w="med" len="med"/>
+                    </a:lnR>
+                    <a:lnT w="9525" cap="flat" cmpd="sng" algn="ctr">
+                      <a:solidFill>
+                        <a:srgbClr val="D5D8DE"/>
+                      </a:solidFill>
+                      <a:prstDash val="solid"/>
+                      <a:round/>
+                      <a:headEnd type="none" w="med" len="med"/>
+                      <a:tailEnd type="none" w="med" len="med"/>
+                    </a:lnT>
+                    <a:lnB w="9525" cap="flat" cmpd="sng" algn="ctr">
+                      <a:solidFill>
+                        <a:srgbClr val="D5D8DE"/>
+                      </a:solidFill>
+                      <a:prstDash val="solid"/>
+                      <a:round/>
+                      <a:headEnd type="none" w="med" len="med"/>
+                      <a:tailEnd type="none" w="med" len="med"/>
+                    </a:lnB>
+                    <a:solidFill>
+                      <a:srgbClr val="EEF0F3"/>
+                    </a:solidFill>
+                  </a:tcPr>
+                </a:tc>
+              </a:tr>
+              <a:tr h="0">
+                <a:tc>
+                  <a:txBody>
+                    <a:bodyPr/>
+                    <a:lstStyle/>
+                    <a:p>
+                      <a:pPr indent="0" marL="0">
+                        <a:buNone/>
+                      </a:pPr>
+                      <a:r>
+                        <a:rPr lang="en-US" sz="1200" dirty="0">
+                          <a:solidFill>
+                            <a:srgbClr val="14213D"/>
+                          </a:solidFill>
+                        </a:rPr>
+                        <a:t>“Not unhappy… want pricing for a second chiller” (sales)</a:t>
+                      </a:r>
+                      <a:endParaRPr lang="en-US" sz="1200" dirty="0"/>
+                    </a:p>
+                  </a:txBody>
+                  <a:tcPr marL="91440" marR="91440" marT="64008" marB="64008" anchor="ctr">
+                    <a:lnL w="9525" cap="flat" cmpd="sng" algn="ctr">
+                      <a:solidFill>
+                        <a:srgbClr val="D5D8DE"/>
+                      </a:solidFill>
+                      <a:prstDash val="solid"/>
+                      <a:round/>
+                      <a:headEnd type="none" w="med" len="med"/>
+                      <a:tailEnd type="none" w="med" len="med"/>
+                    </a:lnL>
+                    <a:lnR w="9525" cap="flat" cmpd="sng" algn="ctr">
+                      <a:solidFill>
+                        <a:srgbClr val="D5D8DE"/>
+                      </a:solidFill>
+                      <a:prstDash val="solid"/>
+                      <a:round/>
+                      <a:headEnd type="none" w="med" len="med"/>
+                      <a:tailEnd type="none" w="med" len="med"/>
+                    </a:lnR>
+                    <a:lnT w="9525" cap="flat" cmpd="sng" algn="ctr">
+                      <a:solidFill>
+                        <a:srgbClr val="D5D8DE"/>
+                      </a:solidFill>
+                      <a:prstDash val="solid"/>
+                      <a:round/>
+                      <a:headEnd type="none" w="med" len="med"/>
+                      <a:tailEnd type="none" w="med" len="med"/>
+                    </a:lnT>
+                    <a:lnB w="9525" cap="flat" cmpd="sng" algn="ctr">
+                      <a:solidFill>
+                        <a:srgbClr val="D5D8DE"/>
+                      </a:solidFill>
+                      <a:prstDash val="solid"/>
+                      <a:round/>
+                      <a:headEnd type="none" w="med" len="med"/>
+                      <a:tailEnd type="none" w="med" len="med"/>
+                    </a:lnB>
+                    <a:solidFill>
+                      <a:srgbClr val="FFFFFF"/>
+                    </a:solidFill>
+                  </a:tcPr>
+                </a:tc>
+                <a:tc>
+                  <a:txBody>
+                    <a:bodyPr/>
+                    <a:lstStyle/>
+                    <a:p>
+                      <a:pPr indent="0" marL="0">
+                        <a:buNone/>
+                      </a:pPr>
+                      <a:r>
+                        <a:rPr lang="en-US" sz="1200" dirty="0">
+                          <a:solidFill>
+                            <a:srgbClr val="14213D"/>
+                          </a:solidFill>
+                        </a:rPr>
+                        <a:t>✓</a:t>
+                      </a:r>
+                      <a:endParaRPr lang="en-US" sz="1200" dirty="0"/>
+                    </a:p>
+                  </a:txBody>
+                  <a:tcPr marL="91440" marR="91440" marT="64008" marB="64008" anchor="ctr">
+                    <a:lnL w="9525" cap="flat" cmpd="sng" algn="ctr">
+                      <a:solidFill>
+                        <a:srgbClr val="D5D8DE"/>
+                      </a:solidFill>
+                      <a:prstDash val="solid"/>
+                      <a:round/>
+                      <a:headEnd type="none" w="med" len="med"/>
+                      <a:tailEnd type="none" w="med" len="med"/>
+                    </a:lnL>
+                    <a:lnR w="9525" cap="flat" cmpd="sng" algn="ctr">
+                      <a:solidFill>
+                        <a:srgbClr val="D5D8DE"/>
+                      </a:solidFill>
+                      <a:prstDash val="solid"/>
+                      <a:round/>
+                      <a:headEnd type="none" w="med" len="med"/>
+                      <a:tailEnd type="none" w="med" len="med"/>
+                    </a:lnR>
+                    <a:lnT w="9525" cap="flat" cmpd="sng" algn="ctr">
+                      <a:solidFill>
+                        <a:srgbClr val="D5D8DE"/>
+                      </a:solidFill>
+                      <a:prstDash val="solid"/>
+                      <a:round/>
+                      <a:headEnd type="none" w="med" len="med"/>
+                      <a:tailEnd type="none" w="med" len="med"/>
+                    </a:lnT>
+                    <a:lnB w="9525" cap="flat" cmpd="sng" algn="ctr">
+                      <a:solidFill>
+                        <a:srgbClr val="D5D8DE"/>
+                      </a:solidFill>
+                      <a:prstDash val="solid"/>
+                      <a:round/>
+                      <a:headEnd type="none" w="med" len="med"/>
+                      <a:tailEnd type="none" w="med" len="med"/>
+                    </a:lnB>
+                    <a:solidFill>
+                      <a:srgbClr val="FFFFFF"/>
+                    </a:solidFill>
+                  </a:tcPr>
+                </a:tc>
+                <a:tc>
+                  <a:txBody>
+                    <a:bodyPr/>
+                    <a:lstStyle/>
+                    <a:p>
+                      <a:pPr indent="0" marL="0">
+                        <a:buNone/>
+                      </a:pPr>
+                      <a:r>
+                        <a:rPr lang="en-US" sz="1200" dirty="0">
+                          <a:solidFill>
+                            <a:srgbClr val="14213D"/>
+                          </a:solidFill>
+                        </a:rPr>
+                        <a:t>✗</a:t>
+                      </a:r>
+                      <a:endParaRPr lang="en-US" sz="1200" dirty="0"/>
+                    </a:p>
+                  </a:txBody>
+                  <a:tcPr marL="91440" marR="91440" marT="64008" marB="64008" anchor="ctr">
+                    <a:lnL w="9525" cap="flat" cmpd="sng" algn="ctr">
+                      <a:solidFill>
+                        <a:srgbClr val="D5D8DE"/>
+                      </a:solidFill>
+                      <a:prstDash val="solid"/>
+                      <a:round/>
+                      <a:headEnd type="none" w="med" len="med"/>
+                      <a:tailEnd type="none" w="med" len="med"/>
+                    </a:lnL>
+                    <a:lnR w="9525" cap="flat" cmpd="sng" algn="ctr">
+                      <a:solidFill>
+                        <a:srgbClr val="D5D8DE"/>
+                      </a:solidFill>
+                      <a:prstDash val="solid"/>
+                      <a:round/>
+                      <a:headEnd type="none" w="med" len="med"/>
+                      <a:tailEnd type="none" w="med" len="med"/>
+                    </a:lnR>
+                    <a:lnT w="9525" cap="flat" cmpd="sng" algn="ctr">
+                      <a:solidFill>
+                        <a:srgbClr val="D5D8DE"/>
+                      </a:solidFill>
+                      <a:prstDash val="solid"/>
+                      <a:round/>
+                      <a:headEnd type="none" w="med" len="med"/>
+                      <a:tailEnd type="none" w="med" len="med"/>
+                    </a:lnT>
+                    <a:lnB w="9525" cap="flat" cmpd="sng" algn="ctr">
+                      <a:solidFill>
+                        <a:srgbClr val="D5D8DE"/>
+                      </a:solidFill>
+                      <a:prstDash val="solid"/>
+                      <a:round/>
+                      <a:headEnd type="none" w="med" len="med"/>
+                      <a:tailEnd type="none" w="med" len="med"/>
+                    </a:lnB>
+                    <a:solidFill>
+                      <a:srgbClr val="FFFFFF"/>
+                    </a:solidFill>
+                  </a:tcPr>
+                </a:tc>
+              </a:tr>
+              <a:tr h="0">
+                <a:tc>
+                  <a:txBody>
+                    <a:bodyPr/>
+                    <a:lstStyle/>
+                    <a:p>
+                      <a:pPr indent="0" marL="0">
+                        <a:buNone/>
+                      </a:pPr>
+                      <a:r>
+                        <a:rPr lang="en-US" sz="1200" dirty="0">
+                          <a:solidFill>
+                            <a:srgbClr val="14213D"/>
+                          </a:solidFill>
+                        </a:rPr>
+                        <a:t>“Order 20 more filters like last time” (sales)</a:t>
+                      </a:r>
+                      <a:endParaRPr lang="en-US" sz="1200" dirty="0"/>
+                    </a:p>
+                  </a:txBody>
+                  <a:tcPr marL="91440" marR="91440" marT="64008" marB="64008" anchor="ctr">
+                    <a:lnL w="9525" cap="flat" cmpd="sng" algn="ctr">
+                      <a:solidFill>
+                        <a:srgbClr val="D5D8DE"/>
+                      </a:solidFill>
+                      <a:prstDash val="solid"/>
+                      <a:round/>
+                      <a:headEnd type="none" w="med" len="med"/>
+                      <a:tailEnd type="none" w="med" len="med"/>
+                    </a:lnL>
+                    <a:lnR w="9525" cap="flat" cmpd="sng" algn="ctr">
+                      <a:solidFill>
+                        <a:srgbClr val="D5D8DE"/>
+                      </a:solidFill>
+                      <a:prstDash val="solid"/>
+                      <a:round/>
+                      <a:headEnd type="none" w="med" len="med"/>
+                      <a:tailEnd type="none" w="med" len="med"/>
+                    </a:lnR>
+                    <a:lnT w="9525" cap="flat" cmpd="sng" algn="ctr">
+                      <a:solidFill>
+                        <a:srgbClr val="D5D8DE"/>
+                      </a:solidFill>
+                      <a:prstDash val="solid"/>
+                      <a:round/>
+                      <a:headEnd type="none" w="med" len="med"/>
+                      <a:tailEnd type="none" w="med" len="med"/>
+                    </a:lnT>
+                    <a:lnB w="9525" cap="flat" cmpd="sng" algn="ctr">
+                      <a:solidFill>
+                        <a:srgbClr val="D5D8DE"/>
+                      </a:solidFill>
+                      <a:prstDash val="solid"/>
+                      <a:round/>
+                      <a:headEnd type="none" w="med" len="med"/>
+                      <a:tailEnd type="none" w="med" len="med"/>
+                    </a:lnB>
+                    <a:solidFill>
+                      <a:srgbClr val="EEF0F3"/>
+                    </a:solidFill>
+                  </a:tcPr>
+                </a:tc>
+                <a:tc>
+                  <a:txBody>
+                    <a:bodyPr/>
+                    <a:lstStyle/>
+                    <a:p>
+                      <a:pPr indent="0" marL="0">
+                        <a:buNone/>
+                      </a:pPr>
+                      <a:r>
+                        <a:rPr lang="en-US" sz="1200" dirty="0">
+                          <a:solidFill>
+                            <a:srgbClr val="14213D"/>
+                          </a:solidFill>
+                        </a:rPr>
+                        <a:t>✓</a:t>
+                      </a:r>
+                      <a:endParaRPr lang="en-US" sz="1200" dirty="0"/>
+                    </a:p>
+                  </a:txBody>
+                  <a:tcPr marL="91440" marR="91440" marT="64008" marB="64008" anchor="ctr">
+                    <a:lnL w="9525" cap="flat" cmpd="sng" algn="ctr">
+                      <a:solidFill>
+                        <a:srgbClr val="D5D8DE"/>
+                      </a:solidFill>
+                      <a:prstDash val="solid"/>
+                      <a:round/>
+                      <a:headEnd type="none" w="med" len="med"/>
+                      <a:tailEnd type="none" w="med" len="med"/>
+                    </a:lnL>
+                    <a:lnR w="9525" cap="flat" cmpd="sng" algn="ctr">
+                      <a:solidFill>
+                        <a:srgbClr val="D5D8DE"/>
+                      </a:solidFill>
+                      <a:prstDash val="solid"/>
+                      <a:round/>
+                      <a:headEnd type="none" w="med" len="med"/>
+                      <a:tailEnd type="none" w="med" len="med"/>
+                    </a:lnR>
+                    <a:lnT w="9525" cap="flat" cmpd="sng" algn="ctr">
+                      <a:solidFill>
+                        <a:srgbClr val="D5D8DE"/>
+                      </a:solidFill>
+                      <a:prstDash val="solid"/>
+                      <a:round/>
+                      <a:headEnd type="none" w="med" len="med"/>
+                      <a:tailEnd type="none" w="med" len="med"/>
+                    </a:lnT>
+                    <a:lnB w="9525" cap="flat" cmpd="sng" algn="ctr">
+                      <a:solidFill>
+                        <a:srgbClr val="D5D8DE"/>
+                      </a:solidFill>
+                      <a:prstDash val="solid"/>
+                      <a:round/>
+                      <a:headEnd type="none" w="med" len="med"/>
+                      <a:tailEnd type="none" w="med" len="med"/>
+                    </a:lnB>
+                    <a:solidFill>
+                      <a:srgbClr val="EEF0F3"/>
+                    </a:solidFill>
+                  </a:tcPr>
+                </a:tc>
+                <a:tc>
+                  <a:txBody>
+                    <a:bodyPr/>
+                    <a:lstStyle/>
+                    <a:p>
+                      <a:pPr indent="0" marL="0">
+                        <a:buNone/>
+                      </a:pPr>
+                      <a:r>
+                        <a:rPr lang="en-US" sz="1200" dirty="0">
+                          <a:solidFill>
+                            <a:srgbClr val="14213D"/>
+                          </a:solidFill>
+                        </a:rPr>
+                        <a:t>✗</a:t>
+                      </a:r>
+                      <a:endParaRPr lang="en-US" sz="1200" dirty="0"/>
+                    </a:p>
+                  </a:txBody>
+                  <a:tcPr marL="91440" marR="91440" marT="64008" marB="64008" anchor="ctr">
+                    <a:lnL w="9525" cap="flat" cmpd="sng" algn="ctr">
+                      <a:solidFill>
+                        <a:srgbClr val="D5D8DE"/>
+                      </a:solidFill>
+                      <a:prstDash val="solid"/>
+                      <a:round/>
+                      <a:headEnd type="none" w="med" len="med"/>
+                      <a:tailEnd type="none" w="med" len="med"/>
+                    </a:lnL>
+                    <a:lnR w="9525" cap="flat" cmpd="sng" algn="ctr">
+                      <a:solidFill>
+                        <a:srgbClr val="D5D8DE"/>
+                      </a:solidFill>
+                      <a:prstDash val="solid"/>
+                      <a:round/>
+                      <a:headEnd type="none" w="med" len="med"/>
+                      <a:tailEnd type="none" w="med" len="med"/>
+                    </a:lnR>
+                    <a:lnT w="9525" cap="flat" cmpd="sng" algn="ctr">
+                      <a:solidFill>
+                        <a:srgbClr val="D5D8DE"/>
+                      </a:solidFill>
+                      <a:prstDash val="solid"/>
+                      <a:round/>
+                      <a:headEnd type="none" w="med" len="med"/>
+                      <a:tailEnd type="none" w="med" len="med"/>
+                    </a:lnT>
+                    <a:lnB w="9525" cap="flat" cmpd="sng" algn="ctr">
+                      <a:solidFill>
+                        <a:srgbClr val="D5D8DE"/>
+                      </a:solidFill>
+                      <a:prstDash val="solid"/>
+                      <a:round/>
+                      <a:headEnd type="none" w="med" len="med"/>
+                      <a:tailEnd type="none" w="med" len="med"/>
+                    </a:lnB>
+                    <a:solidFill>
+                      <a:srgbClr val="EEF0F3"/>
+                    </a:solidFill>
+                  </a:tcPr>
+                </a:tc>
+              </a:tr>
+              <a:tr h="0">
+                <a:tc>
+                  <a:txBody>
+                    <a:bodyPr/>
+                    <a:lstStyle/>
+                    <a:p>
+                      <a:pPr indent="0" marL="0">
+                        <a:buNone/>
+                      </a:pPr>
+                      <a:r>
+                        <a:rPr lang="en-US" sz="1200" dirty="0">
+                          <a:solidFill>
+                            <a:srgbClr val="14213D"/>
+                          </a:solidFill>
+                        </a:rPr>
+                        <a:t>“We can’t decide between… compressors” (sales)</a:t>
+                      </a:r>
+                      <a:endParaRPr lang="en-US" sz="1200" dirty="0"/>
+                    </a:p>
+                  </a:txBody>
+                  <a:tcPr marL="91440" marR="91440" marT="64008" marB="64008" anchor="ctr">
+                    <a:lnL w="9525" cap="flat" cmpd="sng" algn="ctr">
+                      <a:solidFill>
+                        <a:srgbClr val="D5D8DE"/>
+                      </a:solidFill>
+                      <a:prstDash val="solid"/>
+                      <a:round/>
+                      <a:headEnd type="none" w="med" len="med"/>
+                      <a:tailEnd type="none" w="med" len="med"/>
+                    </a:lnL>
+                    <a:lnR w="9525" cap="flat" cmpd="sng" algn="ctr">
+                      <a:solidFill>
+                        <a:srgbClr val="D5D8DE"/>
+                      </a:solidFill>
+                      <a:prstDash val="solid"/>
+                      <a:round/>
+                      <a:headEnd type="none" w="med" len="med"/>
+                      <a:tailEnd type="none" w="med" len="med"/>
+                    </a:lnR>
+                    <a:lnT w="9525" cap="flat" cmpd="sng" algn="ctr">
+                      <a:solidFill>
+                        <a:srgbClr val="D5D8DE"/>
+                      </a:solidFill>
+                      <a:prstDash val="solid"/>
+                      <a:round/>
+                      <a:headEnd type="none" w="med" len="med"/>
+                      <a:tailEnd type="none" w="med" len="med"/>
+                    </a:lnT>
+                    <a:lnB w="9525" cap="flat" cmpd="sng" algn="ctr">
+                      <a:solidFill>
+                        <a:srgbClr val="D5D8DE"/>
+                      </a:solidFill>
+                      <a:prstDash val="solid"/>
+                      <a:round/>
+                      <a:headEnd type="none" w="med" len="med"/>
+                      <a:tailEnd type="none" w="med" len="med"/>
+                    </a:lnB>
+                    <a:solidFill>
+                      <a:srgbClr val="FFFFFF"/>
+                    </a:solidFill>
+                  </a:tcPr>
+                </a:tc>
+                <a:tc>
+                  <a:txBody>
+                    <a:bodyPr/>
+                    <a:lstStyle/>
+                    <a:p>
+                      <a:pPr indent="0" marL="0">
+                        <a:buNone/>
+                      </a:pPr>
+                      <a:r>
+                        <a:rPr lang="en-US" sz="1200" dirty="0">
+                          <a:solidFill>
+                            <a:srgbClr val="14213D"/>
+                          </a:solidFill>
+                        </a:rPr>
+                        <a:t>✗</a:t>
+                      </a:r>
+                      <a:endParaRPr lang="en-US" sz="1200" dirty="0"/>
+                    </a:p>
+                  </a:txBody>
+                  <a:tcPr marL="91440" marR="91440" marT="64008" marB="64008" anchor="ctr">
+                    <a:lnL w="9525" cap="flat" cmpd="sng" algn="ctr">
+                      <a:solidFill>
+                        <a:srgbClr val="D5D8DE"/>
+                      </a:solidFill>
+                      <a:prstDash val="solid"/>
+                      <a:round/>
+                      <a:headEnd type="none" w="med" len="med"/>
+                      <a:tailEnd type="none" w="med" len="med"/>
+                    </a:lnL>
+                    <a:lnR w="9525" cap="flat" cmpd="sng" algn="ctr">
+                      <a:solidFill>
+                        <a:srgbClr val="D5D8DE"/>
+                      </a:solidFill>
+                      <a:prstDash val="solid"/>
+                      <a:round/>
+                      <a:headEnd type="none" w="med" len="med"/>
+                      <a:tailEnd type="none" w="med" len="med"/>
+                    </a:lnR>
+                    <a:lnT w="9525" cap="flat" cmpd="sng" algn="ctr">
+                      <a:solidFill>
+                        <a:srgbClr val="D5D8DE"/>
+                      </a:solidFill>
+                      <a:prstDash val="solid"/>
+                      <a:round/>
+                      <a:headEnd type="none" w="med" len="med"/>
+                      <a:tailEnd type="none" w="med" len="med"/>
+                    </a:lnT>
+                    <a:lnB w="9525" cap="flat" cmpd="sng" algn="ctr">
+                      <a:solidFill>
+                        <a:srgbClr val="D5D8DE"/>
+                      </a:solidFill>
+                      <a:prstDash val="solid"/>
+                      <a:round/>
+                      <a:headEnd type="none" w="med" len="med"/>
+                      <a:tailEnd type="none" w="med" len="med"/>
+                    </a:lnB>
+                    <a:solidFill>
+                      <a:srgbClr val="FFFFFF"/>
+                    </a:solidFill>
+                  </a:tcPr>
+                </a:tc>
+                <a:tc>
+                  <a:txBody>
+                    <a:bodyPr/>
+                    <a:lstStyle/>
+                    <a:p>
+                      <a:pPr indent="0" marL="0">
+                        <a:buNone/>
+                      </a:pPr>
+                      <a:r>
+                        <a:rPr lang="en-US" sz="1200" dirty="0">
+                          <a:solidFill>
+                            <a:srgbClr val="14213D"/>
+                          </a:solidFill>
+                        </a:rPr>
+                        <a:t>✗</a:t>
+                      </a:r>
+                      <a:endParaRPr lang="en-US" sz="1200" dirty="0"/>
+                    </a:p>
+                  </a:txBody>
+                  <a:tcPr marL="91440" marR="91440" marT="64008" marB="64008" anchor="ctr">
+                    <a:lnL w="9525" cap="flat" cmpd="sng" algn="ctr">
+                      <a:solidFill>
+                        <a:srgbClr val="D5D8DE"/>
+                      </a:solidFill>
+                      <a:prstDash val="solid"/>
+                      <a:round/>
+                      <a:headEnd type="none" w="med" len="med"/>
+                      <a:tailEnd type="none" w="med" len="med"/>
+                    </a:lnL>
+                    <a:lnR w="9525" cap="flat" cmpd="sng" algn="ctr">
+                      <a:solidFill>
+                        <a:srgbClr val="D5D8DE"/>
+                      </a:solidFill>
+                      <a:prstDash val="solid"/>
+                      <a:round/>
+                      <a:headEnd type="none" w="med" len="med"/>
+                      <a:tailEnd type="none" w="med" len="med"/>
+                    </a:lnR>
+                    <a:lnT w="9525" cap="flat" cmpd="sng" algn="ctr">
+                      <a:solidFill>
+                        <a:srgbClr val="D5D8DE"/>
+                      </a:solidFill>
+                      <a:prstDash val="solid"/>
+                      <a:round/>
+                      <a:headEnd type="none" w="med" len="med"/>
+                      <a:tailEnd type="none" w="med" len="med"/>
+                    </a:lnT>
+                    <a:lnB w="9525" cap="flat" cmpd="sng" algn="ctr">
+                      <a:solidFill>
+                        <a:srgbClr val="D5D8DE"/>
+                      </a:solidFill>
+                      <a:prstDash val="solid"/>
+                      <a:round/>
+                      <a:headEnd type="none" w="med" len="med"/>
+                      <a:tailEnd type="none" w="med" len="med"/>
+                    </a:lnB>
+                    <a:solidFill>
+                      <a:srgbClr val="FFFFFF"/>
+                    </a:solidFill>
+                  </a:tcPr>
+                </a:tc>
+              </a:tr>
+            </a:tbl>
+          </a:graphicData>
+        </a:graphic>
+      </p:graphicFrame>
+      <p:sp>
+        <p:nvSpPr>
+          <p:cNvPr id="8" name="Text 4"/>
           <p:cNvSpPr txBox="1"/>
           <p:nvPr/>
         </p:nvSpPr>
         <p:spPr>
           <a:xfrm>
-            <a:off x="7589520" y="1828800"/>
-            <a:ext cx="4050792" cy="731520"/>
+            <a:off x="548640" y="6400800"/>
+            <a:ext cx="10180015" cy="274320"/>
           </a:xfrm>
           <a:prstGeom prst="rect">
             <a:avLst/>
@@ -3474,162 +4993,14 @@
               <a:buNone/>
             </a:pPr>
             <a:r>
-              <a:rPr lang="en-US" sz="1600" b="1" dirty="0">
-                <a:solidFill>
-                  <a:srgbClr val="14213D"/>
-                </a:solidFill>
-              </a:rPr>
-              <a:t>ML errors on the new hard messages, all from counting words:</a:t>
-            </a:r>
-            <a:endParaRPr lang="en-US" sz="1600" dirty="0"/>
-          </a:p>
-        </p:txBody>
-      </p:sp>
-      <p:sp>
-        <p:nvSpPr>
-          <p:cNvPr id="6" name="Text 3"/>
-          <p:cNvSpPr txBox="1"/>
-          <p:nvPr/>
-        </p:nvSpPr>
-        <p:spPr>
-          <a:xfrm>
-            <a:off x="7589520" y="2651760"/>
-            <a:ext cx="4050792" cy="2194560"/>
-          </a:xfrm>
-          <a:prstGeom prst="rect">
-            <a:avLst/>
-          </a:prstGeom>
-          <a:noFill/>
-          <a:ln/>
-        </p:spPr>
-        <p:txBody>
-          <a:bodyPr wrap="square" lIns="0" tIns="0" rIns="0" bIns="0" rtlCol="0" anchor="t"/>
-          <a:lstStyle/>
-          <a:p>
-            <a:pPr marL="342900" indent="-342900">
-              <a:spcAft>
-                <a:spcPts val="1000"/>
-              </a:spcAft>
-              <a:buSzPct val="100000"/>
-              <a:buChar char="•"/>
-            </a:pPr>
-            <a:r>
-              <a:rPr lang="en-US" sz="1500" dirty="0">
-                <a:solidFill>
-                  <a:srgbClr val="4A5568"/>
-                </a:solidFill>
-              </a:rPr>
-              <a:t>“Your quote said 4 weeks… isn’t commissioned” → sales</a:t>
-            </a:r>
-            <a:endParaRPr lang="en-US" sz="1500" dirty="0"/>
-          </a:p>
-          <a:p>
-            <a:pPr marL="342900" indent="-342900">
-              <a:spcAft>
-                <a:spcPts val="1000"/>
-              </a:spcAft>
-              <a:buSzPct val="100000"/>
-              <a:buChar char="•"/>
-            </a:pPr>
-            <a:r>
-              <a:rPr lang="en-US" sz="1500" dirty="0">
-                <a:solidFill>
-                  <a:srgbClr val="4A5568"/>
-                </a:solidFill>
-              </a:rPr>
-              <a:t>“Please quote the repair cost…” → sales</a:t>
-            </a:r>
-            <a:endParaRPr lang="en-US" sz="1500" dirty="0"/>
-          </a:p>
-          <a:p>
-            <a:pPr marL="342900" indent="-342900">
-              <a:spcAft>
-                <a:spcPts val="1000"/>
-              </a:spcAft>
-              <a:buSzPct val="100000"/>
-              <a:buChar char="•"/>
-            </a:pPr>
-            <a:r>
-              <a:rPr lang="en-US" sz="1500" dirty="0">
-                <a:solidFill>
-                  <a:srgbClr val="4A5568"/>
-                </a:solidFill>
-              </a:rPr>
-              <a:t>“We can’t decide between… compressors” → support</a:t>
-            </a:r>
-            <a:endParaRPr lang="en-US" sz="1500" dirty="0"/>
-          </a:p>
-        </p:txBody>
-      </p:sp>
-      <p:sp>
-        <p:nvSpPr>
-          <p:cNvPr id="7" name="Text 4"/>
-          <p:cNvSpPr txBox="1"/>
-          <p:nvPr/>
-        </p:nvSpPr>
-        <p:spPr>
-          <a:xfrm>
-            <a:off x="7589520" y="5120640"/>
-            <a:ext cx="4050792" cy="548640"/>
-          </a:xfrm>
-          <a:prstGeom prst="rect">
-            <a:avLst/>
-          </a:prstGeom>
-          <a:noFill/>
-          <a:ln/>
-        </p:spPr>
-        <p:txBody>
-          <a:bodyPr wrap="square" lIns="0" tIns="0" rIns="0" bIns="0" rtlCol="0" anchor="t"/>
-          <a:lstStyle/>
-          <a:p>
-            <a:pPr indent="0" marL="0">
-              <a:buNone/>
-            </a:pPr>
-            <a:r>
-              <a:rPr lang="en-US" sz="1300" dirty="0">
+              <a:rPr lang="en-US" sz="1000" dirty="0">
                 <a:solidFill>
                   <a:srgbClr val="6B7689"/>
                 </a:solidFill>
               </a:rPr>
-              <a:t>Counts: ML 20/20, 2/4, 5/8 · Decision model 20/20, 4/4, 8/8</a:t>
-            </a:r>
-            <a:endParaRPr lang="en-US" sz="1300" dirty="0"/>
-          </a:p>
-        </p:txBody>
-      </p:sp>
-      <p:sp>
-        <p:nvSpPr>
-          <p:cNvPr id="8" name="Text 5"/>
-          <p:cNvSpPr txBox="1"/>
-          <p:nvPr/>
-        </p:nvSpPr>
-        <p:spPr>
-          <a:xfrm>
-            <a:off x="548640" y="6400800"/>
-            <a:ext cx="10180015" cy="274320"/>
-          </a:xfrm>
-          <a:prstGeom prst="rect">
-            <a:avLst/>
-          </a:prstGeom>
-          <a:noFill/>
-          <a:ln/>
-        </p:spPr>
-        <p:txBody>
-          <a:bodyPr wrap="square" lIns="0" tIns="0" rIns="0" bIns="0" rtlCol="0" anchor="ctr"/>
-          <a:lstStyle/>
-          <a:p>
-            <a:pPr indent="0" marL="0">
-              <a:buNone/>
-            </a:pPr>
-            <a:r>
-              <a:rPr lang="en-US" sz="1100" dirty="0">
-                <a:solidFill>
-                  <a:srgbClr val="6B7689"/>
-                </a:solidFill>
-              </a:rPr>
-              <a:t>Omar · Comparison · Results: evaluate.py → results.json</a:t>
-            </a:r>
-            <a:endParaRPr lang="en-US" sz="1100" dirty="0"/>
+              <a:t>Same 5/8 on the hard set, but with different mistakes. Counts: ML 20/20 · 2/4 · 5/8 — decision model 16/20 · 4/4 · 5/8</a:t>
+            </a:r>
+            <a:endParaRPr lang="en-US" sz="1000" dirty="0"/>
           </a:p>
         </p:txBody>
       </p:sp>
@@ -3721,14 +5092,14 @@
           <a:ln/>
         </p:spPr>
         <p:txBody>
-          <a:bodyPr wrap="square" lIns="0" tIns="0" rIns="0" bIns="0" rtlCol="0" anchor="ctr"/>
+          <a:bodyPr wrap="square" lIns="0" tIns="0" rIns="0" bIns="0" rtlCol="0" anchor="t"/>
           <a:lstStyle/>
           <a:p>
             <a:pPr indent="0" marL="0">
               <a:buNone/>
             </a:pPr>
             <a:r>
-              <a:rPr lang="en-US" sz="1200" b="1" spc="200" kern="0" dirty="0">
+              <a:rPr lang="en-US" sz="1100" b="1" spc="200" kern="0" dirty="0">
                 <a:solidFill>
                   <a:srgbClr val="8FB8EE"/>
                 </a:solidFill>
@@ -3738,7 +5109,7 @@
               </a:rPr>
               <a:t>RECOMMENDATION FOR KIO</a:t>
             </a:r>
-            <a:endParaRPr lang="en-US" sz="1200" dirty="0"/>
+            <a:endParaRPr lang="en-US" sz="1100" dirty="0"/>
           </a:p>
         </p:txBody>
       </p:sp>
@@ -3752,7 +5123,7 @@
         </p:nvSpPr>
         <p:spPr>
           <a:xfrm>
-            <a:off x="548640" y="685800"/>
+            <a:off x="548640" y="713232"/>
             <a:ext cx="11094415" cy="1371600"/>
           </a:xfrm>
           <a:prstGeom prst="rect">
@@ -3769,14 +5140,14 @@
               <a:buNone/>
             </a:pPr>
             <a:r>
-              <a:rPr lang="en-US" sz="3600" b="1" dirty="0">
+              <a:rPr lang="en-US" sz="3400" b="1" dirty="0">
                 <a:solidFill>
                   <a:srgbClr val="F7F6F2"/>
                 </a:solidFill>
               </a:rPr>
-              <a:t>Use the decision model as the router, and keep the classifier as a fallback</a:t>
-            </a:r>
-            <a:endParaRPr lang="en-US" sz="3600" dirty="0"/>
+              <a:t>Keep the classifier as the main router, and call the decision model only for messages that mix both kinds of cues</a:t>
+            </a:r>
+            <a:endParaRPr lang="en-US" sz="3400" dirty="0"/>
           </a:p>
         </p:txBody>
       </p:sp>
@@ -3886,7 +5257,7 @@
         <p:spPr>
           <a:xfrm>
             <a:off x="548640" y="4069080"/>
-            <a:ext cx="3515258" cy="1463040"/>
+            <a:ext cx="3515258" cy="1828800"/>
           </a:xfrm>
           <a:prstGeom prst="rect">
             <a:avLst/>
@@ -3907,7 +5278,7 @@
                   <a:srgbClr val="C9D3E3"/>
                 </a:solidFill>
               </a:rPr>
-              <a:t>Mixed intent and negation are common in real chats, and that is where the classifier fails and costs customers.</a:t>
+              <a:t>The classifier is perfect on clear messages and instant; the decision model is the one that handles mixed intent.</a:t>
             </a:r>
             <a:endParaRPr lang="en-US" sz="1500" dirty="0"/>
           </a:p>
@@ -4004,7 +5375,7 @@
                   <a:srgbClr val="F7F6F2"/>
                 </a:solidFill>
               </a:rPr>
-              <a:t>Fallback</a:t>
+              <a:t>How</a:t>
             </a:r>
             <a:endParaRPr lang="en-US" sz="1900" dirty="0"/>
           </a:p>
@@ -4019,7 +5390,7 @@
         <p:spPr>
           <a:xfrm>
             <a:off x="4338218" y="4069080"/>
-            <a:ext cx="3515258" cy="1463040"/>
+            <a:ext cx="3515258" cy="1828800"/>
           </a:xfrm>
           <a:prstGeom prst="rect">
             <a:avLst/>
@@ -4040,7 +5411,7 @@
                   <a:srgbClr val="C9D3E3"/>
                 </a:solidFill>
               </a:rPr>
-              <a:t>If the API is down or the output is invalid, the free local classifier routes instead; when unsure, default to support.</a:t>
+              <a:t>If a message has both problem and purchase cues, ask the decision model; otherwise use the classifier. On our data this hybrid scored 19/20, 3/4 and 6/8.</a:t>
             </a:r>
             <a:endParaRPr lang="en-US" sz="1500" dirty="0"/>
           </a:p>
@@ -4137,7 +5508,7 @@
                   <a:srgbClr val="F7F6F2"/>
                 </a:solidFill>
               </a:rPr>
-              <a:t>Before launch</a:t>
+              <a:t>Caveat</a:t>
             </a:r>
             <a:endParaRPr lang="en-US" sz="1900" dirty="0"/>
           </a:p>
@@ -4152,7 +5523,7 @@
         <p:spPr>
           <a:xfrm>
             <a:off x="8127797" y="4069080"/>
-            <a:ext cx="3515258" cy="1463040"/>
+            <a:ext cx="3515258" cy="1828800"/>
           </a:xfrm>
           <a:prstGeom prst="rect">
             <a:avLst/>
@@ -4173,7 +5544,7 @@
                   <a:srgbClr val="C9D3E3"/>
                 </a:solidFill>
               </a:rPr>
-              <a:t>Test both on a few hundred real KIO messages labeled by hand, and log every route the two models disagree on.</a:t>
+              <a:t>The hybrid rule was designed after seeing our results, so it must be checked on a fresh, hand-labelled set of real KIO messages before launch.</a:t>
             </a:r>
             <a:endParaRPr lang="en-US" sz="1500" dirty="0"/>
           </a:p>
@@ -4206,14 +5577,41 @@
       </p:grpSpPr>
       <p:sp>
         <p:nvSpPr>
-          <p:cNvPr id="2" name="Text 0"/>
+          <p:cNvPr id="2" name="Shape 0"/>
+          <p:cNvSpPr/>
+          <p:nvPr/>
+        </p:nvSpPr>
+        <p:spPr>
+          <a:xfrm>
+            <a:off x="548640" y="329184"/>
+            <a:ext cx="960120" cy="274320"/>
+          </a:xfrm>
+          <a:prstGeom prst="roundRect">
+            <a:avLst>
+              <a:gd name="adj" fmla="val 50000"/>
+            </a:avLst>
+          </a:prstGeom>
+          <a:solidFill>
+            <a:srgbClr val="1B8A5A"/>
+          </a:solidFill>
+          <a:ln w="12700">
+            <a:solidFill>
+              <a:srgbClr val="1B8A5A"/>
+            </a:solidFill>
+            <a:prstDash val="solid"/>
+          </a:ln>
+        </p:spPr>
+      </p:sp>
+      <p:sp>
+        <p:nvSpPr>
+          <p:cNvPr id="3" name="Text 1"/>
           <p:cNvSpPr txBox="1"/>
           <p:nvPr/>
         </p:nvSpPr>
         <p:spPr>
           <a:xfrm>
-            <a:off x="548640" y="365760"/>
-            <a:ext cx="11094415" cy="274320"/>
+            <a:off x="548640" y="329184"/>
+            <a:ext cx="960120" cy="274320"/>
           </a:xfrm>
           <a:prstGeom prst="rect">
             <a:avLst/>
@@ -4225,27 +5623,63 @@
           <a:bodyPr wrap="square" lIns="0" tIns="0" rIns="0" bIns="0" rtlCol="0" anchor="ctr"/>
           <a:lstStyle/>
           <a:p>
+            <a:pPr algn="ctr" indent="0" marL="0">
+              <a:buNone/>
+            </a:pPr>
+            <a:r>
+              <a:rPr lang="en-US" sz="1000" b="1" spc="100" kern="0" dirty="0">
+                <a:solidFill>
+                  <a:srgbClr val="FFFFFF"/>
+                </a:solidFill>
+              </a:rPr>
+              <a:t>OMAR</a:t>
+            </a:r>
+            <a:endParaRPr lang="en-US" sz="1000" dirty="0"/>
+          </a:p>
+        </p:txBody>
+      </p:sp>
+      <p:sp>
+        <p:nvSpPr>
+          <p:cNvPr id="4" name="Text 2"/>
+          <p:cNvSpPr txBox="1"/>
+          <p:nvPr/>
+        </p:nvSpPr>
+        <p:spPr>
+          <a:xfrm>
+            <a:off x="1645920" y="356616"/>
+            <a:ext cx="8229600" cy="274320"/>
+          </a:xfrm>
+          <a:prstGeom prst="rect">
+            <a:avLst/>
+          </a:prstGeom>
+          <a:noFill/>
+          <a:ln/>
+        </p:spPr>
+        <p:txBody>
+          <a:bodyPr wrap="square" lIns="0" tIns="0" rIns="0" bIns="0" rtlCol="0" anchor="t"/>
+          <a:lstStyle/>
+          <a:p>
             <a:pPr indent="0" marL="0">
               <a:buNone/>
             </a:pPr>
             <a:r>
-              <a:rPr lang="en-US" sz="1200" b="1" spc="200" kern="0" dirty="0">
-                <a:solidFill>
-                  <a:srgbClr val="2A78D6"/>
+              <a:rPr lang="en-US" sz="1100" b="1" spc="200" kern="0" dirty="0">
+                <a:solidFill>
+                  <a:srgbClr val="1B8A5A"/>
                 </a:solidFill>
                 <a:latin typeface="Courier New" pitchFamily="34" charset="0"/>
                 <a:ea typeface="Courier New" pitchFamily="34" charset="-122"/>
                 <a:cs typeface="Courier New" pitchFamily="34" charset="-120"/>
               </a:rPr>
-              <a:t>SOURCES AND TOOLS</a:t>
-            </a:r>
-            <a:endParaRPr lang="en-US" sz="1200" dirty="0"/>
-          </a:p>
-        </p:txBody>
-      </p:sp>
-      <p:sp>
-        <p:nvSpPr>
-          <p:cNvPr id="3" name="Text 0"/>
+              <a:t>REPRODUCE IT</a:t>
+            </a:r>
+            <a:endParaRPr lang="en-US" sz="1100" dirty="0"/>
+          </a:p>
+        </p:txBody>
+      </p:sp>
+      <p:sp>
+        <p:nvSpPr>
+          <p:cNvPr id="5" name="Text 0"/>
           <p:cNvSpPr/>
           <p:nvPr>
             <p:ph idx="100" type="title" hasCustomPrompt="1"/>
@@ -4253,8 +5687,8 @@
         </p:nvSpPr>
         <p:spPr>
           <a:xfrm>
-            <a:off x="548640" y="685800"/>
-            <a:ext cx="11094415" cy="822960"/>
+            <a:off x="548640" y="713232"/>
+            <a:ext cx="11094415" cy="777240"/>
           </a:xfrm>
           <a:prstGeom prst="rect">
             <a:avLst/>
@@ -4270,27 +5704,54 @@
               <a:buNone/>
             </a:pPr>
             <a:r>
-              <a:rPr lang="en-US" sz="3400" b="1" dirty="0">
+              <a:rPr lang="en-US" sz="3200" b="1" dirty="0">
                 <a:solidFill>
                   <a:srgbClr val="14213D"/>
                 </a:solidFill>
               </a:rPr>
-              <a:t>What we used</a:t>
-            </a:r>
-            <a:endParaRPr lang="en-US" sz="3400" dirty="0"/>
-          </a:p>
-        </p:txBody>
-      </p:sp>
-      <p:sp>
-        <p:nvSpPr>
-          <p:cNvPr id="4" name="Text 2"/>
+              <a:t>Everything runs in one notebook</a:t>
+            </a:r>
+            <a:endParaRPr lang="en-US" sz="3200" dirty="0"/>
+          </a:p>
+        </p:txBody>
+      </p:sp>
+      <p:sp>
+        <p:nvSpPr>
+          <p:cNvPr id="6" name="Shape 4"/>
+          <p:cNvSpPr/>
+          <p:nvPr/>
+        </p:nvSpPr>
+        <p:spPr>
+          <a:xfrm>
+            <a:off x="548640" y="1737360"/>
+            <a:ext cx="5852160" cy="3108960"/>
+          </a:xfrm>
+          <a:prstGeom prst="roundRect">
+            <a:avLst>
+              <a:gd name="adj" fmla="val 2941"/>
+            </a:avLst>
+          </a:prstGeom>
+          <a:solidFill>
+            <a:srgbClr val="1E2A44"/>
+          </a:solidFill>
+          <a:ln w="12700">
+            <a:solidFill>
+              <a:srgbClr val="1E2A44"/>
+            </a:solidFill>
+            <a:prstDash val="solid"/>
+          </a:ln>
+        </p:spPr>
+      </p:sp>
+      <p:sp>
+        <p:nvSpPr>
+          <p:cNvPr id="7" name="Text 5"/>
           <p:cNvSpPr txBox="1"/>
           <p:nvPr/>
         </p:nvSpPr>
         <p:spPr>
           <a:xfrm>
-            <a:off x="548640" y="1783080"/>
-            <a:ext cx="11094415" cy="4023360"/>
+            <a:off x="777240" y="1920240"/>
+            <a:ext cx="5394960" cy="2743200"/>
           </a:xfrm>
           <a:prstGeom prst="rect">
             <a:avLst/>
@@ -4302,69 +5763,169 @@
           <a:bodyPr wrap="square" lIns="0" tIns="0" rIns="0" bIns="0" rtlCol="0" anchor="t"/>
           <a:lstStyle/>
           <a:p>
-            <a:pPr marL="342900" indent="-342900">
-              <a:spcAft>
-                <a:spcPts val="1200"/>
-              </a:spcAft>
-              <a:buSzPct val="100000"/>
-              <a:buChar char="•"/>
-            </a:pPr>
-            <a:r>
-              <a:rPr lang="en-US" sz="1700" dirty="0">
-                <a:solidFill>
-                  <a:srgbClr val="4A5568"/>
-                </a:solidFill>
-              </a:rPr>
-              <a:t>CET351 Project 1 brief, “Routing for Agent KIO”, Elsewedy University of Technology, 2026</a:t>
-            </a:r>
-            <a:endParaRPr lang="en-US" sz="1700" dirty="0"/>
-          </a:p>
-          <a:p>
-            <a:pPr marL="342900" indent="-342900">
-              <a:spcAft>
-                <a:spcPts val="1200"/>
-              </a:spcAft>
-              <a:buSzPct val="100000"/>
-              <a:buChar char="•"/>
-            </a:pPr>
-            <a:r>
-              <a:rPr lang="en-US" sz="1700" dirty="0">
-                <a:solidFill>
-                  <a:srgbClr val="4A5568"/>
-                </a:solidFill>
-              </a:rPr>
-              <a:t>scikit-learn 1.9 (BSD-3-Clause): StandardScaler, PolynomialFeatures, LogisticRegression</a:t>
-            </a:r>
-            <a:endParaRPr lang="en-US" sz="1700" dirty="0"/>
-          </a:p>
-          <a:p>
-            <a:pPr marL="342900" indent="-342900">
-              <a:spcAft>
-                <a:spcPts val="1200"/>
-              </a:spcAft>
-              <a:buSzPct val="100000"/>
-              <a:buChar char="•"/>
-            </a:pPr>
-            <a:r>
-              <a:rPr lang="en-US" sz="1700" dirty="0">
-                <a:solidFill>
-                  <a:srgbClr val="4A5568"/>
-                </a:solidFill>
-              </a:rPr>
-              <a:t>Claude, claude-opus-5-5 (Anthropic, proprietary): decision model, and drafting help for the synthetic messages</a:t>
-            </a:r>
-            <a:endParaRPr lang="en-US" sz="1700" dirty="0"/>
-          </a:p>
-          <a:p>
-            <a:pPr marL="342900" indent="-342900">
-              <a:spcAft>
-                <a:spcPts val="1200"/>
-              </a:spcAft>
-              <a:buSzPct val="100000"/>
-              <a:buChar char="•"/>
-            </a:pPr>
-            <a:r>
-              <a:rPr lang="en-US" sz="1700" u="sng" dirty="0">
+            <a:pPr indent="0" marL="0">
+              <a:buNone/>
+            </a:pPr>
+            <a:r>
+              <a:rPr lang="en-US" sz="1400" dirty="0">
+                <a:solidFill>
+                  <a:srgbClr val="E6EDF7"/>
+                </a:solidFill>
+                <a:latin typeface="Courier New" pitchFamily="34" charset="0"/>
+                <a:ea typeface="Courier New" pitchFamily="34" charset="-122"/>
+                <a:cs typeface="Courier New" pitchFamily="34" charset="-120"/>
+              </a:rPr>
+              <a:t>Google Colab → KIO_Routing.ipynb</a:t>
+            </a:r>
+            <a:endParaRPr lang="en-US" sz="1400" dirty="0"/>
+          </a:p>
+          <a:p>
+            <a:pPr indent="0" marL="0">
+              <a:buNone/>
+            </a:pPr>
+            <a:r>
+              <a:rPr lang="en-US" sz="1400" dirty="0">
+                <a:solidFill>
+                  <a:srgbClr val="E6EDF7"/>
+                </a:solidFill>
+                <a:latin typeface="Courier New" pitchFamily="34" charset="0"/>
+                <a:ea typeface="Courier New" pitchFamily="34" charset="-122"/>
+                <a:cs typeface="Courier New" pitchFamily="34" charset="-120"/>
+              </a:rPr>
+              <a:t>Runtime → Run all   (about 3 minutes)</a:t>
+            </a:r>
+            <a:endParaRPr lang="en-US" sz="1400" dirty="0"/>
+          </a:p>
+          <a:p>
+            <a:pPr indent="0" marL="0">
+              <a:buNone/>
+            </a:pPr>
+            <a:endParaRPr lang="en-US" sz="1400" dirty="0"/>
+          </a:p>
+          <a:p>
+            <a:pPr indent="0" marL="0">
+              <a:buNone/>
+            </a:pPr>
+            <a:r>
+              <a:rPr lang="en-US" sz="1400" dirty="0">
+                <a:solidFill>
+                  <a:srgbClr val="E6EDF7"/>
+                </a:solidFill>
+                <a:latin typeface="Courier New" pitchFamily="34" charset="0"/>
+                <a:ea typeface="Courier New" pitchFamily="34" charset="-122"/>
+                <a:cs typeface="Courier New" pitchFamily="34" charset="-120"/>
+              </a:rPr>
+              <a:t>1  Dataset          60 + 8 messages</a:t>
+            </a:r>
+            <a:endParaRPr lang="en-US" sz="1400" dirty="0"/>
+          </a:p>
+          <a:p>
+            <a:pPr indent="0" marL="0">
+              <a:buNone/>
+            </a:pPr>
+            <a:r>
+              <a:rPr lang="en-US" sz="1400" dirty="0">
+                <a:solidFill>
+                  <a:srgbClr val="E6EDF7"/>
+                </a:solidFill>
+                <a:latin typeface="Courier New" pitchFamily="34" charset="0"/>
+                <a:ea typeface="Courier New" pitchFamily="34" charset="-122"/>
+                <a:cs typeface="Courier New" pitchFamily="34" charset="-120"/>
+              </a:rPr>
+              <a:t>2  ML classifier    features, LogReg, boundary</a:t>
+            </a:r>
+            <a:endParaRPr lang="en-US" sz="1400" dirty="0"/>
+          </a:p>
+          <a:p>
+            <a:pPr indent="0" marL="0">
+              <a:buNone/>
+            </a:pPr>
+            <a:r>
+              <a:rPr lang="en-US" sz="1400" dirty="0">
+                <a:solidFill>
+                  <a:srgbClr val="E6EDF7"/>
+                </a:solidFill>
+                <a:latin typeface="Courier New" pitchFamily="34" charset="0"/>
+                <a:ea typeface="Courier New" pitchFamily="34" charset="-122"/>
+                <a:cs typeface="Courier New" pitchFamily="34" charset="-120"/>
+              </a:rPr>
+              <a:t>3  Decision model   BART-MNLI + wrapper</a:t>
+            </a:r>
+            <a:endParaRPr lang="en-US" sz="1400" dirty="0"/>
+          </a:p>
+          <a:p>
+            <a:pPr indent="0" marL="0">
+              <a:buNone/>
+            </a:pPr>
+            <a:r>
+              <a:rPr lang="en-US" sz="1400" dirty="0">
+                <a:solidFill>
+                  <a:srgbClr val="E6EDF7"/>
+                </a:solidFill>
+                <a:latin typeface="Courier New" pitchFamily="34" charset="0"/>
+                <a:ea typeface="Courier New" pitchFamily="34" charset="-122"/>
+                <a:cs typeface="Courier New" pitchFamily="34" charset="-120"/>
+              </a:rPr>
+              <a:t>4  Comparison       accuracy, confusion</a:t>
+            </a:r>
+            <a:endParaRPr lang="en-US" sz="1400" dirty="0"/>
+          </a:p>
+          <a:p>
+            <a:pPr indent="0" marL="0">
+              <a:buNone/>
+            </a:pPr>
+            <a:r>
+              <a:rPr lang="en-US" sz="1400" dirty="0">
+                <a:solidFill>
+                  <a:srgbClr val="E6EDF7"/>
+                </a:solidFill>
+                <a:latin typeface="Courier New" pitchFamily="34" charset="0"/>
+                <a:ea typeface="Courier New" pitchFamily="34" charset="-122"/>
+                <a:cs typeface="Courier New" pitchFamily="34" charset="-120"/>
+              </a:rPr>
+              <a:t>5  KIO demo         message → flag → agent</a:t>
+            </a:r>
+            <a:endParaRPr lang="en-US" sz="1400" dirty="0"/>
+          </a:p>
+        </p:txBody>
+      </p:sp>
+      <p:sp>
+        <p:nvSpPr>
+          <p:cNvPr id="8" name="Text 6"/>
+          <p:cNvSpPr txBox="1"/>
+          <p:nvPr/>
+        </p:nvSpPr>
+        <p:spPr>
+          <a:xfrm>
+            <a:off x="6766560" y="1828800"/>
+            <a:ext cx="4846320" cy="822960"/>
+          </a:xfrm>
+          <a:prstGeom prst="rect">
+            <a:avLst/>
+          </a:prstGeom>
+          <a:noFill/>
+          <a:ln/>
+        </p:spPr>
+        <p:txBody>
+          <a:bodyPr wrap="square" lIns="0" tIns="0" rIns="0" bIns="0" rtlCol="0" anchor="t"/>
+          <a:lstStyle/>
+          <a:p>
+            <a:pPr indent="0" marL="0">
+              <a:buNone/>
+            </a:pPr>
+            <a:r>
+              <a:rPr lang="en-US" sz="1500" b="1" dirty="0">
+                <a:solidFill>
+                  <a:srgbClr val="14213D"/>
+                </a:solidFill>
+              </a:rPr>
+              <a:t>GitHub: </a:t>
+            </a:r>
+            <a:pPr indent="0" marL="0">
+              <a:buNone/>
+            </a:pPr>
+            <a:r>
+              <a:rPr lang="en-US" sz="1500" u="sng" dirty="0">
                 <a:solidFill>
                   <a:srgbClr val="4A5568"/>
                 </a:solidFill>
@@ -4376,7 +5937,390 @@
                   </a:extLst>
                 </a:hlinkClick>
               </a:rPr>
-              <a:t>TypeSafe AI Jev overview: nexos.ai/blog/what-is-jev</a:t>
+              <a:t>github.com/Ahmed-Aldmrdash/ml-project01-agent-kio-routing</a:t>
+            </a:r>
+            <a:endParaRPr lang="en-US" sz="1500" dirty="0"/>
+          </a:p>
+        </p:txBody>
+      </p:sp>
+      <p:sp>
+        <p:nvSpPr>
+          <p:cNvPr id="9" name="Text 7"/>
+          <p:cNvSpPr txBox="1"/>
+          <p:nvPr/>
+        </p:nvSpPr>
+        <p:spPr>
+          <a:xfrm>
+            <a:off x="6766560" y="2834640"/>
+            <a:ext cx="4846320" cy="1097280"/>
+          </a:xfrm>
+          <a:prstGeom prst="rect">
+            <a:avLst/>
+          </a:prstGeom>
+          <a:noFill/>
+          <a:ln/>
+        </p:spPr>
+        <p:txBody>
+          <a:bodyPr wrap="square" lIns="0" tIns="0" rIns="0" bIns="0" rtlCol="0" anchor="t"/>
+          <a:lstStyle/>
+          <a:p>
+            <a:pPr indent="0" marL="0">
+              <a:buNone/>
+            </a:pPr>
+            <a:r>
+              <a:rPr lang="en-US" sz="1500" dirty="0">
+                <a:solidFill>
+                  <a:srgbClr val="4A5568"/>
+                </a:solidFill>
+              </a:rPr>
+              <a:t>Live demo (if time allows): type a new customer message into the last cell and show which agent it reaches.</a:t>
+            </a:r>
+            <a:endParaRPr lang="en-US" sz="1500" dirty="0"/>
+          </a:p>
+        </p:txBody>
+      </p:sp>
+      <p:sp>
+        <p:nvSpPr>
+          <p:cNvPr id="10" name="Text 8"/>
+          <p:cNvSpPr txBox="1"/>
+          <p:nvPr/>
+        </p:nvSpPr>
+        <p:spPr>
+          <a:xfrm>
+            <a:off x="548640" y="6400800"/>
+            <a:ext cx="10180015" cy="274320"/>
+          </a:xfrm>
+          <a:prstGeom prst="rect">
+            <a:avLst/>
+          </a:prstGeom>
+          <a:noFill/>
+          <a:ln/>
+        </p:spPr>
+        <p:txBody>
+          <a:bodyPr wrap="square" lIns="0" tIns="0" rIns="0" bIns="0" rtlCol="0" anchor="t"/>
+          <a:lstStyle/>
+          <a:p>
+            <a:pPr indent="0" marL="0">
+              <a:buNone/>
+            </a:pPr>
+            <a:r>
+              <a:rPr lang="en-US" sz="1000" dirty="0">
+                <a:solidFill>
+                  <a:srgbClr val="6B7689"/>
+                </a:solidFill>
+              </a:rPr>
+              <a:t>Backup slide — use during questions</a:t>
+            </a:r>
+            <a:endParaRPr lang="en-US" sz="1000" dirty="0"/>
+          </a:p>
+        </p:txBody>
+      </p:sp>
+      <p:sp>
+        <p:nvSpPr>
+          <p:cNvPr id="25" name="Slide Number Placeholder 0"/>
+          <p:cNvSpPr>
+            <a:spLocks noGrp="1"/>
+          </p:cNvSpPr>
+          <p:nvPr>
+            <p:ph type="sldNum" sz="quarter" idx="4294967295"/>
+          </p:nvPr>
+        </p:nvSpPr>
+        <p:spPr>
+          <a:xfrm>
+            <a:off x="11185855" y="6400800"/>
+            <a:ext cx="457200" cy="274320"/>
+          </a:xfrm>
+          <a:prstGeom prst="rect">
+            <a:avLst/>
+          </a:prstGeom>
+          <a:extLst>
+            <a:ext uri="{C572A759-6A51-4108-AA02-DFA0A04FC94B}">
+              <ma14:wrappingTextBoxFlag xmlns:ma14="http://schemas.microsoft.com/office/mac/drawingml/2011/main" val="0"/>
+            </a:ext>
+          </a:extLst>
+        </p:spPr>
+        <p:txBody>
+          <a:bodyPr/>
+          <a:lstStyle>
+            <a:lvl1pPr>
+              <a:defRPr sz="1100">
+                <a:solidFill>
+                  <a:srgbClr val="6B7689"/>
+                </a:solidFill>
+              </a:defRPr>
+            </a:lvl1pPr>
+          </a:lstStyle>
+          <a:p>
+            <a:pPr algn="r"/>
+            <a:fld id="{F7021451-1387-4CA6-816F-3879F97B5CBC}" type="slidenum">
+              <a:rPr b="0" lang="en-US"/>
+              <a:t>13</a:t>
+            </a:fld>
+            <a:endParaRPr lang="en-US"/>
+          </a:p>
+        </p:txBody>
+      </p:sp>
+    </p:spTree>
+  </p:cSld>
+  <p:clrMapOvr>
+    <a:masterClrMapping/>
+  </p:clrMapOvr>
+</p:sld>
+</file>
+
+<file path=ppt/slides/slide14.xml><?xml version="1.0" encoding="utf-8"?>
+<p:sld xmlns:a="http://schemas.openxmlformats.org/drawingml/2006/main" xmlns:r="http://schemas.openxmlformats.org/officeDocument/2006/relationships" xmlns:p="http://schemas.openxmlformats.org/presentationml/2006/main">
+  <p:cSld name="Slide 14">
+    <p:spTree>
+      <p:nvGrpSpPr>
+        <p:cNvPr id="1" name=""/>
+        <p:cNvGrpSpPr/>
+        <p:nvPr/>
+      </p:nvGrpSpPr>
+      <p:grpSpPr>
+        <a:xfrm>
+          <a:off x="0" y="0"/>
+          <a:ext cx="0" cy="0"/>
+          <a:chOff x="0" y="0"/>
+          <a:chExt cx="0" cy="0"/>
+        </a:xfrm>
+      </p:grpSpPr>
+      <p:sp>
+        <p:nvSpPr>
+          <p:cNvPr id="2" name="Shape 0"/>
+          <p:cNvSpPr/>
+          <p:nvPr/>
+        </p:nvSpPr>
+        <p:spPr>
+          <a:xfrm>
+            <a:off x="548640" y="329184"/>
+            <a:ext cx="960120" cy="274320"/>
+          </a:xfrm>
+          <a:prstGeom prst="roundRect">
+            <a:avLst>
+              <a:gd name="adj" fmla="val 50000"/>
+            </a:avLst>
+          </a:prstGeom>
+          <a:solidFill>
+            <a:srgbClr val="1B8A5A"/>
+          </a:solidFill>
+          <a:ln w="12700">
+            <a:solidFill>
+              <a:srgbClr val="1B8A5A"/>
+            </a:solidFill>
+            <a:prstDash val="solid"/>
+          </a:ln>
+        </p:spPr>
+      </p:sp>
+      <p:sp>
+        <p:nvSpPr>
+          <p:cNvPr id="3" name="Text 1"/>
+          <p:cNvSpPr txBox="1"/>
+          <p:nvPr/>
+        </p:nvSpPr>
+        <p:spPr>
+          <a:xfrm>
+            <a:off x="548640" y="329184"/>
+            <a:ext cx="960120" cy="274320"/>
+          </a:xfrm>
+          <a:prstGeom prst="rect">
+            <a:avLst/>
+          </a:prstGeom>
+          <a:noFill/>
+          <a:ln/>
+        </p:spPr>
+        <p:txBody>
+          <a:bodyPr wrap="square" lIns="0" tIns="0" rIns="0" bIns="0" rtlCol="0" anchor="ctr"/>
+          <a:lstStyle/>
+          <a:p>
+            <a:pPr algn="ctr" indent="0" marL="0">
+              <a:buNone/>
+            </a:pPr>
+            <a:r>
+              <a:rPr lang="en-US" sz="1000" b="1" spc="100" kern="0" dirty="0">
+                <a:solidFill>
+                  <a:srgbClr val="FFFFFF"/>
+                </a:solidFill>
+              </a:rPr>
+              <a:t>OMAR</a:t>
+            </a:r>
+            <a:endParaRPr lang="en-US" sz="1000" dirty="0"/>
+          </a:p>
+        </p:txBody>
+      </p:sp>
+      <p:sp>
+        <p:nvSpPr>
+          <p:cNvPr id="4" name="Text 2"/>
+          <p:cNvSpPr txBox="1"/>
+          <p:nvPr/>
+        </p:nvSpPr>
+        <p:spPr>
+          <a:xfrm>
+            <a:off x="1645920" y="356616"/>
+            <a:ext cx="8229600" cy="274320"/>
+          </a:xfrm>
+          <a:prstGeom prst="rect">
+            <a:avLst/>
+          </a:prstGeom>
+          <a:noFill/>
+          <a:ln/>
+        </p:spPr>
+        <p:txBody>
+          <a:bodyPr wrap="square" lIns="0" tIns="0" rIns="0" bIns="0" rtlCol="0" anchor="t"/>
+          <a:lstStyle/>
+          <a:p>
+            <a:pPr indent="0" marL="0">
+              <a:buNone/>
+            </a:pPr>
+            <a:r>
+              <a:rPr lang="en-US" sz="1100" b="1" spc="200" kern="0" dirty="0">
+                <a:solidFill>
+                  <a:srgbClr val="1B8A5A"/>
+                </a:solidFill>
+                <a:latin typeface="Courier New" pitchFamily="34" charset="0"/>
+                <a:ea typeface="Courier New" pitchFamily="34" charset="-122"/>
+                <a:cs typeface="Courier New" pitchFamily="34" charset="-120"/>
+              </a:rPr>
+              <a:t>SOURCES AND TOOLS</a:t>
+            </a:r>
+            <a:endParaRPr lang="en-US" sz="1100" dirty="0"/>
+          </a:p>
+        </p:txBody>
+      </p:sp>
+      <p:sp>
+        <p:nvSpPr>
+          <p:cNvPr id="5" name="Text 0"/>
+          <p:cNvSpPr/>
+          <p:nvPr>
+            <p:ph idx="100" type="title" hasCustomPrompt="1"/>
+          </p:nvPr>
+        </p:nvSpPr>
+        <p:spPr>
+          <a:xfrm>
+            <a:off x="548640" y="713232"/>
+            <a:ext cx="11094415" cy="777240"/>
+          </a:xfrm>
+          <a:prstGeom prst="rect">
+            <a:avLst/>
+          </a:prstGeom>
+          <a:noFill/>
+          <a:ln/>
+        </p:spPr>
+        <p:txBody>
+          <a:bodyPr wrap="square" lIns="0" tIns="0" rIns="0" bIns="0" rtlCol="0" anchor="t"/>
+          <a:lstStyle/>
+          <a:p>
+            <a:pPr algn="l" indent="0" marL="0">
+              <a:buNone/>
+            </a:pPr>
+            <a:r>
+              <a:rPr lang="en-US" sz="3200" b="1" dirty="0">
+                <a:solidFill>
+                  <a:srgbClr val="14213D"/>
+                </a:solidFill>
+              </a:rPr>
+              <a:t>What we used</a:t>
+            </a:r>
+            <a:endParaRPr lang="en-US" sz="3200" dirty="0"/>
+          </a:p>
+        </p:txBody>
+      </p:sp>
+      <p:sp>
+        <p:nvSpPr>
+          <p:cNvPr id="6" name="Text 4"/>
+          <p:cNvSpPr txBox="1"/>
+          <p:nvPr/>
+        </p:nvSpPr>
+        <p:spPr>
+          <a:xfrm>
+            <a:off x="548640" y="1783080"/>
+            <a:ext cx="11094415" cy="4023360"/>
+          </a:xfrm>
+          <a:prstGeom prst="rect">
+            <a:avLst/>
+          </a:prstGeom>
+          <a:noFill/>
+          <a:ln/>
+        </p:spPr>
+        <p:txBody>
+          <a:bodyPr wrap="square" lIns="0" tIns="0" rIns="0" bIns="0" rtlCol="0" anchor="t"/>
+          <a:lstStyle/>
+          <a:p>
+            <a:pPr marL="342900" indent="-342900">
+              <a:spcAft>
+                <a:spcPts val="1200"/>
+              </a:spcAft>
+              <a:buSzPct val="100000"/>
+              <a:buChar char="•"/>
+            </a:pPr>
+            <a:r>
+              <a:rPr lang="en-US" sz="1700" dirty="0">
+                <a:solidFill>
+                  <a:srgbClr val="4A5568"/>
+                </a:solidFill>
+              </a:rPr>
+              <a:t>CET351 Project 1 brief, “Routing for Agent KIO”, Elsewedy University of Technology, 2026</a:t>
+            </a:r>
+            <a:endParaRPr lang="en-US" sz="1700" dirty="0"/>
+          </a:p>
+          <a:p>
+            <a:pPr marL="342900" indent="-342900">
+              <a:spcAft>
+                <a:spcPts val="1200"/>
+              </a:spcAft>
+              <a:buSzPct val="100000"/>
+              <a:buChar char="•"/>
+            </a:pPr>
+            <a:r>
+              <a:rPr lang="en-US" sz="1700" u="sng" dirty="0">
+                <a:solidFill>
+                  <a:srgbClr val="4A5568"/>
+                </a:solidFill>
+                <a:hlinkClick r:id="rId1" invalidUrl="" action="" tgtFrame="" tooltip="" history="1" highlightClick="0" endSnd="0">
+                  <a:extLst>
+                    <a:ext uri="{A12FA001-AC4F-418D-AE19-62706E023703}">
+                      <ahyp:hlinkClr xmlns:ahyp="http://schemas.microsoft.com/office/drawing/2018/hyperlinkcolor" val="tx"/>
+                    </a:ext>
+                  </a:extLst>
+                </a:hlinkClick>
+              </a:rPr>
+              <a:t>Lewis et al., BART (2019); facebook/bart-large-mnli on Hugging Face, MIT licence</a:t>
+            </a:r>
+            <a:endParaRPr lang="en-US" sz="1700" dirty="0"/>
+          </a:p>
+          <a:p>
+            <a:pPr marL="342900" indent="-342900">
+              <a:spcAft>
+                <a:spcPts val="1200"/>
+              </a:spcAft>
+              <a:buSzPct val="100000"/>
+              <a:buChar char="•"/>
+            </a:pPr>
+            <a:r>
+              <a:rPr lang="en-US" sz="1700" dirty="0">
+                <a:solidFill>
+                  <a:srgbClr val="4A5568"/>
+                </a:solidFill>
+              </a:rPr>
+              <a:t>Hugging Face transformers — zero-shot-classification pipeline (Apache-2.0)</a:t>
+            </a:r>
+            <a:endParaRPr lang="en-US" sz="1700" dirty="0"/>
+          </a:p>
+          <a:p>
+            <a:pPr marL="342900" indent="-342900">
+              <a:spcAft>
+                <a:spcPts val="1200"/>
+              </a:spcAft>
+              <a:buSzPct val="100000"/>
+              <a:buChar char="•"/>
+            </a:pPr>
+            <a:r>
+              <a:rPr lang="en-US" sz="1700" dirty="0">
+                <a:solidFill>
+                  <a:srgbClr val="4A5568"/>
+                </a:solidFill>
+              </a:rPr>
+              <a:t>scikit-learn 1.x (BSD-3-Clause): StandardScaler, PolynomialFeatures, LogisticRegression, SVC</a:t>
             </a:r>
             <a:endParaRPr lang="en-US" sz="1700" dirty="0"/>
           </a:p>
@@ -4401,7 +6345,7 @@
                   </a:extLst>
                 </a:hlinkClick>
               </a:rPr>
-              <a:t>TypeSafe Jev guide: composio.dev</a:t>
+              <a:t>TypeSafe AI, Jev decision model (the brief’s example): nexos.ai/blog/what-is-jev</a:t>
             </a:r>
             <a:endParaRPr lang="en-US" sz="1700" dirty="0"/>
           </a:p>
@@ -4419,7 +6363,7 @@
                   <a:srgbClr val="4A5568"/>
                 </a:solidFill>
               </a:rPr>
-              <a:t>Our files: kio_routing_dataset.csv, stress_test.csv, features.py, ml_router.py, decision_router.py, evaluate.py, kio_demo.py</a:t>
+              <a:t>AI assistant (Claude) used to draft the synthetic messages; labels reviewed by the team</a:t>
             </a:r>
             <a:endParaRPr lang="en-US" sz="1700" dirty="0"/>
           </a:p>
@@ -4427,7 +6371,7 @@
       </p:sp>
       <p:sp>
         <p:nvSpPr>
-          <p:cNvPr id="5" name="Text 3"/>
+          <p:cNvPr id="7" name="Text 5"/>
           <p:cNvSpPr txBox="1"/>
           <p:nvPr/>
         </p:nvSpPr>
@@ -4443,21 +6387,21 @@
           <a:ln/>
         </p:spPr>
         <p:txBody>
-          <a:bodyPr wrap="square" lIns="0" tIns="0" rIns="0" bIns="0" rtlCol="0" anchor="ctr"/>
+          <a:bodyPr wrap="square" lIns="0" tIns="0" rIns="0" bIns="0" rtlCol="0" anchor="t"/>
           <a:lstStyle/>
           <a:p>
             <a:pPr indent="0" marL="0">
               <a:buNone/>
             </a:pPr>
             <a:r>
-              <a:rPr lang="en-US" sz="1100" dirty="0">
+              <a:rPr lang="en-US" sz="1000" dirty="0">
                 <a:solidFill>
                   <a:srgbClr val="6B7689"/>
                 </a:solidFill>
               </a:rPr>
               <a:t>Sources</a:t>
             </a:r>
-            <a:endParaRPr lang="en-US" sz="1100" dirty="0"/>
+            <a:endParaRPr lang="en-US" sz="1000" dirty="0"/>
           </a:p>
         </p:txBody>
       </p:sp>
@@ -4500,7 +6444,7 @@
             <a:pPr algn="r"/>
             <a:fld id="{F7021451-1387-4CA6-816F-3879F97B5CBC}" type="slidenum">
               <a:rPr b="0" lang="en-US"/>
-              <a:t>13</a:t>
+              <a:t>14</a:t>
             </a:fld>
             <a:endParaRPr lang="en-US"/>
           </a:p>
@@ -4533,14 +6477,41 @@
       </p:grpSpPr>
       <p:sp>
         <p:nvSpPr>
-          <p:cNvPr id="2" name="Text 0"/>
+          <p:cNvPr id="2" name="Shape 0"/>
+          <p:cNvSpPr/>
+          <p:nvPr/>
+        </p:nvSpPr>
+        <p:spPr>
+          <a:xfrm>
+            <a:off x="548640" y="329184"/>
+            <a:ext cx="960120" cy="274320"/>
+          </a:xfrm>
+          <a:prstGeom prst="roundRect">
+            <a:avLst>
+              <a:gd name="adj" fmla="val 50000"/>
+            </a:avLst>
+          </a:prstGeom>
+          <a:solidFill>
+            <a:srgbClr val="2A78D6"/>
+          </a:solidFill>
+          <a:ln w="12700">
+            <a:solidFill>
+              <a:srgbClr val="2A78D6"/>
+            </a:solidFill>
+            <a:prstDash val="solid"/>
+          </a:ln>
+        </p:spPr>
+      </p:sp>
+      <p:sp>
+        <p:nvSpPr>
+          <p:cNvPr id="3" name="Text 1"/>
           <p:cNvSpPr txBox="1"/>
           <p:nvPr/>
         </p:nvSpPr>
         <p:spPr>
           <a:xfrm>
-            <a:off x="548640" y="365760"/>
-            <a:ext cx="11094415" cy="274320"/>
+            <a:off x="548640" y="329184"/>
+            <a:ext cx="960120" cy="274320"/>
           </a:xfrm>
           <a:prstGeom prst="rect">
             <a:avLst/>
@@ -4552,11 +6523,47 @@
           <a:bodyPr wrap="square" lIns="0" tIns="0" rIns="0" bIns="0" rtlCol="0" anchor="ctr"/>
           <a:lstStyle/>
           <a:p>
+            <a:pPr algn="ctr" indent="0" marL="0">
+              <a:buNone/>
+            </a:pPr>
+            <a:r>
+              <a:rPr lang="en-US" sz="1000" b="1" spc="100" kern="0" dirty="0">
+                <a:solidFill>
+                  <a:srgbClr val="FFFFFF"/>
+                </a:solidFill>
+              </a:rPr>
+              <a:t>AHMED</a:t>
+            </a:r>
+            <a:endParaRPr lang="en-US" sz="1000" dirty="0"/>
+          </a:p>
+        </p:txBody>
+      </p:sp>
+      <p:sp>
+        <p:nvSpPr>
+          <p:cNvPr id="4" name="Text 2"/>
+          <p:cNvSpPr txBox="1"/>
+          <p:nvPr/>
+        </p:nvSpPr>
+        <p:spPr>
+          <a:xfrm>
+            <a:off x="1645920" y="356616"/>
+            <a:ext cx="8229600" cy="274320"/>
+          </a:xfrm>
+          <a:prstGeom prst="rect">
+            <a:avLst/>
+          </a:prstGeom>
+          <a:noFill/>
+          <a:ln/>
+        </p:spPr>
+        <p:txBody>
+          <a:bodyPr wrap="square" lIns="0" tIns="0" rIns="0" bIns="0" rtlCol="0" anchor="t"/>
+          <a:lstStyle/>
+          <a:p>
             <a:pPr indent="0" marL="0">
               <a:buNone/>
             </a:pPr>
             <a:r>
-              <a:rPr lang="en-US" sz="1200" b="1" spc="200" kern="0" dirty="0">
+              <a:rPr lang="en-US" sz="1100" b="1" spc="200" kern="0" dirty="0">
                 <a:solidFill>
                   <a:srgbClr val="2A78D6"/>
                 </a:solidFill>
@@ -4566,13 +6573,13 @@
               </a:rPr>
               <a:t>THE PROBLEM</a:t>
             </a:r>
-            <a:endParaRPr lang="en-US" sz="1200" dirty="0"/>
-          </a:p>
-        </p:txBody>
-      </p:sp>
-      <p:sp>
-        <p:nvSpPr>
-          <p:cNvPr id="3" name="Text 0"/>
+            <a:endParaRPr lang="en-US" sz="1100" dirty="0"/>
+          </a:p>
+        </p:txBody>
+      </p:sp>
+      <p:sp>
+        <p:nvSpPr>
+          <p:cNvPr id="5" name="Text 0"/>
           <p:cNvSpPr/>
           <p:nvPr>
             <p:ph idx="100" type="title" hasCustomPrompt="1"/>
@@ -4580,8 +6587,8 @@
         </p:nvSpPr>
         <p:spPr>
           <a:xfrm>
-            <a:off x="548640" y="685800"/>
-            <a:ext cx="11094415" cy="822960"/>
+            <a:off x="548640" y="713232"/>
+            <a:ext cx="11094415" cy="777240"/>
           </a:xfrm>
           <a:prstGeom prst="rect">
             <a:avLst/>
@@ -4597,31 +6604,31 @@
               <a:buNone/>
             </a:pPr>
             <a:r>
-              <a:rPr lang="en-US" sz="3400" b="1" dirty="0">
+              <a:rPr lang="en-US" sz="3200" b="1" dirty="0">
                 <a:solidFill>
                   <a:srgbClr val="14213D"/>
                 </a:solidFill>
               </a:rPr>
               <a:t>Our block: message in, routing flag out</a:t>
             </a:r>
-            <a:endParaRPr lang="en-US" sz="3400" dirty="0"/>
-          </a:p>
-        </p:txBody>
-      </p:sp>
-      <p:sp>
-        <p:nvSpPr>
-          <p:cNvPr id="4" name="Shape 2"/>
+            <a:endParaRPr lang="en-US" sz="3200" dirty="0"/>
+          </a:p>
+        </p:txBody>
+      </p:sp>
+      <p:sp>
+        <p:nvSpPr>
+          <p:cNvPr id="6" name="Shape 4"/>
           <p:cNvSpPr/>
           <p:nvPr/>
         </p:nvSpPr>
         <p:spPr>
           <a:xfrm>
-            <a:off x="548640" y="1965960"/>
+            <a:off x="548640" y="1920240"/>
             <a:ext cx="2743200" cy="1828800"/>
           </a:xfrm>
           <a:prstGeom prst="roundRect">
             <a:avLst>
-              <a:gd name="adj" fmla="val 6000"/>
+              <a:gd name="adj" fmla="val 5000"/>
             </a:avLst>
           </a:prstGeom>
           <a:solidFill>
@@ -4637,13 +6644,13 @@
       </p:sp>
       <p:sp>
         <p:nvSpPr>
-          <p:cNvPr id="5" name="Text 3"/>
+          <p:cNvPr id="7" name="Text 5"/>
           <p:cNvSpPr txBox="1"/>
           <p:nvPr/>
         </p:nvSpPr>
         <p:spPr>
           <a:xfrm>
-            <a:off x="777240" y="2148840"/>
+            <a:off x="777240" y="2103120"/>
             <a:ext cx="2286000" cy="365760"/>
           </a:xfrm>
           <a:prstGeom prst="rect">
@@ -4673,13 +6680,13 @@
       </p:sp>
       <p:sp>
         <p:nvSpPr>
-          <p:cNvPr id="6" name="Text 4"/>
+          <p:cNvPr id="8" name="Text 6"/>
           <p:cNvSpPr txBox="1"/>
           <p:nvPr/>
         </p:nvSpPr>
         <p:spPr>
           <a:xfrm>
-            <a:off x="777240" y="2606040"/>
+            <a:off x="777240" y="2560320"/>
             <a:ext cx="2286000" cy="1005840"/>
           </a:xfrm>
           <a:prstGeom prst="rect">
@@ -4709,13 +6716,13 @@
       </p:sp>
       <p:sp>
         <p:nvSpPr>
-          <p:cNvPr id="7" name="Shape 5"/>
+          <p:cNvPr id="9" name="Shape 7"/>
           <p:cNvSpPr/>
           <p:nvPr/>
         </p:nvSpPr>
         <p:spPr>
           <a:xfrm>
-            <a:off x="3474720" y="2697480"/>
+            <a:off x="3474720" y="2651760"/>
             <a:ext cx="548640" cy="365760"/>
           </a:xfrm>
           <a:prstGeom prst="rightArrow">
@@ -4734,18 +6741,18 @@
       </p:sp>
       <p:sp>
         <p:nvSpPr>
-          <p:cNvPr id="8" name="Shape 6"/>
+          <p:cNvPr id="10" name="Shape 8"/>
           <p:cNvSpPr/>
           <p:nvPr/>
         </p:nvSpPr>
         <p:spPr>
           <a:xfrm>
-            <a:off x="4160520" y="1965960"/>
+            <a:off x="4160520" y="1920240"/>
             <a:ext cx="2926080" cy="1828800"/>
           </a:xfrm>
           <a:prstGeom prst="roundRect">
             <a:avLst>
-              <a:gd name="adj" fmla="val 6000"/>
+              <a:gd name="adj" fmla="val 5000"/>
             </a:avLst>
           </a:prstGeom>
           <a:solidFill>
@@ -4761,13 +6768,13 @@
       </p:sp>
       <p:sp>
         <p:nvSpPr>
-          <p:cNvPr id="9" name="Text 7"/>
+          <p:cNvPr id="11" name="Text 9"/>
           <p:cNvSpPr txBox="1"/>
           <p:nvPr/>
         </p:nvSpPr>
         <p:spPr>
           <a:xfrm>
-            <a:off x="4389120" y="2148840"/>
+            <a:off x="4389120" y="2103120"/>
             <a:ext cx="2468880" cy="365760"/>
           </a:xfrm>
           <a:prstGeom prst="rect">
@@ -4797,13 +6804,13 @@
       </p:sp>
       <p:sp>
         <p:nvSpPr>
-          <p:cNvPr id="10" name="Text 8"/>
+          <p:cNvPr id="12" name="Text 10"/>
           <p:cNvSpPr txBox="1"/>
           <p:nvPr/>
         </p:nvSpPr>
         <p:spPr>
           <a:xfrm>
-            <a:off x="4389120" y="2606040"/>
+            <a:off x="4389120" y="2560320"/>
             <a:ext cx="2468880" cy="1005840"/>
           </a:xfrm>
           <a:prstGeom prst="rect">
@@ -4825,7 +6832,7 @@
                   <a:srgbClr val="C9D3E3"/>
                 </a:solidFill>
               </a:rPr>
-              <a:t>What we built and compared: ML classifier or decision model</a:t>
+              <a:t>The block we built twice: ML classifier and decision model</a:t>
             </a:r>
             <a:endParaRPr lang="en-US" sz="1400" dirty="0"/>
           </a:p>
@@ -4833,13 +6840,13 @@
       </p:sp>
       <p:sp>
         <p:nvSpPr>
-          <p:cNvPr id="11" name="Shape 9"/>
+          <p:cNvPr id="13" name="Shape 11"/>
           <p:cNvSpPr/>
           <p:nvPr/>
         </p:nvSpPr>
         <p:spPr>
           <a:xfrm>
-            <a:off x="7223760" y="2697480"/>
+            <a:off x="7223760" y="2651760"/>
             <a:ext cx="548640" cy="365760"/>
           </a:xfrm>
           <a:prstGeom prst="rightArrow">
@@ -4858,18 +6865,18 @@
       </p:sp>
       <p:sp>
         <p:nvSpPr>
-          <p:cNvPr id="12" name="Shape 10"/>
+          <p:cNvPr id="14" name="Shape 12"/>
           <p:cNvSpPr/>
           <p:nvPr/>
         </p:nvSpPr>
         <p:spPr>
           <a:xfrm>
-            <a:off x="7909560" y="1965960"/>
+            <a:off x="7909560" y="1920240"/>
             <a:ext cx="3730752" cy="868680"/>
           </a:xfrm>
           <a:prstGeom prst="roundRect">
             <a:avLst>
-              <a:gd name="adj" fmla="val 12632"/>
+              <a:gd name="adj" fmla="val 10526"/>
             </a:avLst>
           </a:prstGeom>
           <a:solidFill>
@@ -4885,13 +6892,13 @@
       </p:sp>
       <p:sp>
         <p:nvSpPr>
-          <p:cNvPr id="13" name="Text 11"/>
+          <p:cNvPr id="15" name="Text 13"/>
           <p:cNvSpPr txBox="1"/>
           <p:nvPr/>
         </p:nvSpPr>
         <p:spPr>
           <a:xfrm>
-            <a:off x="8092440" y="2057400"/>
+            <a:off x="8092440" y="2011680"/>
             <a:ext cx="3383280" cy="320040"/>
           </a:xfrm>
           <a:prstGeom prst="rect">
@@ -4921,13 +6928,13 @@
       </p:sp>
       <p:sp>
         <p:nvSpPr>
-          <p:cNvPr id="14" name="Text 12"/>
+          <p:cNvPr id="16" name="Text 14"/>
           <p:cNvSpPr txBox="1"/>
           <p:nvPr/>
         </p:nvSpPr>
         <p:spPr>
           <a:xfrm>
-            <a:off x="8092440" y="2423160"/>
+            <a:off x="8092440" y="2377440"/>
             <a:ext cx="3383280" cy="320040"/>
           </a:xfrm>
           <a:prstGeom prst="rect">
@@ -4957,18 +6964,18 @@
       </p:sp>
       <p:sp>
         <p:nvSpPr>
-          <p:cNvPr id="15" name="Shape 13"/>
+          <p:cNvPr id="17" name="Shape 15"/>
           <p:cNvSpPr/>
           <p:nvPr/>
         </p:nvSpPr>
         <p:spPr>
           <a:xfrm>
-            <a:off x="7909560" y="2926080"/>
+            <a:off x="7909560" y="2880360"/>
             <a:ext cx="3730752" cy="868680"/>
           </a:xfrm>
           <a:prstGeom prst="roundRect">
             <a:avLst>
-              <a:gd name="adj" fmla="val 12632"/>
+              <a:gd name="adj" fmla="val 10526"/>
             </a:avLst>
           </a:prstGeom>
           <a:solidFill>
@@ -4984,86 +6991,14 @@
       </p:sp>
       <p:sp>
         <p:nvSpPr>
-          <p:cNvPr id="16" name="Text 14"/>
-          <p:cNvSpPr txBox="1"/>
-          <p:nvPr/>
-        </p:nvSpPr>
-        <p:spPr>
-          <a:xfrm>
-            <a:off x="8092440" y="3017520"/>
-            <a:ext cx="3383280" cy="320040"/>
-          </a:xfrm>
-          <a:prstGeom prst="rect">
-            <a:avLst/>
-          </a:prstGeom>
-          <a:noFill/>
-          <a:ln/>
-        </p:spPr>
-        <p:txBody>
-          <a:bodyPr wrap="square" lIns="0" tIns="0" rIns="0" bIns="0" rtlCol="0" anchor="t"/>
-          <a:lstStyle/>
-          <a:p>
-            <a:pPr indent="0" marL="0">
-              <a:buNone/>
-            </a:pPr>
-            <a:r>
-              <a:rPr lang="en-US" sz="1600" b="1" dirty="0">
-                <a:solidFill>
-                  <a:srgbClr val="14213D"/>
-                </a:solidFill>
-              </a:rPr>
-              <a:t>Flag 1 → Sales agent</a:t>
-            </a:r>
-            <a:endParaRPr lang="en-US" sz="1600" dirty="0"/>
-          </a:p>
-        </p:txBody>
-      </p:sp>
-      <p:sp>
-        <p:nvSpPr>
-          <p:cNvPr id="17" name="Text 15"/>
-          <p:cNvSpPr txBox="1"/>
-          <p:nvPr/>
-        </p:nvSpPr>
-        <p:spPr>
-          <a:xfrm>
-            <a:off x="8092440" y="3383280"/>
-            <a:ext cx="3383280" cy="320040"/>
-          </a:xfrm>
-          <a:prstGeom prst="rect">
-            <a:avLst/>
-          </a:prstGeom>
-          <a:noFill/>
-          <a:ln/>
-        </p:spPr>
-        <p:txBody>
-          <a:bodyPr wrap="square" lIns="0" tIns="0" rIns="0" bIns="0" rtlCol="0" anchor="t"/>
-          <a:lstStyle/>
-          <a:p>
-            <a:pPr indent="0" marL="0">
-              <a:buNone/>
-            </a:pPr>
-            <a:r>
-              <a:rPr lang="en-US" sz="1300" dirty="0">
-                <a:solidFill>
-                  <a:srgbClr val="4A5568"/>
-                </a:solidFill>
-              </a:rPr>
-              <a:t>New purchases, packages, quotes</a:t>
-            </a:r>
-            <a:endParaRPr lang="en-US" sz="1300" dirty="0"/>
-          </a:p>
-        </p:txBody>
-      </p:sp>
-      <p:sp>
-        <p:nvSpPr>
           <p:cNvPr id="18" name="Text 16"/>
           <p:cNvSpPr txBox="1"/>
           <p:nvPr/>
         </p:nvSpPr>
         <p:spPr>
           <a:xfrm>
-            <a:off x="548640" y="4343400"/>
-            <a:ext cx="10058400" cy="914400"/>
+            <a:off x="8092440" y="2971800"/>
+            <a:ext cx="3383280" cy="320040"/>
           </a:xfrm>
           <a:prstGeom prst="rect">
             <a:avLst/>
@@ -5079,14 +7014,14 @@
               <a:buNone/>
             </a:pPr>
             <a:r>
-              <a:rPr lang="en-US" sz="1700" dirty="0">
-                <a:solidFill>
-                  <a:srgbClr val="4A5568"/>
-                </a:solidFill>
-              </a:rPr>
-              <a:t>A wrong route sends the customer to the wrong tools and knowledge base: a broken machine ends up with a salesperson, and a ready buyer waits in the support queue.</a:t>
-            </a:r>
-            <a:endParaRPr lang="en-US" sz="1700" dirty="0"/>
+              <a:rPr lang="en-US" sz="1600" b="1" dirty="0">
+                <a:solidFill>
+                  <a:srgbClr val="14213D"/>
+                </a:solidFill>
+              </a:rPr>
+              <a:t>Flag 1 → Sales agent</a:t>
+            </a:r>
+            <a:endParaRPr lang="en-US" sz="1600" dirty="0"/>
           </a:p>
         </p:txBody>
       </p:sp>
@@ -5098,6 +7033,78 @@
         </p:nvSpPr>
         <p:spPr>
           <a:xfrm>
+            <a:off x="8092440" y="3337560"/>
+            <a:ext cx="3383280" cy="320040"/>
+          </a:xfrm>
+          <a:prstGeom prst="rect">
+            <a:avLst/>
+          </a:prstGeom>
+          <a:noFill/>
+          <a:ln/>
+        </p:spPr>
+        <p:txBody>
+          <a:bodyPr wrap="square" lIns="0" tIns="0" rIns="0" bIns="0" rtlCol="0" anchor="t"/>
+          <a:lstStyle/>
+          <a:p>
+            <a:pPr indent="0" marL="0">
+              <a:buNone/>
+            </a:pPr>
+            <a:r>
+              <a:rPr lang="en-US" sz="1300" dirty="0">
+                <a:solidFill>
+                  <a:srgbClr val="4A5568"/>
+                </a:solidFill>
+              </a:rPr>
+              <a:t>New purchases, packages, quotes</a:t>
+            </a:r>
+            <a:endParaRPr lang="en-US" sz="1300" dirty="0"/>
+          </a:p>
+        </p:txBody>
+      </p:sp>
+      <p:sp>
+        <p:nvSpPr>
+          <p:cNvPr id="20" name="Text 18"/>
+          <p:cNvSpPr txBox="1"/>
+          <p:nvPr/>
+        </p:nvSpPr>
+        <p:spPr>
+          <a:xfrm>
+            <a:off x="548640" y="4251960"/>
+            <a:ext cx="10515600" cy="914400"/>
+          </a:xfrm>
+          <a:prstGeom prst="rect">
+            <a:avLst/>
+          </a:prstGeom>
+          <a:noFill/>
+          <a:ln/>
+        </p:spPr>
+        <p:txBody>
+          <a:bodyPr wrap="square" lIns="0" tIns="0" rIns="0" bIns="0" rtlCol="0" anchor="t"/>
+          <a:lstStyle/>
+          <a:p>
+            <a:pPr indent="0" marL="0">
+              <a:buNone/>
+            </a:pPr>
+            <a:r>
+              <a:rPr lang="en-US" sz="1700" dirty="0">
+                <a:solidFill>
+                  <a:srgbClr val="4A5568"/>
+                </a:solidFill>
+              </a:rPr>
+              <a:t>Routing picks the workflow; retrieval (RAG) then searches inside it. A wrong route means the wrong tools and knowledge base: a stopped machine reaches a salesperson, or a ready buyer waits in the support queue.</a:t>
+            </a:r>
+            <a:endParaRPr lang="en-US" sz="1700" dirty="0"/>
+          </a:p>
+        </p:txBody>
+      </p:sp>
+      <p:sp>
+        <p:nvSpPr>
+          <p:cNvPr id="21" name="Text 19"/>
+          <p:cNvSpPr txBox="1"/>
+          <p:nvPr/>
+        </p:nvSpPr>
+        <p:spPr>
+          <a:xfrm>
             <a:off x="548640" y="6400800"/>
             <a:ext cx="10180015" cy="274320"/>
           </a:xfrm>
@@ -5108,21 +7115,21 @@
           <a:ln/>
         </p:spPr>
         <p:txBody>
-          <a:bodyPr wrap="square" lIns="0" tIns="0" rIns="0" bIns="0" rtlCol="0" anchor="ctr"/>
+          <a:bodyPr wrap="square" lIns="0" tIns="0" rIns="0" bIns="0" rtlCol="0" anchor="t"/>
           <a:lstStyle/>
           <a:p>
             <a:pPr indent="0" marL="0">
               <a:buNone/>
             </a:pPr>
             <a:r>
-              <a:rPr lang="en-US" sz="1100" dirty="0">
+              <a:rPr lang="en-US" sz="1000" dirty="0">
                 <a:solidFill>
                   <a:srgbClr val="6B7689"/>
                 </a:solidFill>
               </a:rPr>
-              <a:t>Ahmed · Problem statement</a:t>
-            </a:r>
-            <a:endParaRPr lang="en-US" sz="1100" dirty="0"/>
+              <a:t>In our demo both agents are Python functions that print their names — the full chatbot and RAG are outside this project.</a:t>
+            </a:r>
+            <a:endParaRPr lang="en-US" sz="1000" dirty="0"/>
           </a:p>
         </p:txBody>
       </p:sp>
@@ -5198,14 +7205,41 @@
       </p:grpSpPr>
       <p:sp>
         <p:nvSpPr>
-          <p:cNvPr id="2" name="Text 0"/>
+          <p:cNvPr id="2" name="Shape 0"/>
+          <p:cNvSpPr/>
+          <p:nvPr/>
+        </p:nvSpPr>
+        <p:spPr>
+          <a:xfrm>
+            <a:off x="548640" y="329184"/>
+            <a:ext cx="960120" cy="274320"/>
+          </a:xfrm>
+          <a:prstGeom prst="roundRect">
+            <a:avLst>
+              <a:gd name="adj" fmla="val 50000"/>
+            </a:avLst>
+          </a:prstGeom>
+          <a:solidFill>
+            <a:srgbClr val="2A78D6"/>
+          </a:solidFill>
+          <a:ln w="12700">
+            <a:solidFill>
+              <a:srgbClr val="2A78D6"/>
+            </a:solidFill>
+            <a:prstDash val="solid"/>
+          </a:ln>
+        </p:spPr>
+      </p:sp>
+      <p:sp>
+        <p:nvSpPr>
+          <p:cNvPr id="3" name="Text 1"/>
           <p:cNvSpPr txBox="1"/>
           <p:nvPr/>
         </p:nvSpPr>
         <p:spPr>
           <a:xfrm>
-            <a:off x="548640" y="365760"/>
-            <a:ext cx="11094415" cy="274320"/>
+            <a:off x="548640" y="329184"/>
+            <a:ext cx="960120" cy="274320"/>
           </a:xfrm>
           <a:prstGeom prst="rect">
             <a:avLst/>
@@ -5217,11 +7251,47 @@
           <a:bodyPr wrap="square" lIns="0" tIns="0" rIns="0" bIns="0" rtlCol="0" anchor="ctr"/>
           <a:lstStyle/>
           <a:p>
+            <a:pPr algn="ctr" indent="0" marL="0">
+              <a:buNone/>
+            </a:pPr>
+            <a:r>
+              <a:rPr lang="en-US" sz="1000" b="1" spc="100" kern="0" dirty="0">
+                <a:solidFill>
+                  <a:srgbClr val="FFFFFF"/>
+                </a:solidFill>
+              </a:rPr>
+              <a:t>AHMED</a:t>
+            </a:r>
+            <a:endParaRPr lang="en-US" sz="1000" dirty="0"/>
+          </a:p>
+        </p:txBody>
+      </p:sp>
+      <p:sp>
+        <p:nvSpPr>
+          <p:cNvPr id="4" name="Text 2"/>
+          <p:cNvSpPr txBox="1"/>
+          <p:nvPr/>
+        </p:nvSpPr>
+        <p:spPr>
+          <a:xfrm>
+            <a:off x="1645920" y="356616"/>
+            <a:ext cx="8229600" cy="274320"/>
+          </a:xfrm>
+          <a:prstGeom prst="rect">
+            <a:avLst/>
+          </a:prstGeom>
+          <a:noFill/>
+          <a:ln/>
+        </p:spPr>
+        <p:txBody>
+          <a:bodyPr wrap="square" lIns="0" tIns="0" rIns="0" bIns="0" rtlCol="0" anchor="t"/>
+          <a:lstStyle/>
+          <a:p>
             <a:pPr indent="0" marL="0">
               <a:buNone/>
             </a:pPr>
             <a:r>
-              <a:rPr lang="en-US" sz="1200" b="1" spc="200" kern="0" dirty="0">
+              <a:rPr lang="en-US" sz="1100" b="1" spc="200" kern="0" dirty="0">
                 <a:solidFill>
                   <a:srgbClr val="2A78D6"/>
                 </a:solidFill>
@@ -5231,13 +7301,13 @@
               </a:rPr>
               <a:t>THE DATASET</a:t>
             </a:r>
-            <a:endParaRPr lang="en-US" sz="1200" dirty="0"/>
-          </a:p>
-        </p:txBody>
-      </p:sp>
-      <p:sp>
-        <p:nvSpPr>
-          <p:cNvPr id="3" name="Text 0"/>
+            <a:endParaRPr lang="en-US" sz="1100" dirty="0"/>
+          </a:p>
+        </p:txBody>
+      </p:sp>
+      <p:sp>
+        <p:nvSpPr>
+          <p:cNvPr id="5" name="Text 0"/>
           <p:cNvSpPr/>
           <p:nvPr>
             <p:ph idx="100" type="title" hasCustomPrompt="1"/>
@@ -5245,8 +7315,8 @@
         </p:nvSpPr>
         <p:spPr>
           <a:xfrm>
-            <a:off x="548640" y="685800"/>
-            <a:ext cx="11094415" cy="822960"/>
+            <a:off x="548640" y="713232"/>
+            <a:ext cx="11094415" cy="777240"/>
           </a:xfrm>
           <a:prstGeom prst="rect">
             <a:avLst/>
@@ -5262,31 +7332,31 @@
               <a:buNone/>
             </a:pPr>
             <a:r>
-              <a:rPr lang="en-US" sz="3400" b="1" dirty="0">
+              <a:rPr lang="en-US" sz="3200" b="1" dirty="0">
                 <a:solidFill>
                   <a:srgbClr val="14213D"/>
                 </a:solidFill>
               </a:rPr>
               <a:t>60 synthetic messages from a manufacturing supplier</a:t>
             </a:r>
-            <a:endParaRPr lang="en-US" sz="3400" dirty="0"/>
-          </a:p>
-        </p:txBody>
-      </p:sp>
-      <p:sp>
-        <p:nvSpPr>
-          <p:cNvPr id="4" name="Shape 2"/>
+            <a:endParaRPr lang="en-US" sz="3200" dirty="0"/>
+          </a:p>
+        </p:txBody>
+      </p:sp>
+      <p:sp>
+        <p:nvSpPr>
+          <p:cNvPr id="6" name="Shape 4"/>
           <p:cNvSpPr/>
           <p:nvPr/>
         </p:nvSpPr>
         <p:spPr>
           <a:xfrm>
-            <a:off x="548640" y="1783080"/>
-            <a:ext cx="3515258" cy="3246120"/>
+            <a:off x="548640" y="1737360"/>
+            <a:ext cx="3515258" cy="3291840"/>
           </a:xfrm>
           <a:prstGeom prst="roundRect">
             <a:avLst>
-              <a:gd name="adj" fmla="val 3380"/>
+              <a:gd name="adj" fmla="val 2778"/>
             </a:avLst>
           </a:prstGeom>
           <a:solidFill>
@@ -5302,86 +7372,14 @@
       </p:sp>
       <p:sp>
         <p:nvSpPr>
-          <p:cNvPr id="5" name="Text 3"/>
-          <p:cNvSpPr txBox="1"/>
-          <p:nvPr/>
-        </p:nvSpPr>
-        <p:spPr>
-          <a:xfrm>
-            <a:off x="822960" y="1965960"/>
-            <a:ext cx="2966618" cy="731520"/>
-          </a:xfrm>
-          <a:prstGeom prst="rect">
-            <a:avLst/>
-          </a:prstGeom>
-          <a:noFill/>
-          <a:ln/>
-        </p:spPr>
-        <p:txBody>
-          <a:bodyPr wrap="square" lIns="0" tIns="0" rIns="0" bIns="0" rtlCol="0" anchor="t"/>
-          <a:lstStyle/>
-          <a:p>
-            <a:pPr indent="0" marL="0">
-              <a:buNone/>
-            </a:pPr>
-            <a:r>
-              <a:rPr lang="en-US" sz="3600" b="1" dirty="0">
-                <a:solidFill>
-                  <a:srgbClr val="14213D"/>
-                </a:solidFill>
-              </a:rPr>
-              <a:t>30 + 30</a:t>
-            </a:r>
-            <a:endParaRPr lang="en-US" sz="3600" dirty="0"/>
-          </a:p>
-        </p:txBody>
-      </p:sp>
-      <p:sp>
-        <p:nvSpPr>
-          <p:cNvPr id="6" name="Text 4"/>
-          <p:cNvSpPr txBox="1"/>
-          <p:nvPr/>
-        </p:nvSpPr>
-        <p:spPr>
-          <a:xfrm>
-            <a:off x="822960" y="2743200"/>
-            <a:ext cx="2966618" cy="365760"/>
-          </a:xfrm>
-          <a:prstGeom prst="rect">
-            <a:avLst/>
-          </a:prstGeom>
-          <a:noFill/>
-          <a:ln/>
-        </p:spPr>
-        <p:txBody>
-          <a:bodyPr wrap="square" lIns="0" tIns="0" rIns="0" bIns="0" rtlCol="0" anchor="t"/>
-          <a:lstStyle/>
-          <a:p>
-            <a:pPr indent="0" marL="0">
-              <a:buNone/>
-            </a:pPr>
-            <a:r>
-              <a:rPr lang="en-US" sz="1700" b="1" dirty="0">
-                <a:solidFill>
-                  <a:srgbClr val="14213D"/>
-                </a:solidFill>
-              </a:rPr>
-              <a:t>Generation</a:t>
-            </a:r>
-            <a:endParaRPr lang="en-US" sz="1700" dirty="0"/>
-          </a:p>
-        </p:txBody>
-      </p:sp>
-      <p:sp>
-        <p:nvSpPr>
           <p:cNvPr id="7" name="Text 5"/>
           <p:cNvSpPr txBox="1"/>
           <p:nvPr/>
         </p:nvSpPr>
         <p:spPr>
           <a:xfrm>
-            <a:off x="822960" y="3154680"/>
-            <a:ext cx="2966618" cy="1783080"/>
+            <a:off x="822960" y="1920240"/>
+            <a:ext cx="2966618" cy="731520"/>
           </a:xfrm>
           <a:prstGeom prst="rect">
             <a:avLst/>
@@ -5397,12 +7395,84 @@
               <a:buNone/>
             </a:pPr>
             <a:r>
+              <a:rPr lang="en-US" sz="3600" b="1" dirty="0">
+                <a:solidFill>
+                  <a:srgbClr val="14213D"/>
+                </a:solidFill>
+              </a:rPr>
+              <a:t>30 + 30</a:t>
+            </a:r>
+            <a:endParaRPr lang="en-US" sz="3600" dirty="0"/>
+          </a:p>
+        </p:txBody>
+      </p:sp>
+      <p:sp>
+        <p:nvSpPr>
+          <p:cNvPr id="8" name="Text 6"/>
+          <p:cNvSpPr txBox="1"/>
+          <p:nvPr/>
+        </p:nvSpPr>
+        <p:spPr>
+          <a:xfrm>
+            <a:off x="822960" y="2697480"/>
+            <a:ext cx="2966618" cy="365760"/>
+          </a:xfrm>
+          <a:prstGeom prst="rect">
+            <a:avLst/>
+          </a:prstGeom>
+          <a:noFill/>
+          <a:ln/>
+        </p:spPr>
+        <p:txBody>
+          <a:bodyPr wrap="square" lIns="0" tIns="0" rIns="0" bIns="0" rtlCol="0" anchor="t"/>
+          <a:lstStyle/>
+          <a:p>
+            <a:pPr indent="0" marL="0">
+              <a:buNone/>
+            </a:pPr>
+            <a:r>
+              <a:rPr lang="en-US" sz="1700" b="1" dirty="0">
+                <a:solidFill>
+                  <a:srgbClr val="14213D"/>
+                </a:solidFill>
+              </a:rPr>
+              <a:t>Generation</a:t>
+            </a:r>
+            <a:endParaRPr lang="en-US" sz="1700" dirty="0"/>
+          </a:p>
+        </p:txBody>
+      </p:sp>
+      <p:sp>
+        <p:nvSpPr>
+          <p:cNvPr id="9" name="Text 7"/>
+          <p:cNvSpPr txBox="1"/>
+          <p:nvPr/>
+        </p:nvSpPr>
+        <p:spPr>
+          <a:xfrm>
+            <a:off x="822960" y="3108960"/>
+            <a:ext cx="2966618" cy="1828800"/>
+          </a:xfrm>
+          <a:prstGeom prst="rect">
+            <a:avLst/>
+          </a:prstGeom>
+          <a:noFill/>
+          <a:ln/>
+        </p:spPr>
+        <p:txBody>
+          <a:bodyPr wrap="square" lIns="0" tIns="0" rIns="0" bIns="0" rtlCol="0" anchor="t"/>
+          <a:lstStyle/>
+          <a:p>
+            <a:pPr indent="0" marL="0">
+              <a:buNone/>
+            </a:pPr>
+            <a:r>
               <a:rPr lang="en-US" sz="1400" dirty="0">
                 <a:solidFill>
                   <a:srgbClr val="4A5568"/>
                 </a:solidFill>
               </a:rPr>
-              <a:t>Customers of a CNC, robot and compressor supplier. 15 intents per class, each written twice (an original plus a paraphrase). Drafted with an AI assistant, then reviewed by the team.</a:t>
+              <a:t>Customers of a CNC, robot and compressor supplier. 15 intents per class, each written twice: an original and a paraphrase (same group_id). Drafted with an AI assistant, then reviewed line by line by the team.</a:t>
             </a:r>
             <a:endParaRPr lang="en-US" sz="1400" dirty="0"/>
           </a:p>
@@ -5410,18 +7480,18 @@
       </p:sp>
       <p:sp>
         <p:nvSpPr>
-          <p:cNvPr id="8" name="Shape 6"/>
+          <p:cNvPr id="10" name="Shape 8"/>
           <p:cNvSpPr/>
           <p:nvPr/>
         </p:nvSpPr>
         <p:spPr>
           <a:xfrm>
-            <a:off x="4338218" y="1783080"/>
-            <a:ext cx="3515258" cy="3246120"/>
+            <a:off x="4338218" y="1737360"/>
+            <a:ext cx="3515258" cy="3291840"/>
           </a:xfrm>
           <a:prstGeom prst="roundRect">
             <a:avLst>
-              <a:gd name="adj" fmla="val 3380"/>
+              <a:gd name="adj" fmla="val 2778"/>
             </a:avLst>
           </a:prstGeom>
           <a:solidFill>
@@ -5437,86 +7507,14 @@
       </p:sp>
       <p:sp>
         <p:nvSpPr>
-          <p:cNvPr id="9" name="Text 7"/>
-          <p:cNvSpPr txBox="1"/>
-          <p:nvPr/>
-        </p:nvSpPr>
-        <p:spPr>
-          <a:xfrm>
-            <a:off x="4612538" y="1965960"/>
-            <a:ext cx="2966618" cy="731520"/>
-          </a:xfrm>
-          <a:prstGeom prst="rect">
-            <a:avLst/>
-          </a:prstGeom>
-          <a:noFill/>
-          <a:ln/>
-        </p:spPr>
-        <p:txBody>
-          <a:bodyPr wrap="square" lIns="0" tIns="0" rIns="0" bIns="0" rtlCol="0" anchor="t"/>
-          <a:lstStyle/>
-          <a:p>
-            <a:pPr indent="0" marL="0">
-              <a:buNone/>
-            </a:pPr>
-            <a:r>
-              <a:rPr lang="en-US" sz="3600" b="1" dirty="0">
-                <a:solidFill>
-                  <a:srgbClr val="14213D"/>
-                </a:solidFill>
-              </a:rPr>
-              <a:t>1 rule</a:t>
-            </a:r>
-            <a:endParaRPr lang="en-US" sz="3600" dirty="0"/>
-          </a:p>
-        </p:txBody>
-      </p:sp>
-      <p:sp>
-        <p:nvSpPr>
-          <p:cNvPr id="10" name="Text 8"/>
-          <p:cNvSpPr txBox="1"/>
-          <p:nvPr/>
-        </p:nvSpPr>
-        <p:spPr>
-          <a:xfrm>
-            <a:off x="4612538" y="2743200"/>
-            <a:ext cx="2966618" cy="365760"/>
-          </a:xfrm>
-          <a:prstGeom prst="rect">
-            <a:avLst/>
-          </a:prstGeom>
-          <a:noFill/>
-          <a:ln/>
-        </p:spPr>
-        <p:txBody>
-          <a:bodyPr wrap="square" lIns="0" tIns="0" rIns="0" bIns="0" rtlCol="0" anchor="t"/>
-          <a:lstStyle/>
-          <a:p>
-            <a:pPr indent="0" marL="0">
-              <a:buNone/>
-            </a:pPr>
-            <a:r>
-              <a:rPr lang="en-US" sz="1700" b="1" dirty="0">
-                <a:solidFill>
-                  <a:srgbClr val="14213D"/>
-                </a:solidFill>
-              </a:rPr>
-              <a:t>Labels</a:t>
-            </a:r>
-            <a:endParaRPr lang="en-US" sz="1700" dirty="0"/>
-          </a:p>
-        </p:txBody>
-      </p:sp>
-      <p:sp>
-        <p:nvSpPr>
           <p:cNvPr id="11" name="Text 9"/>
           <p:cNvSpPr txBox="1"/>
           <p:nvPr/>
         </p:nvSpPr>
         <p:spPr>
           <a:xfrm>
-            <a:off x="4612538" y="3154680"/>
-            <a:ext cx="2966618" cy="1783080"/>
+            <a:off x="4612538" y="1920240"/>
+            <a:ext cx="2966618" cy="731520"/>
           </a:xfrm>
           <a:prstGeom prst="rect">
             <a:avLst/>
@@ -5532,12 +7530,84 @@
               <a:buNone/>
             </a:pPr>
             <a:r>
+              <a:rPr lang="en-US" sz="3600" b="1" dirty="0">
+                <a:solidFill>
+                  <a:srgbClr val="14213D"/>
+                </a:solidFill>
+              </a:rPr>
+              <a:t>1 rule</a:t>
+            </a:r>
+            <a:endParaRPr lang="en-US" sz="3600" dirty="0"/>
+          </a:p>
+        </p:txBody>
+      </p:sp>
+      <p:sp>
+        <p:nvSpPr>
+          <p:cNvPr id="12" name="Text 10"/>
+          <p:cNvSpPr txBox="1"/>
+          <p:nvPr/>
+        </p:nvSpPr>
+        <p:spPr>
+          <a:xfrm>
+            <a:off x="4612538" y="2697480"/>
+            <a:ext cx="2966618" cy="365760"/>
+          </a:xfrm>
+          <a:prstGeom prst="rect">
+            <a:avLst/>
+          </a:prstGeom>
+          <a:noFill/>
+          <a:ln/>
+        </p:spPr>
+        <p:txBody>
+          <a:bodyPr wrap="square" lIns="0" tIns="0" rIns="0" bIns="0" rtlCol="0" anchor="t"/>
+          <a:lstStyle/>
+          <a:p>
+            <a:pPr indent="0" marL="0">
+              <a:buNone/>
+            </a:pPr>
+            <a:r>
+              <a:rPr lang="en-US" sz="1700" b="1" dirty="0">
+                <a:solidFill>
+                  <a:srgbClr val="14213D"/>
+                </a:solidFill>
+              </a:rPr>
+              <a:t>Labels</a:t>
+            </a:r>
+            <a:endParaRPr lang="en-US" sz="1700" dirty="0"/>
+          </a:p>
+        </p:txBody>
+      </p:sp>
+      <p:sp>
+        <p:nvSpPr>
+          <p:cNvPr id="13" name="Text 11"/>
+          <p:cNvSpPr txBox="1"/>
+          <p:nvPr/>
+        </p:nvSpPr>
+        <p:spPr>
+          <a:xfrm>
+            <a:off x="4612538" y="3108960"/>
+            <a:ext cx="2966618" cy="1828800"/>
+          </a:xfrm>
+          <a:prstGeom prst="rect">
+            <a:avLst/>
+          </a:prstGeom>
+          <a:noFill/>
+          <a:ln/>
+        </p:spPr>
+        <p:txBody>
+          <a:bodyPr wrap="square" lIns="0" tIns="0" rIns="0" bIns="0" rtlCol="0" anchor="t"/>
+          <a:lstStyle/>
+          <a:p>
+            <a:pPr indent="0" marL="0">
+              <a:buNone/>
+            </a:pPr>
+            <a:r>
               <a:rPr lang="en-US" sz="1400" dirty="0">
                 <a:solidFill>
                   <a:srgbClr val="4A5568"/>
                 </a:solidFill>
               </a:rPr>
-              <a:t>0 = support: something the customer already has is wrong. 1 = sales: they want to buy something new. Mixed intent goes to support, because existing problems come first. Agreed before testing.</a:t>
+              <a:t>0 = support: something the customer already has is wrong. 1 = sales: they want something new. Mixed intent goes to support (existing problems first). Agreed by the team before any test.</a:t>
             </a:r>
             <a:endParaRPr lang="en-US" sz="1400" dirty="0"/>
           </a:p>
@@ -5545,18 +7615,18 @@
       </p:sp>
       <p:sp>
         <p:nvSpPr>
-          <p:cNvPr id="12" name="Shape 10"/>
+          <p:cNvPr id="14" name="Shape 12"/>
           <p:cNvSpPr/>
           <p:nvPr/>
         </p:nvSpPr>
         <p:spPr>
           <a:xfrm>
-            <a:off x="8127797" y="1783080"/>
-            <a:ext cx="3515258" cy="3246120"/>
+            <a:off x="8127797" y="1737360"/>
+            <a:ext cx="3515258" cy="3291840"/>
           </a:xfrm>
           <a:prstGeom prst="roundRect">
             <a:avLst>
-              <a:gd name="adj" fmla="val 3380"/>
+              <a:gd name="adj" fmla="val 2778"/>
             </a:avLst>
           </a:prstGeom>
           <a:solidFill>
@@ -5572,86 +7642,14 @@
       </p:sp>
       <p:sp>
         <p:nvSpPr>
-          <p:cNvPr id="13" name="Text 11"/>
-          <p:cNvSpPr txBox="1"/>
-          <p:nvPr/>
-        </p:nvSpPr>
-        <p:spPr>
-          <a:xfrm>
-            <a:off x="8402117" y="1965960"/>
-            <a:ext cx="2966618" cy="731520"/>
-          </a:xfrm>
-          <a:prstGeom prst="rect">
-            <a:avLst/>
-          </a:prstGeom>
-          <a:noFill/>
-          <a:ln/>
-        </p:spPr>
-        <p:txBody>
-          <a:bodyPr wrap="square" lIns="0" tIns="0" rIns="0" bIns="0" rtlCol="0" anchor="t"/>
-          <a:lstStyle/>
-          <a:p>
-            <a:pPr indent="0" marL="0">
-              <a:buNone/>
-            </a:pPr>
-            <a:r>
-              <a:rPr lang="en-US" sz="3600" b="1" dirty="0">
-                <a:solidFill>
-                  <a:srgbClr val="14213D"/>
-                </a:solidFill>
-              </a:rPr>
-              <a:t>40 / 20</a:t>
-            </a:r>
-            <a:endParaRPr lang="en-US" sz="3600" dirty="0"/>
-          </a:p>
-        </p:txBody>
-      </p:sp>
-      <p:sp>
-        <p:nvSpPr>
-          <p:cNvPr id="14" name="Text 12"/>
-          <p:cNvSpPr txBox="1"/>
-          <p:nvPr/>
-        </p:nvSpPr>
-        <p:spPr>
-          <a:xfrm>
-            <a:off x="8402117" y="2743200"/>
-            <a:ext cx="2966618" cy="365760"/>
-          </a:xfrm>
-          <a:prstGeom prst="rect">
-            <a:avLst/>
-          </a:prstGeom>
-          <a:noFill/>
-          <a:ln/>
-        </p:spPr>
-        <p:txBody>
-          <a:bodyPr wrap="square" lIns="0" tIns="0" rIns="0" bIns="0" rtlCol="0" anchor="t"/>
-          <a:lstStyle/>
-          <a:p>
-            <a:pPr indent="0" marL="0">
-              <a:buNone/>
-            </a:pPr>
-            <a:r>
-              <a:rPr lang="en-US" sz="1700" b="1" dirty="0">
-                <a:solidFill>
-                  <a:srgbClr val="14213D"/>
-                </a:solidFill>
-              </a:rPr>
-              <a:t>Split</a:t>
-            </a:r>
-            <a:endParaRPr lang="en-US" sz="1700" dirty="0"/>
-          </a:p>
-        </p:txBody>
-      </p:sp>
-      <p:sp>
-        <p:nvSpPr>
           <p:cNvPr id="15" name="Text 13"/>
           <p:cNvSpPr txBox="1"/>
           <p:nvPr/>
         </p:nvSpPr>
         <p:spPr>
           <a:xfrm>
-            <a:off x="8402117" y="3154680"/>
-            <a:ext cx="2966618" cy="1783080"/>
+            <a:off x="8402117" y="1920240"/>
+            <a:ext cx="2966618" cy="731520"/>
           </a:xfrm>
           <a:prstGeom prst="rect">
             <a:avLst/>
@@ -5667,14 +7665,14 @@
               <a:buNone/>
             </a:pPr>
             <a:r>
-              <a:rPr lang="en-US" sz="1400" dirty="0">
-                <a:solidFill>
-                  <a:srgbClr val="4A5568"/>
-                </a:solidFill>
-              </a:rPr>
-              <a:t>Split by intent group with random seed 42: 5 support and 5 sales groups held out. A paraphrase never sits on the other side of the split from its original. Train 20+20, test 10+10.</a:t>
-            </a:r>
-            <a:endParaRPr lang="en-US" sz="1400" dirty="0"/>
+              <a:rPr lang="en-US" sz="3600" b="1" dirty="0">
+                <a:solidFill>
+                  <a:srgbClr val="14213D"/>
+                </a:solidFill>
+              </a:rPr>
+              <a:t>40 / 20</a:t>
+            </a:r>
+            <a:endParaRPr lang="en-US" sz="3600" dirty="0"/>
           </a:p>
         </p:txBody>
       </p:sp>
@@ -5686,8 +7684,8 @@
         </p:nvSpPr>
         <p:spPr>
           <a:xfrm>
-            <a:off x="548640" y="5257800"/>
-            <a:ext cx="11094415" cy="731520"/>
+            <a:off x="8402117" y="2697480"/>
+            <a:ext cx="2966618" cy="365760"/>
           </a:xfrm>
           <a:prstGeom prst="rect">
             <a:avLst/>
@@ -5703,80 +7701,14 @@
               <a:buNone/>
             </a:pPr>
             <a:r>
-              <a:rPr lang="en-US" sz="1500" dirty="0">
-                <a:solidFill>
-                  <a:srgbClr val="4A5568"/>
-                </a:solidFill>
-              </a:rPr>
-              <a:t>Hard cases on purpose: </a:t>
-            </a:r>
-            <a:pPr indent="0" marL="0">
-              <a:buNone/>
-            </a:pPr>
-            <a:r>
-              <a:rPr lang="en-US" sz="1500" b="1" dirty="0">
-                <a:solidFill>
-                  <a:srgbClr val="4A5568"/>
-                </a:solidFill>
-              </a:rPr>
-              <a:t>negation</a:t>
-            </a:r>
-            <a:pPr indent="0" marL="0">
-              <a:buNone/>
-            </a:pPr>
-            <a:r>
-              <a:rPr lang="en-US" sz="1500" dirty="0">
-                <a:solidFill>
-                  <a:srgbClr val="4A5568"/>
-                </a:solidFill>
-              </a:rPr>
-              <a:t> (“No issues with our robots, we want a third cell”), </a:t>
-            </a:r>
-            <a:pPr indent="0" marL="0">
-              <a:buNone/>
-            </a:pPr>
-            <a:r>
-              <a:rPr lang="en-US" sz="1500" b="1" dirty="0">
-                <a:solidFill>
-                  <a:srgbClr val="4A5568"/>
-                </a:solidFill>
-              </a:rPr>
-              <a:t>mixed intent</a:t>
-            </a:r>
-            <a:pPr indent="0" marL="0">
-              <a:buNone/>
-            </a:pPr>
-            <a:r>
-              <a:rPr lang="en-US" sz="1500" dirty="0">
-                <a:solidFill>
-                  <a:srgbClr val="4A5568"/>
-                </a:solidFill>
-              </a:rPr>
-              <a:t> (4 messages), and an </a:t>
-            </a:r>
-            <a:pPr indent="0" marL="0">
-              <a:buNone/>
-            </a:pPr>
-            <a:r>
-              <a:rPr lang="en-US" sz="1500" b="1" dirty="0">
-                <a:solidFill>
-                  <a:srgbClr val="4A5568"/>
-                </a:solidFill>
-              </a:rPr>
-              <a:t>existing order that is late</a:t>
-            </a:r>
-            <a:pPr indent="0" marL="0">
-              <a:buNone/>
-            </a:pPr>
-            <a:r>
-              <a:rPr lang="en-US" sz="1500" dirty="0">
-                <a:solidFill>
-                  <a:srgbClr val="4A5568"/>
-                </a:solidFill>
-              </a:rPr>
-              <a:t> (purchase words, but it is support).</a:t>
-            </a:r>
-            <a:endParaRPr lang="en-US" sz="1500" dirty="0"/>
+              <a:rPr lang="en-US" sz="1700" b="1" dirty="0">
+                <a:solidFill>
+                  <a:srgbClr val="14213D"/>
+                </a:solidFill>
+              </a:rPr>
+              <a:t>Split</a:t>
+            </a:r>
+            <a:endParaRPr lang="en-US" sz="1700" dirty="0"/>
           </a:p>
         </p:txBody>
       </p:sp>
@@ -5788,6 +7720,166 @@
         </p:nvSpPr>
         <p:spPr>
           <a:xfrm>
+            <a:off x="8402117" y="3108960"/>
+            <a:ext cx="2966618" cy="1828800"/>
+          </a:xfrm>
+          <a:prstGeom prst="rect">
+            <a:avLst/>
+          </a:prstGeom>
+          <a:noFill/>
+          <a:ln/>
+        </p:spPr>
+        <p:txBody>
+          <a:bodyPr wrap="square" lIns="0" tIns="0" rIns="0" bIns="0" rtlCol="0" anchor="t"/>
+          <a:lstStyle/>
+          <a:p>
+            <a:pPr indent="0" marL="0">
+              <a:buNone/>
+            </a:pPr>
+            <a:r>
+              <a:rPr lang="en-US" sz="1400" dirty="0">
+                <a:solidFill>
+                  <a:srgbClr val="4A5568"/>
+                </a:solidFill>
+              </a:rPr>
+              <a:t>By intent group, random seed 42: 5 support + 5 sales groups held out. A paraphrase never crosses the split, so near-duplicates stay together. Train 20+20, test 10+10.</a:t>
+            </a:r>
+            <a:endParaRPr lang="en-US" sz="1400" dirty="0"/>
+          </a:p>
+        </p:txBody>
+      </p:sp>
+      <p:sp>
+        <p:nvSpPr>
+          <p:cNvPr id="18" name="Text 16"/>
+          <p:cNvSpPr txBox="1"/>
+          <p:nvPr/>
+        </p:nvSpPr>
+        <p:spPr>
+          <a:xfrm>
+            <a:off x="548640" y="5257800"/>
+            <a:ext cx="11094415" cy="731520"/>
+          </a:xfrm>
+          <a:prstGeom prst="rect">
+            <a:avLst/>
+          </a:prstGeom>
+          <a:noFill/>
+          <a:ln/>
+        </p:spPr>
+        <p:txBody>
+          <a:bodyPr wrap="square" lIns="0" tIns="0" rIns="0" bIns="0" rtlCol="0" anchor="t"/>
+          <a:lstStyle/>
+          <a:p>
+            <a:pPr indent="0" marL="0">
+              <a:buNone/>
+            </a:pPr>
+            <a:r>
+              <a:rPr lang="en-US" sz="1500" dirty="0">
+                <a:solidFill>
+                  <a:srgbClr val="4A5568"/>
+                </a:solidFill>
+              </a:rPr>
+              <a:t>Hard cases on purpose: </a:t>
+            </a:r>
+            <a:pPr indent="0" marL="0">
+              <a:buNone/>
+            </a:pPr>
+            <a:r>
+              <a:rPr lang="en-US" sz="1500" b="1" dirty="0">
+                <a:solidFill>
+                  <a:srgbClr val="4A5568"/>
+                </a:solidFill>
+              </a:rPr>
+              <a:t>negation</a:t>
+            </a:r>
+            <a:pPr indent="0" marL="0">
+              <a:buNone/>
+            </a:pPr>
+            <a:r>
+              <a:rPr lang="en-US" sz="1500" dirty="0">
+                <a:solidFill>
+                  <a:srgbClr val="4A5568"/>
+                </a:solidFill>
+              </a:rPr>
+              <a:t> (6), </a:t>
+            </a:r>
+            <a:pPr indent="0" marL="0">
+              <a:buNone/>
+            </a:pPr>
+            <a:r>
+              <a:rPr lang="en-US" sz="1500" b="1" dirty="0">
+                <a:solidFill>
+                  <a:srgbClr val="4A5568"/>
+                </a:solidFill>
+              </a:rPr>
+              <a:t>mixed intent</a:t>
+            </a:r>
+            <a:pPr indent="0" marL="0">
+              <a:buNone/>
+            </a:pPr>
+            <a:r>
+              <a:rPr lang="en-US" sz="1500" dirty="0">
+                <a:solidFill>
+                  <a:srgbClr val="4A5568"/>
+                </a:solidFill>
+              </a:rPr>
+              <a:t> (4), late </a:t>
+            </a:r>
+            <a:pPr indent="0" marL="0">
+              <a:buNone/>
+            </a:pPr>
+            <a:r>
+              <a:rPr lang="en-US" sz="1500" b="1" dirty="0">
+                <a:solidFill>
+                  <a:srgbClr val="4A5568"/>
+                </a:solidFill>
+              </a:rPr>
+              <a:t>existing orders</a:t>
+            </a:r>
+            <a:pPr indent="0" marL="0">
+              <a:buNone/>
+            </a:pPr>
+            <a:r>
+              <a:rPr lang="en-US" sz="1500" dirty="0">
+                <a:solidFill>
+                  <a:srgbClr val="4A5568"/>
+                </a:solidFill>
+              </a:rPr>
+              <a:t> that use purchase words (2). Plus </a:t>
+            </a:r>
+            <a:pPr indent="0" marL="0">
+              <a:buNone/>
+            </a:pPr>
+            <a:r>
+              <a:rPr lang="en-US" sz="1500" b="1" dirty="0">
+                <a:solidFill>
+                  <a:srgbClr val="4A5568"/>
+                </a:solidFill>
+              </a:rPr>
+              <a:t>8 new hard messages</a:t>
+            </a:r>
+            <a:pPr indent="0" marL="0">
+              <a:buNone/>
+            </a:pPr>
+            <a:r>
+              <a:rPr lang="en-US" sz="1500" dirty="0">
+                <a:solidFill>
+                  <a:srgbClr val="4A5568"/>
+                </a:solidFill>
+              </a:rPr>
+              <a:t> written after the split as a stress test.</a:t>
+            </a:r>
+            <a:endParaRPr lang="en-US" sz="1500" dirty="0"/>
+          </a:p>
+        </p:txBody>
+      </p:sp>
+      <p:sp>
+        <p:nvSpPr>
+          <p:cNvPr id="19" name="Text 17"/>
+          <p:cNvSpPr txBox="1"/>
+          <p:nvPr/>
+        </p:nvSpPr>
+        <p:spPr>
+          <a:xfrm>
             <a:off x="548640" y="6400800"/>
             <a:ext cx="10180015" cy="274320"/>
           </a:xfrm>
@@ -5798,21 +7890,21 @@
           <a:ln/>
         </p:spPr>
         <p:txBody>
-          <a:bodyPr wrap="square" lIns="0" tIns="0" rIns="0" bIns="0" rtlCol="0" anchor="ctr"/>
+          <a:bodyPr wrap="square" lIns="0" tIns="0" rIns="0" bIns="0" rtlCol="0" anchor="t"/>
           <a:lstStyle/>
           <a:p>
             <a:pPr indent="0" marL="0">
               <a:buNone/>
             </a:pPr>
             <a:r>
-              <a:rPr lang="en-US" sz="1100" dirty="0">
+              <a:rPr lang="en-US" sz="1000" dirty="0">
                 <a:solidFill>
                   <a:srgbClr val="6B7689"/>
                 </a:solidFill>
               </a:rPr>
-              <a:t>Ahmed · Dataset · kio_routing_dataset.csv</a:t>
-            </a:r>
-            <a:endParaRPr lang="en-US" sz="1100" dirty="0"/>
+              <a:t>Files: data/kio_routing_dataset.csv · data/stress_test.csv</a:t>
+            </a:r>
+            <a:endParaRPr lang="en-US" sz="1000" dirty="0"/>
           </a:p>
         </p:txBody>
       </p:sp>
@@ -5888,14 +7980,41 @@
       </p:grpSpPr>
       <p:sp>
         <p:nvSpPr>
-          <p:cNvPr id="2" name="Text 0"/>
+          <p:cNvPr id="2" name="Shape 0"/>
+          <p:cNvSpPr/>
+          <p:nvPr/>
+        </p:nvSpPr>
+        <p:spPr>
+          <a:xfrm>
+            <a:off x="548640" y="329184"/>
+            <a:ext cx="960120" cy="274320"/>
+          </a:xfrm>
+          <a:prstGeom prst="roundRect">
+            <a:avLst>
+              <a:gd name="adj" fmla="val 50000"/>
+            </a:avLst>
+          </a:prstGeom>
+          <a:solidFill>
+            <a:srgbClr val="2A78D6"/>
+          </a:solidFill>
+          <a:ln w="12700">
+            <a:solidFill>
+              <a:srgbClr val="2A78D6"/>
+            </a:solidFill>
+            <a:prstDash val="solid"/>
+          </a:ln>
+        </p:spPr>
+      </p:sp>
+      <p:sp>
+        <p:nvSpPr>
+          <p:cNvPr id="3" name="Text 1"/>
           <p:cNvSpPr txBox="1"/>
           <p:nvPr/>
         </p:nvSpPr>
         <p:spPr>
           <a:xfrm>
-            <a:off x="548640" y="365760"/>
-            <a:ext cx="11094415" cy="274320"/>
+            <a:off x="548640" y="329184"/>
+            <a:ext cx="960120" cy="274320"/>
           </a:xfrm>
           <a:prstGeom prst="rect">
             <a:avLst/>
@@ -5907,11 +8026,47 @@
           <a:bodyPr wrap="square" lIns="0" tIns="0" rIns="0" bIns="0" rtlCol="0" anchor="ctr"/>
           <a:lstStyle/>
           <a:p>
+            <a:pPr algn="ctr" indent="0" marL="0">
+              <a:buNone/>
+            </a:pPr>
+            <a:r>
+              <a:rPr lang="en-US" sz="1000" b="1" spc="100" kern="0" dirty="0">
+                <a:solidFill>
+                  <a:srgbClr val="FFFFFF"/>
+                </a:solidFill>
+              </a:rPr>
+              <a:t>AHMED</a:t>
+            </a:r>
+            <a:endParaRPr lang="en-US" sz="1000" dirty="0"/>
+          </a:p>
+        </p:txBody>
+      </p:sp>
+      <p:sp>
+        <p:nvSpPr>
+          <p:cNvPr id="4" name="Text 2"/>
+          <p:cNvSpPr txBox="1"/>
+          <p:nvPr/>
+        </p:nvSpPr>
+        <p:spPr>
+          <a:xfrm>
+            <a:off x="1645920" y="356616"/>
+            <a:ext cx="8229600" cy="274320"/>
+          </a:xfrm>
+          <a:prstGeom prst="rect">
+            <a:avLst/>
+          </a:prstGeom>
+          <a:noFill/>
+          <a:ln/>
+        </p:spPr>
+        <p:txBody>
+          <a:bodyPr wrap="square" lIns="0" tIns="0" rIns="0" bIns="0" rtlCol="0" anchor="t"/>
+          <a:lstStyle/>
+          <a:p>
             <a:pPr indent="0" marL="0">
               <a:buNone/>
             </a:pPr>
             <a:r>
-              <a:rPr lang="en-US" sz="1200" b="1" spc="200" kern="0" dirty="0">
+              <a:rPr lang="en-US" sz="1100" b="1" spc="200" kern="0" dirty="0">
                 <a:solidFill>
                   <a:srgbClr val="2A78D6"/>
                 </a:solidFill>
@@ -5921,13 +8076,13 @@
               </a:rPr>
               <a:t>SAMPLE ROWS</a:t>
             </a:r>
-            <a:endParaRPr lang="en-US" sz="1200" dirty="0"/>
-          </a:p>
-        </p:txBody>
-      </p:sp>
-      <p:sp>
-        <p:nvSpPr>
-          <p:cNvPr id="3" name="Text 0"/>
+            <a:endParaRPr lang="en-US" sz="1100" dirty="0"/>
+          </a:p>
+        </p:txBody>
+      </p:sp>
+      <p:sp>
+        <p:nvSpPr>
+          <p:cNvPr id="5" name="Text 0"/>
           <p:cNvSpPr/>
           <p:nvPr>
             <p:ph idx="100" type="title" hasCustomPrompt="1"/>
@@ -5935,8 +8090,8 @@
         </p:nvSpPr>
         <p:spPr>
           <a:xfrm>
-            <a:off x="548640" y="685800"/>
-            <a:ext cx="11094415" cy="822960"/>
+            <a:off x="548640" y="713232"/>
+            <a:ext cx="11094415" cy="777240"/>
           </a:xfrm>
           <a:prstGeom prst="rect">
             <a:avLst/>
@@ -5952,14 +8107,14 @@
               <a:buNone/>
             </a:pPr>
             <a:r>
-              <a:rPr lang="en-US" sz="3400" b="1" dirty="0">
+              <a:rPr lang="en-US" sz="3200" b="1" dirty="0">
                 <a:solidFill>
                   <a:srgbClr val="14213D"/>
                 </a:solidFill>
               </a:rPr>
-              <a:t>Six rows from kio_routing_dataset.csv</a:t>
-            </a:r>
-            <a:endParaRPr lang="en-US" sz="3400" dirty="0"/>
+              <a:t>Six rows from the dataset</a:t>
+            </a:r>
+            <a:endParaRPr lang="en-US" sz="3200" dirty="0"/>
           </a:p>
         </p:txBody>
       </p:sp>
@@ -5978,8 +8133,8 @@
           </p:nvPr>
         </p:nvGraphicFramePr>
         <p:xfrm>
-          <a:off x="548640" y="1828800"/>
-          <a:ext cx="11094415" cy="914400"/>
+          <a:off x="548640" y="1737360"/>
+          <a:ext cx="11091672" cy="914400"/>
         </p:xfrm>
         <a:graphic>
           <a:graphicData uri="http://schemas.openxmlformats.org/drawingml/2006/table">
@@ -6012,7 +8167,7 @@
                       <a:endParaRPr lang="en-US" sz="1600" dirty="0"/>
                     </a:p>
                   </a:txBody>
-                  <a:tcPr marL="91440" marR="91440" marT="91440" marB="91440" anchor="ctr">
+                  <a:tcPr marL="91440" marR="91440" marT="64008" marB="64008" anchor="ctr">
                     <a:lnL w="9525" cap="flat" cmpd="sng" algn="ctr">
                       <a:solidFill>
                         <a:srgbClr val="D5D8DE"/>
@@ -6073,7 +8228,7 @@
                       <a:endParaRPr lang="en-US" sz="1600" dirty="0"/>
                     </a:p>
                   </a:txBody>
-                  <a:tcPr marL="91440" marR="91440" marT="91440" marB="91440" anchor="ctr">
+                  <a:tcPr marL="91440" marR="91440" marT="64008" marB="64008" anchor="ctr">
                     <a:lnL w="9525" cap="flat" cmpd="sng" algn="ctr">
                       <a:solidFill>
                         <a:srgbClr val="D5D8DE"/>
@@ -6134,7 +8289,7 @@
                       <a:endParaRPr lang="en-US" sz="1600" dirty="0"/>
                     </a:p>
                   </a:txBody>
-                  <a:tcPr marL="91440" marR="91440" marT="91440" marB="91440" anchor="ctr">
+                  <a:tcPr marL="91440" marR="91440" marT="64008" marB="64008" anchor="ctr">
                     <a:lnL w="9525" cap="flat" cmpd="sng" algn="ctr">
                       <a:solidFill>
                         <a:srgbClr val="D5D8DE"/>
@@ -6195,7 +8350,7 @@
                       <a:endParaRPr lang="en-US" sz="1600" dirty="0"/>
                     </a:p>
                   </a:txBody>
-                  <a:tcPr marL="91440" marR="91440" marT="91440" marB="91440" anchor="ctr">
+                  <a:tcPr marL="91440" marR="91440" marT="64008" marB="64008" anchor="ctr">
                     <a:lnL w="9525" cap="flat" cmpd="sng" algn="ctr">
                       <a:solidFill>
                         <a:srgbClr val="D5D8DE"/>
@@ -6256,7 +8411,7 @@
                       <a:endParaRPr lang="en-US" sz="1600" dirty="0"/>
                     </a:p>
                   </a:txBody>
-                  <a:tcPr marL="91440" marR="91440" marT="91440" marB="91440" anchor="ctr">
+                  <a:tcPr marL="91440" marR="91440" marT="64008" marB="64008" anchor="ctr">
                     <a:lnL w="9525" cap="flat" cmpd="sng" algn="ctr">
                       <a:solidFill>
                         <a:srgbClr val="D5D8DE"/>
@@ -6319,7 +8474,7 @@
                       <a:endParaRPr lang="en-US" sz="1600" dirty="0"/>
                     </a:p>
                   </a:txBody>
-                  <a:tcPr marL="91440" marR="91440" marT="91440" marB="91440" anchor="ctr">
+                  <a:tcPr marL="91440" marR="91440" marT="64008" marB="64008" anchor="ctr">
                     <a:lnL w="9525" cap="flat" cmpd="sng" algn="ctr">
                       <a:solidFill>
                         <a:srgbClr val="D5D8DE"/>
@@ -6380,7 +8535,7 @@
                       <a:endParaRPr lang="en-US" sz="1600" dirty="0"/>
                     </a:p>
                   </a:txBody>
-                  <a:tcPr marL="91440" marR="91440" marT="91440" marB="91440" anchor="ctr">
+                  <a:tcPr marL="91440" marR="91440" marT="64008" marB="64008" anchor="ctr">
                     <a:lnL w="9525" cap="flat" cmpd="sng" algn="ctr">
                       <a:solidFill>
                         <a:srgbClr val="D5D8DE"/>
@@ -6441,7 +8596,7 @@
                       <a:endParaRPr lang="en-US" sz="1600" dirty="0"/>
                     </a:p>
                   </a:txBody>
-                  <a:tcPr marL="91440" marR="91440" marT="91440" marB="91440" anchor="ctr">
+                  <a:tcPr marL="91440" marR="91440" marT="64008" marB="64008" anchor="ctr">
                     <a:lnL w="9525" cap="flat" cmpd="sng" algn="ctr">
                       <a:solidFill>
                         <a:srgbClr val="D5D8DE"/>
@@ -6502,7 +8657,7 @@
                       <a:endParaRPr lang="en-US" sz="1600" dirty="0"/>
                     </a:p>
                   </a:txBody>
-                  <a:tcPr marL="91440" marR="91440" marT="91440" marB="91440" anchor="ctr">
+                  <a:tcPr marL="91440" marR="91440" marT="64008" marB="64008" anchor="ctr">
                     <a:lnL w="9525" cap="flat" cmpd="sng" algn="ctr">
                       <a:solidFill>
                         <a:srgbClr val="D5D8DE"/>
@@ -6563,7 +8718,7 @@
                       <a:endParaRPr lang="en-US" sz="1600" dirty="0"/>
                     </a:p>
                   </a:txBody>
-                  <a:tcPr marL="91440" marR="91440" marT="91440" marB="91440" anchor="ctr">
+                  <a:tcPr marL="91440" marR="91440" marT="64008" marB="64008" anchor="ctr">
                     <a:lnL w="9525" cap="flat" cmpd="sng" algn="ctr">
                       <a:solidFill>
                         <a:srgbClr val="D5D8DE"/>
@@ -6626,7 +8781,7 @@
                       <a:endParaRPr lang="en-US" sz="1600" dirty="0"/>
                     </a:p>
                   </a:txBody>
-                  <a:tcPr marL="91440" marR="91440" marT="91440" marB="91440" anchor="ctr">
+                  <a:tcPr marL="91440" marR="91440" marT="64008" marB="64008" anchor="ctr">
                     <a:lnL w="9525" cap="flat" cmpd="sng" algn="ctr">
                       <a:solidFill>
                         <a:srgbClr val="D5D8DE"/>
@@ -6687,7 +8842,7 @@
                       <a:endParaRPr lang="en-US" sz="1600" dirty="0"/>
                     </a:p>
                   </a:txBody>
-                  <a:tcPr marL="91440" marR="91440" marT="91440" marB="91440" anchor="ctr">
+                  <a:tcPr marL="91440" marR="91440" marT="64008" marB="64008" anchor="ctr">
                     <a:lnL w="9525" cap="flat" cmpd="sng" algn="ctr">
                       <a:solidFill>
                         <a:srgbClr val="D5D8DE"/>
@@ -6748,7 +8903,7 @@
                       <a:endParaRPr lang="en-US" sz="1600" dirty="0"/>
                     </a:p>
                   </a:txBody>
-                  <a:tcPr marL="91440" marR="91440" marT="91440" marB="91440" anchor="ctr">
+                  <a:tcPr marL="91440" marR="91440" marT="64008" marB="64008" anchor="ctr">
                     <a:lnL w="9525" cap="flat" cmpd="sng" algn="ctr">
                       <a:solidFill>
                         <a:srgbClr val="D5D8DE"/>
@@ -6809,7 +8964,7 @@
                       <a:endParaRPr lang="en-US" sz="1600" dirty="0"/>
                     </a:p>
                   </a:txBody>
-                  <a:tcPr marL="91440" marR="91440" marT="91440" marB="91440" anchor="ctr">
+                  <a:tcPr marL="91440" marR="91440" marT="64008" marB="64008" anchor="ctr">
                     <a:lnL w="9525" cap="flat" cmpd="sng" algn="ctr">
                       <a:solidFill>
                         <a:srgbClr val="D5D8DE"/>
@@ -6870,7 +9025,7 @@
                       <a:endParaRPr lang="en-US" sz="1600" dirty="0"/>
                     </a:p>
                   </a:txBody>
-                  <a:tcPr marL="91440" marR="91440" marT="91440" marB="91440" anchor="ctr">
+                  <a:tcPr marL="91440" marR="91440" marT="64008" marB="64008" anchor="ctr">
                     <a:lnL w="9525" cap="flat" cmpd="sng" algn="ctr">
                       <a:solidFill>
                         <a:srgbClr val="D5D8DE"/>
@@ -6933,7 +9088,7 @@
                       <a:endParaRPr lang="en-US" sz="1600" dirty="0"/>
                     </a:p>
                   </a:txBody>
-                  <a:tcPr marL="91440" marR="91440" marT="91440" marB="91440" anchor="ctr">
+                  <a:tcPr marL="91440" marR="91440" marT="64008" marB="64008" anchor="ctr">
                     <a:lnL w="9525" cap="flat" cmpd="sng" algn="ctr">
                       <a:solidFill>
                         <a:srgbClr val="D5D8DE"/>
@@ -6994,7 +9149,7 @@
                       <a:endParaRPr lang="en-US" sz="1600" dirty="0"/>
                     </a:p>
                   </a:txBody>
-                  <a:tcPr marL="91440" marR="91440" marT="91440" marB="91440" anchor="ctr">
+                  <a:tcPr marL="91440" marR="91440" marT="64008" marB="64008" anchor="ctr">
                     <a:lnL w="9525" cap="flat" cmpd="sng" algn="ctr">
                       <a:solidFill>
                         <a:srgbClr val="D5D8DE"/>
@@ -7055,7 +9210,7 @@
                       <a:endParaRPr lang="en-US" sz="1600" dirty="0"/>
                     </a:p>
                   </a:txBody>
-                  <a:tcPr marL="91440" marR="91440" marT="91440" marB="91440" anchor="ctr">
+                  <a:tcPr marL="91440" marR="91440" marT="64008" marB="64008" anchor="ctr">
                     <a:lnL w="9525" cap="flat" cmpd="sng" algn="ctr">
                       <a:solidFill>
                         <a:srgbClr val="D5D8DE"/>
@@ -7116,7 +9271,7 @@
                       <a:endParaRPr lang="en-US" sz="1600" dirty="0"/>
                     </a:p>
                   </a:txBody>
-                  <a:tcPr marL="91440" marR="91440" marT="91440" marB="91440" anchor="ctr">
+                  <a:tcPr marL="91440" marR="91440" marT="64008" marB="64008" anchor="ctr">
                     <a:lnL w="9525" cap="flat" cmpd="sng" algn="ctr">
                       <a:solidFill>
                         <a:srgbClr val="D5D8DE"/>
@@ -7177,7 +9332,7 @@
                       <a:endParaRPr lang="en-US" sz="1600" dirty="0"/>
                     </a:p>
                   </a:txBody>
-                  <a:tcPr marL="91440" marR="91440" marT="91440" marB="91440" anchor="ctr">
+                  <a:tcPr marL="91440" marR="91440" marT="64008" marB="64008" anchor="ctr">
                     <a:lnL w="9525" cap="flat" cmpd="sng" algn="ctr">
                       <a:solidFill>
                         <a:srgbClr val="D5D8DE"/>
@@ -7240,7 +9395,7 @@
                       <a:endParaRPr lang="en-US" sz="1600" dirty="0"/>
                     </a:p>
                   </a:txBody>
-                  <a:tcPr marL="91440" marR="91440" marT="91440" marB="91440" anchor="ctr">
+                  <a:tcPr marL="91440" marR="91440" marT="64008" marB="64008" anchor="ctr">
                     <a:lnL w="9525" cap="flat" cmpd="sng" algn="ctr">
                       <a:solidFill>
                         <a:srgbClr val="D5D8DE"/>
@@ -7301,7 +9456,7 @@
                       <a:endParaRPr lang="en-US" sz="1600" dirty="0"/>
                     </a:p>
                   </a:txBody>
-                  <a:tcPr marL="91440" marR="91440" marT="91440" marB="91440" anchor="ctr">
+                  <a:tcPr marL="91440" marR="91440" marT="64008" marB="64008" anchor="ctr">
                     <a:lnL w="9525" cap="flat" cmpd="sng" algn="ctr">
                       <a:solidFill>
                         <a:srgbClr val="D5D8DE"/>
@@ -7362,7 +9517,7 @@
                       <a:endParaRPr lang="en-US" sz="1600" dirty="0"/>
                     </a:p>
                   </a:txBody>
-                  <a:tcPr marL="91440" marR="91440" marT="91440" marB="91440" anchor="ctr">
+                  <a:tcPr marL="91440" marR="91440" marT="64008" marB="64008" anchor="ctr">
                     <a:lnL w="9525" cap="flat" cmpd="sng" algn="ctr">
                       <a:solidFill>
                         <a:srgbClr val="D5D8DE"/>
@@ -7423,7 +9578,7 @@
                       <a:endParaRPr lang="en-US" sz="1600" dirty="0"/>
                     </a:p>
                   </a:txBody>
-                  <a:tcPr marL="91440" marR="91440" marT="91440" marB="91440" anchor="ctr">
+                  <a:tcPr marL="91440" marR="91440" marT="64008" marB="64008" anchor="ctr">
                     <a:lnL w="9525" cap="flat" cmpd="sng" algn="ctr">
                       <a:solidFill>
                         <a:srgbClr val="D5D8DE"/>
@@ -7484,7 +9639,7 @@
                       <a:endParaRPr lang="en-US" sz="1600" dirty="0"/>
                     </a:p>
                   </a:txBody>
-                  <a:tcPr marL="91440" marR="91440" marT="91440" marB="91440" anchor="ctr">
+                  <a:tcPr marL="91440" marR="91440" marT="64008" marB="64008" anchor="ctr">
                     <a:lnL w="9525" cap="flat" cmpd="sng" algn="ctr">
                       <a:solidFill>
                         <a:srgbClr val="D5D8DE"/>
@@ -7547,7 +9702,7 @@
                       <a:endParaRPr lang="en-US" sz="1600" dirty="0"/>
                     </a:p>
                   </a:txBody>
-                  <a:tcPr marL="91440" marR="91440" marT="91440" marB="91440" anchor="ctr">
+                  <a:tcPr marL="91440" marR="91440" marT="64008" marB="64008" anchor="ctr">
                     <a:lnL w="9525" cap="flat" cmpd="sng" algn="ctr">
                       <a:solidFill>
                         <a:srgbClr val="D5D8DE"/>
@@ -7608,7 +9763,7 @@
                       <a:endParaRPr lang="en-US" sz="1600" dirty="0"/>
                     </a:p>
                   </a:txBody>
-                  <a:tcPr marL="91440" marR="91440" marT="91440" marB="91440" anchor="ctr">
+                  <a:tcPr marL="91440" marR="91440" marT="64008" marB="64008" anchor="ctr">
                     <a:lnL w="9525" cap="flat" cmpd="sng" algn="ctr">
                       <a:solidFill>
                         <a:srgbClr val="D5D8DE"/>
@@ -7669,7 +9824,7 @@
                       <a:endParaRPr lang="en-US" sz="1600" dirty="0"/>
                     </a:p>
                   </a:txBody>
-                  <a:tcPr marL="91440" marR="91440" marT="91440" marB="91440" anchor="ctr">
+                  <a:tcPr marL="91440" marR="91440" marT="64008" marB="64008" anchor="ctr">
                     <a:lnL w="9525" cap="flat" cmpd="sng" algn="ctr">
                       <a:solidFill>
                         <a:srgbClr val="D5D8DE"/>
@@ -7730,7 +9885,7 @@
                       <a:endParaRPr lang="en-US" sz="1600" dirty="0"/>
                     </a:p>
                   </a:txBody>
-                  <a:tcPr marL="91440" marR="91440" marT="91440" marB="91440" anchor="ctr">
+                  <a:tcPr marL="91440" marR="91440" marT="64008" marB="64008" anchor="ctr">
                     <a:lnL w="9525" cap="flat" cmpd="sng" algn="ctr">
                       <a:solidFill>
                         <a:srgbClr val="D5D8DE"/>
@@ -7791,7 +9946,7 @@
                       <a:endParaRPr lang="en-US" sz="1600" dirty="0"/>
                     </a:p>
                   </a:txBody>
-                  <a:tcPr marL="91440" marR="91440" marT="91440" marB="91440" anchor="ctr">
+                  <a:tcPr marL="91440" marR="91440" marT="64008" marB="64008" anchor="ctr">
                     <a:lnL w="9525" cap="flat" cmpd="sng" algn="ctr">
                       <a:solidFill>
                         <a:srgbClr val="D5D8DE"/>
@@ -7854,7 +10009,7 @@
                       <a:endParaRPr lang="en-US" sz="1600" dirty="0"/>
                     </a:p>
                   </a:txBody>
-                  <a:tcPr marL="91440" marR="91440" marT="91440" marB="91440" anchor="ctr">
+                  <a:tcPr marL="91440" marR="91440" marT="64008" marB="64008" anchor="ctr">
                     <a:lnL w="9525" cap="flat" cmpd="sng" algn="ctr">
                       <a:solidFill>
                         <a:srgbClr val="D5D8DE"/>
@@ -7915,7 +10070,7 @@
                       <a:endParaRPr lang="en-US" sz="1600" dirty="0"/>
                     </a:p>
                   </a:txBody>
-                  <a:tcPr marL="91440" marR="91440" marT="91440" marB="91440" anchor="ctr">
+                  <a:tcPr marL="91440" marR="91440" marT="64008" marB="64008" anchor="ctr">
                     <a:lnL w="9525" cap="flat" cmpd="sng" algn="ctr">
                       <a:solidFill>
                         <a:srgbClr val="D5D8DE"/>
@@ -7976,7 +10131,7 @@
                       <a:endParaRPr lang="en-US" sz="1600" dirty="0"/>
                     </a:p>
                   </a:txBody>
-                  <a:tcPr marL="91440" marR="91440" marT="91440" marB="91440" anchor="ctr">
+                  <a:tcPr marL="91440" marR="91440" marT="64008" marB="64008" anchor="ctr">
                     <a:lnL w="9525" cap="flat" cmpd="sng" algn="ctr">
                       <a:solidFill>
                         <a:srgbClr val="D5D8DE"/>
@@ -8037,7 +10192,7 @@
                       <a:endParaRPr lang="en-US" sz="1600" dirty="0"/>
                     </a:p>
                   </a:txBody>
-                  <a:tcPr marL="91440" marR="91440" marT="91440" marB="91440" anchor="ctr">
+                  <a:tcPr marL="91440" marR="91440" marT="64008" marB="64008" anchor="ctr">
                     <a:lnL w="9525" cap="flat" cmpd="sng" algn="ctr">
                       <a:solidFill>
                         <a:srgbClr val="D5D8DE"/>
@@ -8098,7 +10253,7 @@
                       <a:endParaRPr lang="en-US" sz="1600" dirty="0"/>
                     </a:p>
                   </a:txBody>
-                  <a:tcPr marL="91440" marR="91440" marT="91440" marB="91440" anchor="ctr">
+                  <a:tcPr marL="91440" marR="91440" marT="64008" marB="64008" anchor="ctr">
                     <a:lnL w="9525" cap="flat" cmpd="sng" algn="ctr">
                       <a:solidFill>
                         <a:srgbClr val="D5D8DE"/>
@@ -8147,7 +10302,7 @@
       </p:graphicFrame>
       <p:sp>
         <p:nvSpPr>
-          <p:cNvPr id="5" name="Text 2"/>
+          <p:cNvPr id="7" name="Text 4"/>
           <p:cNvSpPr txBox="1"/>
           <p:nvPr/>
         </p:nvSpPr>
@@ -8163,21 +10318,21 @@
           <a:ln/>
         </p:spPr>
         <p:txBody>
-          <a:bodyPr wrap="square" lIns="0" tIns="0" rIns="0" bIns="0" rtlCol="0" anchor="ctr"/>
+          <a:bodyPr wrap="square" lIns="0" tIns="0" rIns="0" bIns="0" rtlCol="0" anchor="t"/>
           <a:lstStyle/>
           <a:p>
             <a:pPr indent="0" marL="0">
               <a:buNone/>
             </a:pPr>
             <a:r>
-              <a:rPr lang="en-US" sz="1100" dirty="0">
+              <a:rPr lang="en-US" sz="1000" dirty="0">
                 <a:solidFill>
                   <a:srgbClr val="6B7689"/>
                 </a:solidFill>
               </a:rPr>
-              <a:t>Ahmed · Dataset · Columns: id, message, label, label_name, group_id, case_type, split</a:t>
-            </a:r>
-            <a:endParaRPr lang="en-US" sz="1100" dirty="0"/>
+              <a:t>Columns: id, message, label, label_name, group_id, case_type, split</a:t>
+            </a:r>
+            <a:endParaRPr lang="en-US" sz="1000" dirty="0"/>
           </a:p>
         </p:txBody>
       </p:sp>
@@ -8253,14 +10408,41 @@
       </p:grpSpPr>
       <p:sp>
         <p:nvSpPr>
-          <p:cNvPr id="2" name="Text 0"/>
+          <p:cNvPr id="2" name="Shape 0"/>
+          <p:cNvSpPr/>
+          <p:nvPr/>
+        </p:nvSpPr>
+        <p:spPr>
+          <a:xfrm>
+            <a:off x="548640" y="329184"/>
+            <a:ext cx="960120" cy="274320"/>
+          </a:xfrm>
+          <a:prstGeom prst="roundRect">
+            <a:avLst>
+              <a:gd name="adj" fmla="val 50000"/>
+            </a:avLst>
+          </a:prstGeom>
+          <a:solidFill>
+            <a:srgbClr val="2A78D6"/>
+          </a:solidFill>
+          <a:ln w="12700">
+            <a:solidFill>
+              <a:srgbClr val="2A78D6"/>
+            </a:solidFill>
+            <a:prstDash val="solid"/>
+          </a:ln>
+        </p:spPr>
+      </p:sp>
+      <p:sp>
+        <p:nvSpPr>
+          <p:cNvPr id="3" name="Text 1"/>
           <p:cNvSpPr txBox="1"/>
           <p:nvPr/>
         </p:nvSpPr>
         <p:spPr>
           <a:xfrm>
-            <a:off x="548640" y="365760"/>
-            <a:ext cx="11094415" cy="274320"/>
+            <a:off x="548640" y="329184"/>
+            <a:ext cx="960120" cy="274320"/>
           </a:xfrm>
           <a:prstGeom prst="rect">
             <a:avLst/>
@@ -8272,11 +10454,47 @@
           <a:bodyPr wrap="square" lIns="0" tIns="0" rIns="0" bIns="0" rtlCol="0" anchor="ctr"/>
           <a:lstStyle/>
           <a:p>
+            <a:pPr algn="ctr" indent="0" marL="0">
+              <a:buNone/>
+            </a:pPr>
+            <a:r>
+              <a:rPr lang="en-US" sz="1000" b="1" spc="100" kern="0" dirty="0">
+                <a:solidFill>
+                  <a:srgbClr val="FFFFFF"/>
+                </a:solidFill>
+              </a:rPr>
+              <a:t>AHMED</a:t>
+            </a:r>
+            <a:endParaRPr lang="en-US" sz="1000" dirty="0"/>
+          </a:p>
+        </p:txBody>
+      </p:sp>
+      <p:sp>
+        <p:nvSpPr>
+          <p:cNvPr id="4" name="Text 2"/>
+          <p:cNvSpPr txBox="1"/>
+          <p:nvPr/>
+        </p:nvSpPr>
+        <p:spPr>
+          <a:xfrm>
+            <a:off x="1645920" y="356616"/>
+            <a:ext cx="8229600" cy="274320"/>
+          </a:xfrm>
+          <a:prstGeom prst="rect">
+            <a:avLst/>
+          </a:prstGeom>
+          <a:noFill/>
+          <a:ln/>
+        </p:spPr>
+        <p:txBody>
+          <a:bodyPr wrap="square" lIns="0" tIns="0" rIns="0" bIns="0" rtlCol="0" anchor="t"/>
+          <a:lstStyle/>
+          <a:p>
             <a:pPr indent="0" marL="0">
               <a:buNone/>
             </a:pPr>
             <a:r>
-              <a:rPr lang="en-US" sz="1200" b="1" spc="200" kern="0" dirty="0">
+              <a:rPr lang="en-US" sz="1100" b="1" spc="200" kern="0" dirty="0">
                 <a:solidFill>
                   <a:srgbClr val="2A78D6"/>
                 </a:solidFill>
@@ -8286,13 +10504,13 @@
               </a:rPr>
               <a:t>TWO APPROACHES, ONE FLAG</a:t>
             </a:r>
-            <a:endParaRPr lang="en-US" sz="1200" dirty="0"/>
-          </a:p>
-        </p:txBody>
-      </p:sp>
-      <p:sp>
-        <p:nvSpPr>
-          <p:cNvPr id="3" name="Text 0"/>
+            <a:endParaRPr lang="en-US" sz="1100" dirty="0"/>
+          </a:p>
+        </p:txBody>
+      </p:sp>
+      <p:sp>
+        <p:nvSpPr>
+          <p:cNvPr id="5" name="Text 0"/>
           <p:cNvSpPr/>
           <p:nvPr>
             <p:ph idx="100" type="title" hasCustomPrompt="1"/>
@@ -8300,8 +10518,8 @@
         </p:nvSpPr>
         <p:spPr>
           <a:xfrm>
-            <a:off x="548640" y="685800"/>
-            <a:ext cx="11094415" cy="822960"/>
+            <a:off x="548640" y="713232"/>
+            <a:ext cx="11094415" cy="777240"/>
           </a:xfrm>
           <a:prstGeom prst="rect">
             <a:avLst/>
@@ -8317,14 +10535,14 @@
               <a:buNone/>
             </a:pPr>
             <a:r>
-              <a:rPr lang="en-US" sz="3400" b="1" dirty="0">
+              <a:rPr lang="en-US" sz="3200" b="1" dirty="0">
                 <a:solidFill>
                   <a:srgbClr val="14213D"/>
                 </a:solidFill>
               </a:rPr>
               <a:t>Learned from examples vs. told by instructions</a:t>
             </a:r>
-            <a:endParaRPr lang="en-US" sz="3400" dirty="0"/>
+            <a:endParaRPr lang="en-US" sz="3200" dirty="0"/>
           </a:p>
         </p:txBody>
       </p:sp>
@@ -8343,8 +10561,8 @@
           </p:nvPr>
         </p:nvGraphicFramePr>
         <p:xfrm>
-          <a:off x="548640" y="1828800"/>
-          <a:ext cx="11094415" cy="914400"/>
+          <a:off x="548640" y="1737360"/>
+          <a:ext cx="11091672" cy="914400"/>
         </p:xfrm>
         <a:graphic>
           <a:graphicData uri="http://schemas.openxmlformats.org/drawingml/2006/table">
@@ -8364,10 +10582,10 @@
                       <a:pPr indent="0" marL="0">
                         <a:buNone/>
                       </a:pPr>
-                      <a:endParaRPr lang="en-US" sz="1700" dirty="0"/>
+                      <a:endParaRPr lang="en-US" sz="1600" dirty="0"/>
                     </a:p>
                   </a:txBody>
-                  <a:tcPr marL="91440" marR="91440" marT="91440" marB="91440" anchor="ctr">
+                  <a:tcPr marL="91440" marR="91440" marT="64008" marB="64008" anchor="ctr">
                     <a:lnL w="9525" cap="flat" cmpd="sng" algn="ctr">
                       <a:solidFill>
                         <a:srgbClr val="D5D8DE"/>
@@ -8418,17 +10636,17 @@
                         <a:buNone/>
                       </a:pPr>
                       <a:r>
-                        <a:rPr lang="en-US" sz="1700" b="1" dirty="0">
+                        <a:rPr lang="en-US" sz="1600" b="1" dirty="0">
                           <a:solidFill>
                             <a:srgbClr val="14213D"/>
                           </a:solidFill>
                         </a:rPr>
                         <a:t>Trained ML classifier</a:t>
                       </a:r>
-                      <a:endParaRPr lang="en-US" sz="1700" dirty="0"/>
+                      <a:endParaRPr lang="en-US" sz="1600" dirty="0"/>
                     </a:p>
                   </a:txBody>
-                  <a:tcPr marL="91440" marR="91440" marT="91440" marB="91440" anchor="ctr">
+                  <a:tcPr marL="91440" marR="91440" marT="64008" marB="64008" anchor="ctr">
                     <a:lnL w="9525" cap="flat" cmpd="sng" algn="ctr">
                       <a:solidFill>
                         <a:srgbClr val="D5D8DE"/>
@@ -8479,17 +10697,17 @@
                         <a:buNone/>
                       </a:pPr>
                       <a:r>
-                        <a:rPr lang="en-US" sz="1700" b="1" dirty="0">
+                        <a:rPr lang="en-US" sz="1600" b="1" dirty="0">
                           <a:solidFill>
                             <a:srgbClr val="14213D"/>
                           </a:solidFill>
                         </a:rPr>
-                        <a:t>Decision model (Jev or similar)</a:t>
+                        <a:t>Decision model (BART-MNLI)</a:t>
                       </a:r>
-                      <a:endParaRPr lang="en-US" sz="1700" dirty="0"/>
+                      <a:endParaRPr lang="en-US" sz="1600" dirty="0"/>
                     </a:p>
                   </a:txBody>
-                  <a:tcPr marL="91440" marR="91440" marT="91440" marB="91440" anchor="ctr">
+                  <a:tcPr marL="91440" marR="91440" marT="64008" marB="64008" anchor="ctr">
                     <a:lnL w="9525" cap="flat" cmpd="sng" algn="ctr">
                       <a:solidFill>
                         <a:srgbClr val="D5D8DE"/>
@@ -8542,17 +10760,17 @@
                         <a:buNone/>
                       </a:pPr>
                       <a:r>
-                        <a:rPr lang="en-US" sz="1700" b="1" dirty="0">
+                        <a:rPr lang="en-US" sz="1600" b="1" dirty="0">
                           <a:solidFill>
                             <a:srgbClr val="14213D"/>
                           </a:solidFill>
                         </a:rPr>
                         <a:t>Learns from</a:t>
                       </a:r>
-                      <a:endParaRPr lang="en-US" sz="1700" dirty="0"/>
+                      <a:endParaRPr lang="en-US" sz="1600" dirty="0"/>
                     </a:p>
                   </a:txBody>
-                  <a:tcPr marL="91440" marR="91440" marT="91440" marB="91440" anchor="ctr">
+                  <a:tcPr marL="91440" marR="91440" marT="64008" marB="64008" anchor="ctr">
                     <a:lnL w="9525" cap="flat" cmpd="sng" algn="ctr">
                       <a:solidFill>
                         <a:srgbClr val="D5D8DE"/>
@@ -8603,17 +10821,17 @@
                         <a:buNone/>
                       </a:pPr>
                       <a:r>
-                        <a:rPr lang="en-US" sz="1700" dirty="0">
+                        <a:rPr lang="en-US" sz="1600" dirty="0">
                           <a:solidFill>
                             <a:srgbClr val="14213D"/>
                           </a:solidFill>
                         </a:rPr>
-                        <a:t>Our 40 labeled training messages</a:t>
+                        <a:t>Our 40 labelled training messages</a:t>
                       </a:r>
-                      <a:endParaRPr lang="en-US" sz="1700" dirty="0"/>
+                      <a:endParaRPr lang="en-US" sz="1600" dirty="0"/>
                     </a:p>
                   </a:txBody>
-                  <a:tcPr marL="91440" marR="91440" marT="91440" marB="91440" anchor="ctr">
+                  <a:tcPr marL="91440" marR="91440" marT="64008" marB="64008" anchor="ctr">
                     <a:lnL w="9525" cap="flat" cmpd="sng" algn="ctr">
                       <a:solidFill>
                         <a:srgbClr val="D5D8DE"/>
@@ -8664,17 +10882,17 @@
                         <a:buNone/>
                       </a:pPr>
                       <a:r>
-                        <a:rPr lang="en-US" sz="1700" dirty="0">
+                        <a:rPr lang="en-US" sz="1600" dirty="0">
                           <a:solidFill>
                             <a:srgbClr val="14213D"/>
                           </a:solidFill>
                         </a:rPr>
-                        <a:t>Pre-trained on large text; no training by us</a:t>
+                        <a:t>Pre-trained on language inference; no training by us</a:t>
                       </a:r>
-                      <a:endParaRPr lang="en-US" sz="1700" dirty="0"/>
+                      <a:endParaRPr lang="en-US" sz="1600" dirty="0"/>
                     </a:p>
                   </a:txBody>
-                  <a:tcPr marL="91440" marR="91440" marT="91440" marB="91440" anchor="ctr">
+                  <a:tcPr marL="91440" marR="91440" marT="64008" marB="64008" anchor="ctr">
                     <a:lnL w="9525" cap="flat" cmpd="sng" algn="ctr">
                       <a:solidFill>
                         <a:srgbClr val="D5D8DE"/>
@@ -8727,17 +10945,17 @@
                         <a:buNone/>
                       </a:pPr>
                       <a:r>
-                        <a:rPr lang="en-US" sz="1700" b="1" dirty="0">
+                        <a:rPr lang="en-US" sz="1600" b="1" dirty="0">
                           <a:solidFill>
                             <a:srgbClr val="14213D"/>
                           </a:solidFill>
                         </a:rPr>
                         <a:t>Input</a:t>
                       </a:r>
-                      <a:endParaRPr lang="en-US" sz="1700" dirty="0"/>
+                      <a:endParaRPr lang="en-US" sz="1600" dirty="0"/>
                     </a:p>
                   </a:txBody>
-                  <a:tcPr marL="91440" marR="91440" marT="91440" marB="91440" anchor="ctr">
+                  <a:tcPr marL="91440" marR="91440" marT="64008" marB="64008" anchor="ctr">
                     <a:lnL w="9525" cap="flat" cmpd="sng" algn="ctr">
                       <a:solidFill>
                         <a:srgbClr val="D5D8DE"/>
@@ -8788,17 +11006,17 @@
                         <a:buNone/>
                       </a:pPr>
                       <a:r>
-                        <a:rPr lang="en-US" sz="1700" dirty="0">
+                        <a:rPr lang="en-US" sz="1600" dirty="0">
                           <a:solidFill>
                             <a:srgbClr val="14213D"/>
                           </a:solidFill>
                         </a:rPr>
                         <a:t>2 numbers per message (cue scores)</a:t>
                       </a:r>
-                      <a:endParaRPr lang="en-US" sz="1700" dirty="0"/>
+                      <a:endParaRPr lang="en-US" sz="1600" dirty="0"/>
                     </a:p>
                   </a:txBody>
-                  <a:tcPr marL="91440" marR="91440" marT="91440" marB="91440" anchor="ctr">
+                  <a:tcPr marL="91440" marR="91440" marT="64008" marB="64008" anchor="ctr">
                     <a:lnL w="9525" cap="flat" cmpd="sng" algn="ctr">
                       <a:solidFill>
                         <a:srgbClr val="D5D8DE"/>
@@ -8849,17 +11067,17 @@
                         <a:buNone/>
                       </a:pPr>
                       <a:r>
-                        <a:rPr lang="en-US" sz="1700" dirty="0">
+                        <a:rPr lang="en-US" sz="1600" dirty="0">
                           <a:solidFill>
                             <a:srgbClr val="14213D"/>
                           </a:solidFill>
                         </a:rPr>
-                        <a:t>Raw message + routing instructions</a:t>
+                        <a:t>Raw message + two written routing options</a:t>
                       </a:r>
-                      <a:endParaRPr lang="en-US" sz="1700" dirty="0"/>
+                      <a:endParaRPr lang="en-US" sz="1600" dirty="0"/>
                     </a:p>
                   </a:txBody>
-                  <a:tcPr marL="91440" marR="91440" marT="91440" marB="91440" anchor="ctr">
+                  <a:tcPr marL="91440" marR="91440" marT="64008" marB="64008" anchor="ctr">
                     <a:lnL w="9525" cap="flat" cmpd="sng" algn="ctr">
                       <a:solidFill>
                         <a:srgbClr val="D5D8DE"/>
@@ -8912,17 +11130,17 @@
                         <a:buNone/>
                       </a:pPr>
                       <a:r>
-                        <a:rPr lang="en-US" sz="1700" b="1" dirty="0">
+                        <a:rPr lang="en-US" sz="1600" b="1" dirty="0">
                           <a:solidFill>
                             <a:srgbClr val="14213D"/>
                           </a:solidFill>
                         </a:rPr>
                         <a:t>Output</a:t>
                       </a:r>
-                      <a:endParaRPr lang="en-US" sz="1700" dirty="0"/>
+                      <a:endParaRPr lang="en-US" sz="1600" dirty="0"/>
                     </a:p>
                   </a:txBody>
-                  <a:tcPr marL="91440" marR="91440" marT="91440" marB="91440" anchor="ctr">
+                  <a:tcPr marL="91440" marR="91440" marT="64008" marB="64008" anchor="ctr">
                     <a:lnL w="9525" cap="flat" cmpd="sng" algn="ctr">
                       <a:solidFill>
                         <a:srgbClr val="D5D8DE"/>
@@ -8973,17 +11191,17 @@
                         <a:buNone/>
                       </a:pPr>
                       <a:r>
-                        <a:rPr lang="en-US" sz="1700" dirty="0">
+                        <a:rPr lang="en-US" sz="1600" dirty="0">
                           <a:solidFill>
                             <a:srgbClr val="14213D"/>
                           </a:solidFill>
                         </a:rPr>
-                        <a:t>Probability of sales → flag 0 / 1</a:t>
+                        <a:t>P(sales) → flag 0 / 1</a:t>
                       </a:r>
-                      <a:endParaRPr lang="en-US" sz="1700" dirty="0"/>
+                      <a:endParaRPr lang="en-US" sz="1600" dirty="0"/>
                     </a:p>
                   </a:txBody>
-                  <a:tcPr marL="91440" marR="91440" marT="91440" marB="91440" anchor="ctr">
+                  <a:tcPr marL="91440" marR="91440" marT="64008" marB="64008" anchor="ctr">
                     <a:lnL w="9525" cap="flat" cmpd="sng" algn="ctr">
                       <a:solidFill>
                         <a:srgbClr val="D5D8DE"/>
@@ -9034,17 +11252,17 @@
                         <a:buNone/>
                       </a:pPr>
                       <a:r>
-                        <a:rPr lang="en-US" sz="1700" dirty="0">
+                        <a:rPr lang="en-US" sz="1600" dirty="0">
                           <a:solidFill>
                             <a:srgbClr val="14213D"/>
                           </a:solidFill>
                         </a:rPr>
-                        <a:t>customer_service or sales → flag 0 / 1</a:t>
+                        <a:t>{route, p_support, p_sales} → flag 0 / 1</a:t>
                       </a:r>
-                      <a:endParaRPr lang="en-US" sz="1700" dirty="0"/>
+                      <a:endParaRPr lang="en-US" sz="1600" dirty="0"/>
                     </a:p>
                   </a:txBody>
-                  <a:tcPr marL="91440" marR="91440" marT="91440" marB="91440" anchor="ctr">
+                  <a:tcPr marL="91440" marR="91440" marT="64008" marB="64008" anchor="ctr">
                     <a:lnL w="9525" cap="flat" cmpd="sng" algn="ctr">
                       <a:solidFill>
                         <a:srgbClr val="D5D8DE"/>
@@ -9097,17 +11315,17 @@
                         <a:buNone/>
                       </a:pPr>
                       <a:r>
-                        <a:rPr lang="en-US" sz="1700" b="1" dirty="0">
+                        <a:rPr lang="en-US" sz="1600" b="1" dirty="0">
                           <a:solidFill>
                             <a:srgbClr val="14213D"/>
                           </a:solidFill>
                         </a:rPr>
                         <a:t>Changing a rule</a:t>
                       </a:r>
-                      <a:endParaRPr lang="en-US" sz="1700" dirty="0"/>
+                      <a:endParaRPr lang="en-US" sz="1600" dirty="0"/>
                     </a:p>
                   </a:txBody>
-                  <a:tcPr marL="91440" marR="91440" marT="91440" marB="91440" anchor="ctr">
+                  <a:tcPr marL="91440" marR="91440" marT="64008" marB="64008" anchor="ctr">
                     <a:lnL w="9525" cap="flat" cmpd="sng" algn="ctr">
                       <a:solidFill>
                         <a:srgbClr val="D5D8DE"/>
@@ -9158,17 +11376,17 @@
                         <a:buNone/>
                       </a:pPr>
                       <a:r>
-                        <a:rPr lang="en-US" sz="1700" dirty="0">
+                        <a:rPr lang="en-US" sz="1600" dirty="0">
                           <a:solidFill>
                             <a:srgbClr val="14213D"/>
                           </a:solidFill>
                         </a:rPr>
                         <a:t>Relabel data and retrain</a:t>
                       </a:r>
-                      <a:endParaRPr lang="en-US" sz="1700" dirty="0"/>
+                      <a:endParaRPr lang="en-US" sz="1600" dirty="0"/>
                     </a:p>
                   </a:txBody>
-                  <a:tcPr marL="91440" marR="91440" marT="91440" marB="91440" anchor="ctr">
+                  <a:tcPr marL="91440" marR="91440" marT="64008" marB="64008" anchor="ctr">
                     <a:lnL w="9525" cap="flat" cmpd="sng" algn="ctr">
                       <a:solidFill>
                         <a:srgbClr val="D5D8DE"/>
@@ -9219,17 +11437,17 @@
                         <a:buNone/>
                       </a:pPr>
                       <a:r>
-                        <a:rPr lang="en-US" sz="1700" dirty="0">
+                        <a:rPr lang="en-US" sz="1600" dirty="0">
                           <a:solidFill>
                             <a:srgbClr val="14213D"/>
                           </a:solidFill>
                         </a:rPr>
-                        <a:t>Edit one sentence of instructions</a:t>
+                        <a:t>Edit the option text or the threshold</a:t>
                       </a:r>
-                      <a:endParaRPr lang="en-US" sz="1700" dirty="0"/>
+                      <a:endParaRPr lang="en-US" sz="1600" dirty="0"/>
                     </a:p>
                   </a:txBody>
-                  <a:tcPr marL="91440" marR="91440" marT="91440" marB="91440" anchor="ctr">
+                  <a:tcPr marL="91440" marR="91440" marT="64008" marB="64008" anchor="ctr">
                     <a:lnL w="9525" cap="flat" cmpd="sng" algn="ctr">
                       <a:solidFill>
                         <a:srgbClr val="D5D8DE"/>
@@ -9282,17 +11500,17 @@
                         <a:buNone/>
                       </a:pPr>
                       <a:r>
-                        <a:rPr lang="en-US" sz="1700" b="1" dirty="0">
+                        <a:rPr lang="en-US" sz="1600" b="1" dirty="0">
                           <a:solidFill>
                             <a:srgbClr val="14213D"/>
                           </a:solidFill>
                         </a:rPr>
                         <a:t>Runs</a:t>
                       </a:r>
-                      <a:endParaRPr lang="en-US" sz="1700" dirty="0"/>
+                      <a:endParaRPr lang="en-US" sz="1600" dirty="0"/>
                     </a:p>
                   </a:txBody>
-                  <a:tcPr marL="91440" marR="91440" marT="91440" marB="91440" anchor="ctr">
+                  <a:tcPr marL="91440" marR="91440" marT="64008" marB="64008" anchor="ctr">
                     <a:lnL w="9525" cap="flat" cmpd="sng" algn="ctr">
                       <a:solidFill>
                         <a:srgbClr val="D5D8DE"/>
@@ -9343,17 +11561,17 @@
                         <a:buNone/>
                       </a:pPr>
                       <a:r>
-                        <a:rPr lang="en-US" sz="1700" dirty="0">
+                        <a:rPr lang="en-US" sz="1600" dirty="0">
                           <a:solidFill>
                             <a:srgbClr val="14213D"/>
                           </a:solidFill>
                         </a:rPr>
-                        <a:t>Locally, in milliseconds, free</a:t>
+                        <a:t>Milliseconds, any laptop</a:t>
                       </a:r>
-                      <a:endParaRPr lang="en-US" sz="1700" dirty="0"/>
+                      <a:endParaRPr lang="en-US" sz="1600" dirty="0"/>
                     </a:p>
                   </a:txBody>
-                  <a:tcPr marL="91440" marR="91440" marT="91440" marB="91440" anchor="ctr">
+                  <a:tcPr marL="91440" marR="91440" marT="64008" marB="64008" anchor="ctr">
                     <a:lnL w="9525" cap="flat" cmpd="sng" algn="ctr">
                       <a:solidFill>
                         <a:srgbClr val="D5D8DE"/>
@@ -9404,17 +11622,17 @@
                         <a:buNone/>
                       </a:pPr>
                       <a:r>
-                        <a:rPr lang="en-US" sz="1700" dirty="0">
+                        <a:rPr lang="en-US" sz="1600" dirty="0">
                           <a:solidFill>
                             <a:srgbClr val="14213D"/>
                           </a:solidFill>
                         </a:rPr>
-                        <a:t>Through an API: paid per token, needs network</a:t>
+                        <a:t>~1 s per message on CPU, 1.6 GB model</a:t>
                       </a:r>
-                      <a:endParaRPr lang="en-US" sz="1700" dirty="0"/>
+                      <a:endParaRPr lang="en-US" sz="1600" dirty="0"/>
                     </a:p>
                   </a:txBody>
-                  <a:tcPr marL="91440" marR="91440" marT="91440" marB="91440" anchor="ctr">
+                  <a:tcPr marL="91440" marR="91440" marT="64008" marB="64008" anchor="ctr">
                     <a:lnL w="9525" cap="flat" cmpd="sng" algn="ctr">
                       <a:solidFill>
                         <a:srgbClr val="D5D8DE"/>
@@ -9467,17 +11685,17 @@
                         <a:buNone/>
                       </a:pPr>
                       <a:r>
-                        <a:rPr lang="en-US" sz="1700" b="1" dirty="0">
+                        <a:rPr lang="en-US" sz="1600" b="1" dirty="0">
                           <a:solidFill>
                             <a:srgbClr val="14213D"/>
                           </a:solidFill>
                         </a:rPr>
-                        <a:t>Explains itself by</a:t>
+                        <a:t>Licence</a:t>
                       </a:r>
-                      <a:endParaRPr lang="en-US" sz="1700" dirty="0"/>
+                      <a:endParaRPr lang="en-US" sz="1600" dirty="0"/>
                     </a:p>
                   </a:txBody>
-                  <a:tcPr marL="91440" marR="91440" marT="91440" marB="91440" anchor="ctr">
+                  <a:tcPr marL="91440" marR="91440" marT="64008" marB="64008" anchor="ctr">
                     <a:lnL w="9525" cap="flat" cmpd="sng" algn="ctr">
                       <a:solidFill>
                         <a:srgbClr val="D5D8DE"/>
@@ -9528,17 +11746,17 @@
                         <a:buNone/>
                       </a:pPr>
                       <a:r>
-                        <a:rPr lang="en-US" sz="1700" dirty="0">
+                        <a:rPr lang="en-US" sz="1600" dirty="0">
                           <a:solidFill>
                             <a:srgbClr val="14213D"/>
                           </a:solidFill>
                         </a:rPr>
-                        <a:t>Its decision boundary (shown later)</a:t>
+                        <a:t>scikit-learn (BSD-3)</a:t>
                       </a:r>
-                      <a:endParaRPr lang="en-US" sz="1700" dirty="0"/>
+                      <a:endParaRPr lang="en-US" sz="1600" dirty="0"/>
                     </a:p>
                   </a:txBody>
-                  <a:tcPr marL="91440" marR="91440" marT="91440" marB="91440" anchor="ctr">
+                  <a:tcPr marL="91440" marR="91440" marT="64008" marB="64008" anchor="ctr">
                     <a:lnL w="9525" cap="flat" cmpd="sng" algn="ctr">
                       <a:solidFill>
                         <a:srgbClr val="D5D8DE"/>
@@ -9589,17 +11807,17 @@
                         <a:buNone/>
                       </a:pPr>
                       <a:r>
-                        <a:rPr lang="en-US" sz="1700" dirty="0">
+                        <a:rPr lang="en-US" sz="1600" dirty="0">
                           <a:solidFill>
                             <a:srgbClr val="14213D"/>
                           </a:solidFill>
                         </a:rPr>
-                        <a:t>Option probabilities and a confidence value</a:t>
+                        <a:t>facebook/bart-large-mnli (MIT)</a:t>
                       </a:r>
-                      <a:endParaRPr lang="en-US" sz="1700" dirty="0"/>
+                      <a:endParaRPr lang="en-US" sz="1600" dirty="0"/>
                     </a:p>
                   </a:txBody>
-                  <a:tcPr marL="91440" marR="91440" marT="91440" marB="91440" anchor="ctr">
+                  <a:tcPr marL="91440" marR="91440" marT="64008" marB="64008" anchor="ctr">
                     <a:lnL w="9525" cap="flat" cmpd="sng" algn="ctr">
                       <a:solidFill>
                         <a:srgbClr val="D5D8DE"/>
@@ -9648,7 +11866,7 @@
       </p:graphicFrame>
       <p:sp>
         <p:nvSpPr>
-          <p:cNvPr id="5" name="Text 2"/>
+          <p:cNvPr id="7" name="Text 4"/>
           <p:cNvSpPr txBox="1"/>
           <p:nvPr/>
         </p:nvSpPr>
@@ -9664,21 +11882,21 @@
           <a:ln/>
         </p:spPr>
         <p:txBody>
-          <a:bodyPr wrap="square" lIns="0" tIns="0" rIns="0" bIns="0" rtlCol="0" anchor="ctr"/>
+          <a:bodyPr wrap="square" lIns="0" tIns="0" rIns="0" bIns="0" rtlCol="0" anchor="t"/>
           <a:lstStyle/>
           <a:p>
             <a:pPr indent="0" marL="0">
               <a:buNone/>
             </a:pPr>
             <a:r>
-              <a:rPr lang="en-US" sz="1100" dirty="0">
+              <a:rPr lang="en-US" sz="1000" dirty="0">
                 <a:solidFill>
                   <a:srgbClr val="6B7689"/>
                 </a:solidFill>
               </a:rPr>
-              <a:t>Ahmed · Concept · Hand over to Moaaz</a:t>
-            </a:r>
-            <a:endParaRPr lang="en-US" sz="1100" dirty="0"/>
+              <a:t>Jev from TypeSafe AI is the brief’s example decision API; it is paid and key-based, so we used an open-source model as the brief allows.</a:t>
+            </a:r>
+            <a:endParaRPr lang="en-US" sz="1000" dirty="0"/>
           </a:p>
         </p:txBody>
       </p:sp>
@@ -9754,14 +11972,41 @@
       </p:grpSpPr>
       <p:sp>
         <p:nvSpPr>
-          <p:cNvPr id="2" name="Text 0"/>
+          <p:cNvPr id="2" name="Shape 0"/>
+          <p:cNvSpPr/>
+          <p:nvPr/>
+        </p:nvSpPr>
+        <p:spPr>
+          <a:xfrm>
+            <a:off x="548640" y="329184"/>
+            <a:ext cx="960120" cy="274320"/>
+          </a:xfrm>
+          <a:prstGeom prst="roundRect">
+            <a:avLst>
+              <a:gd name="adj" fmla="val 50000"/>
+            </a:avLst>
+          </a:prstGeom>
+          <a:solidFill>
+            <a:srgbClr val="B8451B"/>
+          </a:solidFill>
+          <a:ln w="12700">
+            <a:solidFill>
+              <a:srgbClr val="B8451B"/>
+            </a:solidFill>
+            <a:prstDash val="solid"/>
+          </a:ln>
+        </p:spPr>
+      </p:sp>
+      <p:sp>
+        <p:nvSpPr>
+          <p:cNvPr id="3" name="Text 1"/>
           <p:cNvSpPr txBox="1"/>
           <p:nvPr/>
         </p:nvSpPr>
         <p:spPr>
           <a:xfrm>
-            <a:off x="548640" y="365760"/>
-            <a:ext cx="11094415" cy="274320"/>
+            <a:off x="548640" y="329184"/>
+            <a:ext cx="960120" cy="274320"/>
           </a:xfrm>
           <a:prstGeom prst="rect">
             <a:avLst/>
@@ -9773,11 +12018,47 @@
           <a:bodyPr wrap="square" lIns="0" tIns="0" rIns="0" bIns="0" rtlCol="0" anchor="ctr"/>
           <a:lstStyle/>
           <a:p>
+            <a:pPr algn="ctr" indent="0" marL="0">
+              <a:buNone/>
+            </a:pPr>
+            <a:r>
+              <a:rPr lang="en-US" sz="1000" b="1" spc="100" kern="0" dirty="0">
+                <a:solidFill>
+                  <a:srgbClr val="FFFFFF"/>
+                </a:solidFill>
+              </a:rPr>
+              <a:t>MOAAZ</a:t>
+            </a:r>
+            <a:endParaRPr lang="en-US" sz="1000" dirty="0"/>
+          </a:p>
+        </p:txBody>
+      </p:sp>
+      <p:sp>
+        <p:nvSpPr>
+          <p:cNvPr id="4" name="Text 2"/>
+          <p:cNvSpPr txBox="1"/>
+          <p:nvPr/>
+        </p:nvSpPr>
+        <p:spPr>
+          <a:xfrm>
+            <a:off x="1645920" y="356616"/>
+            <a:ext cx="8229600" cy="274320"/>
+          </a:xfrm>
+          <a:prstGeom prst="rect">
+            <a:avLst/>
+          </a:prstGeom>
+          <a:noFill/>
+          <a:ln/>
+        </p:spPr>
+        <p:txBody>
+          <a:bodyPr wrap="square" lIns="0" tIns="0" rIns="0" bIns="0" rtlCol="0" anchor="t"/>
+          <a:lstStyle/>
+          <a:p>
             <a:pPr indent="0" marL="0">
               <a:buNone/>
             </a:pPr>
             <a:r>
-              <a:rPr lang="en-US" sz="1200" b="1" spc="200" kern="0" dirty="0">
+              <a:rPr lang="en-US" sz="1100" b="1" spc="200" kern="0" dirty="0">
                 <a:solidFill>
                   <a:srgbClr val="B8451B"/>
                 </a:solidFill>
@@ -9787,13 +12068,13 @@
               </a:rPr>
               <a:t>DECISION MODEL · SETUP</a:t>
             </a:r>
-            <a:endParaRPr lang="en-US" sz="1200" dirty="0"/>
-          </a:p>
-        </p:txBody>
-      </p:sp>
-      <p:sp>
-        <p:nvSpPr>
-          <p:cNvPr id="3" name="Text 0"/>
+            <a:endParaRPr lang="en-US" sz="1100" dirty="0"/>
+          </a:p>
+        </p:txBody>
+      </p:sp>
+      <p:sp>
+        <p:nvSpPr>
+          <p:cNvPr id="5" name="Text 0"/>
           <p:cNvSpPr/>
           <p:nvPr>
             <p:ph idx="100" type="title" hasCustomPrompt="1"/>
@@ -9801,8 +12082,8 @@
         </p:nvSpPr>
         <p:spPr>
           <a:xfrm>
-            <a:off x="548640" y="685800"/>
-            <a:ext cx="11094415" cy="822960"/>
+            <a:off x="548640" y="713232"/>
+            <a:ext cx="11094415" cy="777240"/>
           </a:xfrm>
           <a:prstGeom prst="rect">
             <a:avLst/>
@@ -9818,39 +12099,39 @@
               <a:buNone/>
             </a:pPr>
             <a:r>
-              <a:rPr lang="en-US" sz="3400" b="1" dirty="0">
+              <a:rPr lang="en-US" sz="3200" b="1" dirty="0">
                 <a:solidFill>
                   <a:srgbClr val="14213D"/>
                 </a:solidFill>
               </a:rPr>
-              <a:t>Same question, asked through instructions</a:t>
-            </a:r>
-            <a:endParaRPr lang="en-US" sz="3400" dirty="0"/>
-          </a:p>
-        </p:txBody>
-      </p:sp>
-      <p:sp>
-        <p:nvSpPr>
-          <p:cNvPr id="4" name="Shape 2"/>
+              <a:t>BART-large-MNLI as a zero-shot decision model</a:t>
+            </a:r>
+            <a:endParaRPr lang="en-US" sz="3200" dirty="0"/>
+          </a:p>
+        </p:txBody>
+      </p:sp>
+      <p:sp>
+        <p:nvSpPr>
+          <p:cNvPr id="6" name="Shape 4"/>
           <p:cNvSpPr/>
           <p:nvPr/>
         </p:nvSpPr>
         <p:spPr>
           <a:xfrm>
-            <a:off x="548640" y="1783080"/>
-            <a:ext cx="5669280" cy="4297680"/>
+            <a:off x="548640" y="1691640"/>
+            <a:ext cx="6035040" cy="4434840"/>
           </a:xfrm>
           <a:prstGeom prst="roundRect">
             <a:avLst>
-              <a:gd name="adj" fmla="val 2553"/>
+              <a:gd name="adj" fmla="val 2062"/>
             </a:avLst>
           </a:prstGeom>
           <a:solidFill>
-            <a:srgbClr val="14213D"/>
+            <a:srgbClr val="1E2A44"/>
           </a:solidFill>
           <a:ln w="12700">
             <a:solidFill>
-              <a:srgbClr val="14213D"/>
+              <a:srgbClr val="1E2A44"/>
             </a:solidFill>
             <a:prstDash val="solid"/>
           </a:ln>
@@ -9858,14 +12139,14 @@
       </p:sp>
       <p:sp>
         <p:nvSpPr>
-          <p:cNvPr id="5" name="Text 3"/>
+          <p:cNvPr id="7" name="Text 5"/>
           <p:cNvSpPr txBox="1"/>
           <p:nvPr/>
         </p:nvSpPr>
         <p:spPr>
           <a:xfrm>
-            <a:off x="868680" y="2011680"/>
-            <a:ext cx="5029200" cy="3840480"/>
+            <a:off x="777240" y="1874520"/>
+            <a:ext cx="5577840" cy="4069080"/>
           </a:xfrm>
           <a:prstGeom prst="rect">
             <a:avLst/>
@@ -9881,191 +12162,261 @@
               <a:buNone/>
             </a:pPr>
             <a:r>
-              <a:rPr lang="en-US" sz="1400" dirty="0">
-                <a:solidFill>
-                  <a:srgbClr val="8FB8EE"/>
+              <a:rPr lang="en-US" sz="1200" dirty="0">
+                <a:solidFill>
+                  <a:srgbClr val="E6EDF7"/>
                 </a:solidFill>
                 <a:latin typeface="Courier New" pitchFamily="34" charset="0"/>
                 <a:ea typeface="Courier New" pitchFamily="34" charset="-122"/>
                 <a:cs typeface="Courier New" pitchFamily="34" charset="-120"/>
               </a:rPr>
-              <a:t>routing instructions + options</a:t>
-            </a:r>
-            <a:endParaRPr lang="en-US" sz="1400" dirty="0"/>
+              <a:t>zsc = pipeline("zero-shot-classification",</a:t>
+            </a:r>
+            <a:endParaRPr lang="en-US" sz="1200" dirty="0"/>
           </a:p>
           <a:p>
             <a:pPr indent="0" marL="0">
               <a:buNone/>
             </a:pPr>
             <a:r>
-              <a:rPr lang="en-US" sz="1400" dirty="0">
-                <a:solidFill>
-                  <a:srgbClr val="4A5568"/>
+              <a:rPr lang="en-US" sz="1200" dirty="0">
+                <a:solidFill>
+                  <a:srgbClr val="E6EDF7"/>
                 </a:solidFill>
                 <a:latin typeface="Courier New" pitchFamily="34" charset="0"/>
                 <a:ea typeface="Courier New" pitchFamily="34" charset="-122"/>
                 <a:cs typeface="Courier New" pitchFamily="34" charset="-120"/>
               </a:rPr>
-              <a:t> </a:t>
-            </a:r>
-            <a:endParaRPr lang="en-US" sz="1400" dirty="0"/>
+              <a:t>               model="facebook/bart-large-mnli")</a:t>
+            </a:r>
+            <a:endParaRPr lang="en-US" sz="1200" dirty="0"/>
           </a:p>
           <a:p>
             <a:pPr indent="0" marL="0">
               <a:buNone/>
             </a:pPr>
             <a:r>
-              <a:rPr lang="en-US" sz="1400" dirty="0">
-                <a:solidFill>
-                  <a:srgbClr val="F7F6F2"/>
+              <a:rPr lang="en-US" sz="1200" dirty="0">
+                <a:solidFill>
+                  <a:srgbClr val="E6EDF7"/>
                 </a:solidFill>
                 <a:latin typeface="Courier New" pitchFamily="34" charset="0"/>
                 <a:ea typeface="Courier New" pitchFamily="34" charset="-122"/>
                 <a:cs typeface="Courier New" pitchFamily="34" charset="-120"/>
               </a:rPr>
-              <a:t>customer_service: a problem with something they ALREADY have — fault, late order, billing, warranty, missed visit</a:t>
-            </a:r>
-            <a:endParaRPr lang="en-US" sz="1400" dirty="0"/>
+              <a:t>OPTIONS = {</a:t>
+            </a:r>
+            <a:endParaRPr lang="en-US" sz="1200" dirty="0"/>
           </a:p>
           <a:p>
             <a:pPr indent="0" marL="0">
               <a:buNone/>
             </a:pPr>
             <a:r>
-              <a:rPr lang="en-US" sz="1400" dirty="0">
-                <a:solidFill>
-                  <a:srgbClr val="4A5568"/>
+              <a:rPr lang="en-US" sz="1200" dirty="0">
+                <a:solidFill>
+                  <a:srgbClr val="E6EDF7"/>
                 </a:solidFill>
                 <a:latin typeface="Courier New" pitchFamily="34" charset="0"/>
                 <a:ea typeface="Courier New" pitchFamily="34" charset="-122"/>
                 <a:cs typeface="Courier New" pitchFamily="34" charset="-120"/>
               </a:rPr>
-              <a:t> </a:t>
-            </a:r>
-            <a:endParaRPr lang="en-US" sz="1400" dirty="0"/>
+              <a:t> "customer_service": "has a problem, fault or</a:t>
+            </a:r>
+            <a:endParaRPr lang="en-US" sz="1200" dirty="0"/>
           </a:p>
           <a:p>
             <a:pPr indent="0" marL="0">
               <a:buNone/>
             </a:pPr>
             <a:r>
-              <a:rPr lang="en-US" sz="1400" dirty="0">
-                <a:solidFill>
-                  <a:srgbClr val="F7F6F2"/>
+              <a:rPr lang="en-US" sz="1200" dirty="0">
+                <a:solidFill>
+                  <a:srgbClr val="E6EDF7"/>
                 </a:solidFill>
                 <a:latin typeface="Courier New" pitchFamily="34" charset="0"/>
                 <a:ea typeface="Courier New" pitchFamily="34" charset="-122"/>
                 <a:cs typeface="Courier New" pitchFamily="34" charset="-120"/>
               </a:rPr>
-              <a:t>sales: wants to BUY something new — quote, package, upgrade, demo, leasing</a:t>
-            </a:r>
-            <a:endParaRPr lang="en-US" sz="1400" dirty="0"/>
+              <a:t>   complaint about a product, order or service</a:t>
+            </a:r>
+            <a:endParaRPr lang="en-US" sz="1200" dirty="0"/>
           </a:p>
           <a:p>
             <a:pPr indent="0" marL="0">
               <a:buNone/>
             </a:pPr>
             <a:r>
-              <a:rPr lang="en-US" sz="1400" dirty="0">
-                <a:solidFill>
-                  <a:srgbClr val="4A5568"/>
+              <a:rPr lang="en-US" sz="1200" dirty="0">
+                <a:solidFill>
+                  <a:srgbClr val="E6EDF7"/>
                 </a:solidFill>
                 <a:latin typeface="Courier New" pitchFamily="34" charset="0"/>
                 <a:ea typeface="Courier New" pitchFamily="34" charset="-122"/>
                 <a:cs typeface="Courier New" pitchFamily="34" charset="-120"/>
               </a:rPr>
-              <a:t> </a:t>
-            </a:r>
-            <a:endParaRPr lang="en-US" sz="1400" dirty="0"/>
+              <a:t>   they already have",</a:t>
+            </a:r>
+            <a:endParaRPr lang="en-US" sz="1200" dirty="0"/>
           </a:p>
           <a:p>
             <a:pPr indent="0" marL="0">
               <a:buNone/>
             </a:pPr>
             <a:r>
-              <a:rPr lang="en-US" sz="1400" dirty="0">
-                <a:solidFill>
-                  <a:srgbClr val="F5A27F"/>
+              <a:rPr lang="en-US" sz="1200" dirty="0">
+                <a:solidFill>
+                  <a:srgbClr val="E6EDF7"/>
                 </a:solidFill>
                 <a:latin typeface="Courier New" pitchFamily="34" charset="0"/>
                 <a:ea typeface="Courier New" pitchFamily="34" charset="-122"/>
                 <a:cs typeface="Courier New" pitchFamily="34" charset="-120"/>
               </a:rPr>
-              <a:t>If BOTH: choose customer_service. Negations matter.</a:t>
-            </a:r>
-            <a:endParaRPr lang="en-US" sz="1400" dirty="0"/>
-          </a:p>
-        </p:txBody>
-      </p:sp>
-      <p:sp>
-        <p:nvSpPr>
-          <p:cNvPr id="6" name="Text 4"/>
-          <p:cNvSpPr txBox="1"/>
-          <p:nvPr/>
-        </p:nvSpPr>
-        <p:spPr>
-          <a:xfrm>
-            <a:off x="6583680" y="1783080"/>
-            <a:ext cx="5029200" cy="365760"/>
-          </a:xfrm>
-          <a:prstGeom prst="rect">
-            <a:avLst/>
-          </a:prstGeom>
-          <a:noFill/>
-          <a:ln/>
-        </p:spPr>
-        <p:txBody>
-          <a:bodyPr wrap="square" lIns="0" tIns="0" rIns="0" bIns="0" rtlCol="0" anchor="t"/>
-          <a:lstStyle/>
+              <a:t> "sales": "wants to buy, lease, upgrade or get</a:t>
+            </a:r>
+            <a:endParaRPr lang="en-US" sz="1200" dirty="0"/>
+          </a:p>
           <a:p>
             <a:pPr indent="0" marL="0">
               <a:buNone/>
             </a:pPr>
             <a:r>
-              <a:rPr lang="en-US" sz="1700" b="1" dirty="0">
-                <a:solidFill>
-                  <a:srgbClr val="14213D"/>
-                </a:solidFill>
-              </a:rPr>
-              <a:t>Model we ran</a:t>
-            </a:r>
-            <a:endParaRPr lang="en-US" sz="1700" dirty="0"/>
-          </a:p>
-        </p:txBody>
-      </p:sp>
-      <p:sp>
-        <p:nvSpPr>
-          <p:cNvPr id="7" name="Text 5"/>
-          <p:cNvSpPr txBox="1"/>
-          <p:nvPr/>
-        </p:nvSpPr>
-        <p:spPr>
-          <a:xfrm>
-            <a:off x="6583680" y="2194560"/>
-            <a:ext cx="5029200" cy="960120"/>
-          </a:xfrm>
-          <a:prstGeom prst="rect">
-            <a:avLst/>
-          </a:prstGeom>
-          <a:noFill/>
-          <a:ln/>
-        </p:spPr>
-        <p:txBody>
-          <a:bodyPr wrap="square" lIns="0" tIns="0" rIns="0" bIns="0" rtlCol="0" anchor="t"/>
-          <a:lstStyle/>
+              <a:rPr lang="en-US" sz="1200" dirty="0">
+                <a:solidFill>
+                  <a:srgbClr val="E6EDF7"/>
+                </a:solidFill>
+                <a:latin typeface="Courier New" pitchFamily="34" charset="0"/>
+                <a:ea typeface="Courier New" pitchFamily="34" charset="-122"/>
+                <a:cs typeface="Courier New" pitchFamily="34" charset="-120"/>
+              </a:rPr>
+              <a:t>   a price for something new"}</a:t>
+            </a:r>
+            <a:endParaRPr lang="en-US" sz="1200" dirty="0"/>
+          </a:p>
           <a:p>
             <a:pPr indent="0" marL="0">
               <a:buNone/>
             </a:pPr>
             <a:r>
-              <a:rPr lang="en-US" sz="1400" dirty="0">
-                <a:solidFill>
-                  <a:srgbClr val="4A5568"/>
-                </a:solidFill>
-              </a:rPr>
-              <a:t>Claude (Anthropic, claude-opus-5-5), one message per request, answer must be one option name. Closed model, used under Anthropic’s terms.</a:t>
-            </a:r>
-            <a:endParaRPr lang="en-US" sz="1400" dirty="0"/>
+              <a:rPr lang="en-US" sz="1200" dirty="0">
+                <a:solidFill>
+                  <a:srgbClr val="E6EDF7"/>
+                </a:solidFill>
+                <a:latin typeface="Courier New" pitchFamily="34" charset="0"/>
+                <a:ea typeface="Courier New" pitchFamily="34" charset="-122"/>
+                <a:cs typeface="Courier New" pitchFamily="34" charset="-120"/>
+              </a:rPr>
+              <a:t>TEMPLATE = "The customer {}."</a:t>
+            </a:r>
+            <a:endParaRPr lang="en-US" sz="1200" dirty="0"/>
+          </a:p>
+          <a:p>
+            <a:pPr indent="0" marL="0">
+              <a:buNone/>
+            </a:pPr>
+            <a:endParaRPr lang="en-US" sz="1200" dirty="0"/>
+          </a:p>
+          <a:p>
+            <a:pPr indent="0" marL="0">
+              <a:buNone/>
+            </a:pPr>
+            <a:r>
+              <a:rPr lang="en-US" sz="1200" dirty="0">
+                <a:solidFill>
+                  <a:srgbClr val="E6EDF7"/>
+                </a:solidFill>
+                <a:latin typeface="Courier New" pitchFamily="34" charset="0"/>
+                <a:ea typeface="Courier New" pitchFamily="34" charset="-122"/>
+                <a:cs typeface="Courier New" pitchFamily="34" charset="-120"/>
+              </a:rPr>
+              <a:t>def decide(message, t):          # wrapper</a:t>
+            </a:r>
+            <a:endParaRPr lang="en-US" sz="1200" dirty="0"/>
+          </a:p>
+          <a:p>
+            <a:pPr indent="0" marL="0">
+              <a:buNone/>
+            </a:pPr>
+            <a:r>
+              <a:rPr lang="en-US" sz="1200" dirty="0">
+                <a:solidFill>
+                  <a:srgbClr val="E6EDF7"/>
+                </a:solidFill>
+                <a:latin typeface="Courier New" pitchFamily="34" charset="0"/>
+                <a:ea typeface="Courier New" pitchFamily="34" charset="-122"/>
+                <a:cs typeface="Courier New" pitchFamily="34" charset="-120"/>
+              </a:rPr>
+              <a:t>    p_sup, p_sal = scores(message)</a:t>
+            </a:r>
+            <a:endParaRPr lang="en-US" sz="1200" dirty="0"/>
+          </a:p>
+          <a:p>
+            <a:pPr indent="0" marL="0">
+              <a:buNone/>
+            </a:pPr>
+            <a:r>
+              <a:rPr lang="en-US" sz="1200" dirty="0">
+                <a:solidFill>
+                  <a:srgbClr val="E6EDF7"/>
+                </a:solidFill>
+                <a:latin typeface="Courier New" pitchFamily="34" charset="0"/>
+                <a:ea typeface="Courier New" pitchFamily="34" charset="-122"/>
+                <a:cs typeface="Courier New" pitchFamily="34" charset="-120"/>
+              </a:rPr>
+              <a:t>    route = "customer_service" if p_sup &gt;= t else "sales"</a:t>
+            </a:r>
+            <a:endParaRPr lang="en-US" sz="1200" dirty="0"/>
+          </a:p>
+          <a:p>
+            <a:pPr indent="0" marL="0">
+              <a:buNone/>
+            </a:pPr>
+            <a:r>
+              <a:rPr lang="en-US" sz="1200" dirty="0">
+                <a:solidFill>
+                  <a:srgbClr val="E6EDF7"/>
+                </a:solidFill>
+                <a:latin typeface="Courier New" pitchFamily="34" charset="0"/>
+                <a:ea typeface="Courier New" pitchFamily="34" charset="-122"/>
+                <a:cs typeface="Courier New" pitchFamily="34" charset="-120"/>
+              </a:rPr>
+              <a:t>    assert route in FLAG         # validation</a:t>
+            </a:r>
+            <a:endParaRPr lang="en-US" sz="1200" dirty="0"/>
+          </a:p>
+          <a:p>
+            <a:pPr indent="0" marL="0">
+              <a:buNone/>
+            </a:pPr>
+            <a:r>
+              <a:rPr lang="en-US" sz="1200" dirty="0">
+                <a:solidFill>
+                  <a:srgbClr val="E6EDF7"/>
+                </a:solidFill>
+                <a:latin typeface="Courier New" pitchFamily="34" charset="0"/>
+                <a:ea typeface="Courier New" pitchFamily="34" charset="-122"/>
+                <a:cs typeface="Courier New" pitchFamily="34" charset="-120"/>
+              </a:rPr>
+              <a:t>    return {"route": route, "p_support": p_sup,</a:t>
+            </a:r>
+            <a:endParaRPr lang="en-US" sz="1200" dirty="0"/>
+          </a:p>
+          <a:p>
+            <a:pPr indent="0" marL="0">
+              <a:buNone/>
+            </a:pPr>
+            <a:r>
+              <a:rPr lang="en-US" sz="1200" dirty="0">
+                <a:solidFill>
+                  <a:srgbClr val="E6EDF7"/>
+                </a:solidFill>
+                <a:latin typeface="Courier New" pitchFamily="34" charset="0"/>
+                <a:ea typeface="Courier New" pitchFamily="34" charset="-122"/>
+                <a:cs typeface="Courier New" pitchFamily="34" charset="-120"/>
+              </a:rPr>
+              <a:t>            "p_sales": p_sal}    # any error -&gt; support</a:t>
+            </a:r>
+            <a:endParaRPr lang="en-US" sz="1200" dirty="0"/>
           </a:p>
         </p:txBody>
       </p:sp>
@@ -10077,8 +12428,8 @@
         </p:nvSpPr>
         <p:spPr>
           <a:xfrm>
-            <a:off x="6583680" y="3246120"/>
-            <a:ext cx="5029200" cy="365760"/>
+            <a:off x="6903720" y="1691640"/>
+            <a:ext cx="4754880" cy="365760"/>
           </a:xfrm>
           <a:prstGeom prst="rect">
             <a:avLst/>
@@ -10099,7 +12450,7 @@
                   <a:srgbClr val="14213D"/>
                 </a:solidFill>
               </a:rPr>
-              <a:t>Jev, ready but not run</a:t>
+              <a:t>How it decides</a:t>
             </a:r>
             <a:endParaRPr lang="en-US" sz="1700" dirty="0"/>
           </a:p>
@@ -10113,8 +12464,8 @@
         </p:nvSpPr>
         <p:spPr>
           <a:xfrm>
-            <a:off x="6583680" y="3657600"/>
-            <a:ext cx="5029200" cy="960120"/>
+            <a:off x="6903720" y="2103120"/>
+            <a:ext cx="4754880" cy="1005840"/>
           </a:xfrm>
           <a:prstGeom prst="rect">
             <a:avLst/>
@@ -10135,7 +12486,7 @@
                   <a:srgbClr val="4A5568"/>
                 </a:solidFill>
               </a:rPr>
-              <a:t>Same instructions as a Jev Choice question in decision_router.py. Needs a paid TypeSafe key ($0.042 per million input tokens).</a:t>
+              <a:t>For each option it scores how strongly the message entails “The customer …”. The routing instructions are the two option texts.</a:t>
             </a:r>
             <a:endParaRPr lang="en-US" sz="1400" dirty="0"/>
           </a:p>
@@ -10149,8 +12500,8 @@
         </p:nvSpPr>
         <p:spPr>
           <a:xfrm>
-            <a:off x="6583680" y="4709160"/>
-            <a:ext cx="5029200" cy="365760"/>
+            <a:off x="6903720" y="3200400"/>
+            <a:ext cx="4754880" cy="365760"/>
           </a:xfrm>
           <a:prstGeom prst="rect">
             <a:avLst/>
@@ -10171,7 +12522,7 @@
                   <a:srgbClr val="14213D"/>
                 </a:solidFill>
               </a:rPr>
-              <a:t>Output validation</a:t>
+              <a:t>Threshold chosen on training data</a:t>
             </a:r>
             <a:endParaRPr lang="en-US" sz="1700" dirty="0"/>
           </a:p>
@@ -10185,8 +12536,8 @@
         </p:nvSpPr>
         <p:spPr>
           <a:xfrm>
-            <a:off x="6583680" y="5120640"/>
-            <a:ext cx="5029200" cy="960120"/>
+            <a:off x="6903720" y="3611880"/>
+            <a:ext cx="4754880" cy="1005840"/>
           </a:xfrm>
           <a:prstGeom prst="rect">
             <a:avLst/>
@@ -10207,7 +12558,7 @@
                   <a:srgbClr val="4A5568"/>
                 </a:solidFill>
               </a:rPr>
-              <a:t>Anything that isn’t exactly one of the two options is rejected and falls back to support, the safe default.</a:t>
+              <a:t>Business rule “problems first”: support if p_support ≥ t. Best t on the 40 training messages: 0.90 (train accuracy 80%).</a:t>
             </a:r>
             <a:endParaRPr lang="en-US" sz="1400" dirty="0"/>
           </a:p>
@@ -10221,6 +12572,78 @@
         </p:nvSpPr>
         <p:spPr>
           <a:xfrm>
+            <a:off x="6903720" y="4709160"/>
+            <a:ext cx="4754880" cy="365760"/>
+          </a:xfrm>
+          <a:prstGeom prst="rect">
+            <a:avLst/>
+          </a:prstGeom>
+          <a:noFill/>
+          <a:ln/>
+        </p:spPr>
+        <p:txBody>
+          <a:bodyPr wrap="square" lIns="0" tIns="0" rIns="0" bIns="0" rtlCol="0" anchor="t"/>
+          <a:lstStyle/>
+          <a:p>
+            <a:pPr indent="0" marL="0">
+              <a:buNone/>
+            </a:pPr>
+            <a:r>
+              <a:rPr lang="en-US" sz="1700" b="1" dirty="0">
+                <a:solidFill>
+                  <a:srgbClr val="14213D"/>
+                </a:solidFill>
+              </a:rPr>
+              <a:t>Licence and setup</a:t>
+            </a:r>
+            <a:endParaRPr lang="en-US" sz="1700" dirty="0"/>
+          </a:p>
+        </p:txBody>
+      </p:sp>
+      <p:sp>
+        <p:nvSpPr>
+          <p:cNvPr id="13" name="Text 11"/>
+          <p:cNvSpPr txBox="1"/>
+          <p:nvPr/>
+        </p:nvSpPr>
+        <p:spPr>
+          <a:xfrm>
+            <a:off x="6903720" y="5120640"/>
+            <a:ext cx="4754880" cy="1005840"/>
+          </a:xfrm>
+          <a:prstGeom prst="rect">
+            <a:avLst/>
+          </a:prstGeom>
+          <a:noFill/>
+          <a:ln/>
+        </p:spPr>
+        <p:txBody>
+          <a:bodyPr wrap="square" lIns="0" tIns="0" rIns="0" bIns="0" rtlCol="0" anchor="t"/>
+          <a:lstStyle/>
+          <a:p>
+            <a:pPr indent="0" marL="0">
+              <a:buNone/>
+            </a:pPr>
+            <a:r>
+              <a:rPr lang="en-US" sz="1400" dirty="0">
+                <a:solidFill>
+                  <a:srgbClr val="4A5568"/>
+                </a:solidFill>
+              </a:rPr>
+              <a:t>MIT licence, Hugging Face transformers, runs on Google Colab CPU — no key, no cost.</a:t>
+            </a:r>
+            <a:endParaRPr lang="en-US" sz="1400" dirty="0"/>
+          </a:p>
+        </p:txBody>
+      </p:sp>
+      <p:sp>
+        <p:nvSpPr>
+          <p:cNvPr id="14" name="Text 12"/>
+          <p:cNvSpPr txBox="1"/>
+          <p:nvPr/>
+        </p:nvSpPr>
+        <p:spPr>
+          <a:xfrm>
             <a:off x="548640" y="6400800"/>
             <a:ext cx="10180015" cy="274320"/>
           </a:xfrm>
@@ -10231,21 +12654,21 @@
           <a:ln/>
         </p:spPr>
         <p:txBody>
-          <a:bodyPr wrap="square" lIns="0" tIns="0" rIns="0" bIns="0" rtlCol="0" anchor="ctr"/>
+          <a:bodyPr wrap="square" lIns="0" tIns="0" rIns="0" bIns="0" rtlCol="0" anchor="t"/>
           <a:lstStyle/>
           <a:p>
             <a:pPr indent="0" marL="0">
               <a:buNone/>
             </a:pPr>
             <a:r>
-              <a:rPr lang="en-US" sz="1100" dirty="0">
+              <a:rPr lang="en-US" sz="1000" dirty="0">
                 <a:solidFill>
                   <a:srgbClr val="6B7689"/>
                 </a:solidFill>
               </a:rPr>
-              <a:t>Moaaz · Decision model</a:t>
-            </a:r>
-            <a:endParaRPr lang="en-US" sz="1100" dirty="0"/>
+              <a:t>Notebook: KIO_Routing.ipynb, section 3</a:t>
+            </a:r>
+            <a:endParaRPr lang="en-US" sz="1000" dirty="0"/>
           </a:p>
         </p:txBody>
       </p:sp>
@@ -10321,14 +12744,41 @@
       </p:grpSpPr>
       <p:sp>
         <p:nvSpPr>
-          <p:cNvPr id="2" name="Text 0"/>
+          <p:cNvPr id="2" name="Shape 0"/>
+          <p:cNvSpPr/>
+          <p:nvPr/>
+        </p:nvSpPr>
+        <p:spPr>
+          <a:xfrm>
+            <a:off x="548640" y="329184"/>
+            <a:ext cx="960120" cy="274320"/>
+          </a:xfrm>
+          <a:prstGeom prst="roundRect">
+            <a:avLst>
+              <a:gd name="adj" fmla="val 50000"/>
+            </a:avLst>
+          </a:prstGeom>
+          <a:solidFill>
+            <a:srgbClr val="B8451B"/>
+          </a:solidFill>
+          <a:ln w="12700">
+            <a:solidFill>
+              <a:srgbClr val="B8451B"/>
+            </a:solidFill>
+            <a:prstDash val="solid"/>
+          </a:ln>
+        </p:spPr>
+      </p:sp>
+      <p:sp>
+        <p:nvSpPr>
+          <p:cNvPr id="3" name="Text 1"/>
           <p:cNvSpPr txBox="1"/>
           <p:nvPr/>
         </p:nvSpPr>
         <p:spPr>
           <a:xfrm>
-            <a:off x="548640" y="365760"/>
-            <a:ext cx="11094415" cy="274320"/>
+            <a:off x="548640" y="329184"/>
+            <a:ext cx="960120" cy="274320"/>
           </a:xfrm>
           <a:prstGeom prst="rect">
             <a:avLst/>
@@ -10340,11 +12790,47 @@
           <a:bodyPr wrap="square" lIns="0" tIns="0" rIns="0" bIns="0" rtlCol="0" anchor="ctr"/>
           <a:lstStyle/>
           <a:p>
+            <a:pPr algn="ctr" indent="0" marL="0">
+              <a:buNone/>
+            </a:pPr>
+            <a:r>
+              <a:rPr lang="en-US" sz="1000" b="1" spc="100" kern="0" dirty="0">
+                <a:solidFill>
+                  <a:srgbClr val="FFFFFF"/>
+                </a:solidFill>
+              </a:rPr>
+              <a:t>MOAAZ</a:t>
+            </a:r>
+            <a:endParaRPr lang="en-US" sz="1000" dirty="0"/>
+          </a:p>
+        </p:txBody>
+      </p:sp>
+      <p:sp>
+        <p:nvSpPr>
+          <p:cNvPr id="4" name="Text 2"/>
+          <p:cNvSpPr txBox="1"/>
+          <p:nvPr/>
+        </p:nvSpPr>
+        <p:spPr>
+          <a:xfrm>
+            <a:off x="1645920" y="356616"/>
+            <a:ext cx="8229600" cy="274320"/>
+          </a:xfrm>
+          <a:prstGeom prst="rect">
+            <a:avLst/>
+          </a:prstGeom>
+          <a:noFill/>
+          <a:ln/>
+        </p:spPr>
+        <p:txBody>
+          <a:bodyPr wrap="square" lIns="0" tIns="0" rIns="0" bIns="0" rtlCol="0" anchor="t"/>
+          <a:lstStyle/>
+          <a:p>
             <a:pPr indent="0" marL="0">
               <a:buNone/>
             </a:pPr>
             <a:r>
-              <a:rPr lang="en-US" sz="1200" b="1" spc="200" kern="0" dirty="0">
+              <a:rPr lang="en-US" sz="1100" b="1" spc="200" kern="0" dirty="0">
                 <a:solidFill>
                   <a:srgbClr val="B8451B"/>
                 </a:solidFill>
@@ -10354,13 +12840,13 @@
               </a:rPr>
               <a:t>DECISION MODEL · RESULTS</a:t>
             </a:r>
-            <a:endParaRPr lang="en-US" sz="1200" dirty="0"/>
-          </a:p>
-        </p:txBody>
-      </p:sp>
-      <p:sp>
-        <p:nvSpPr>
-          <p:cNvPr id="3" name="Text 0"/>
+            <a:endParaRPr lang="en-US" sz="1100" dirty="0"/>
+          </a:p>
+        </p:txBody>
+      </p:sp>
+      <p:sp>
+        <p:nvSpPr>
+          <p:cNvPr id="5" name="Text 0"/>
           <p:cNvSpPr/>
           <p:nvPr>
             <p:ph idx="100" type="title" hasCustomPrompt="1"/>
@@ -10368,8 +12854,8 @@
         </p:nvSpPr>
         <p:spPr>
           <a:xfrm>
-            <a:off x="548640" y="685800"/>
-            <a:ext cx="11094415" cy="822960"/>
+            <a:off x="548640" y="713232"/>
+            <a:ext cx="11094415" cy="777240"/>
           </a:xfrm>
           <a:prstGeom prst="rect">
             <a:avLst/>
@@ -10385,31 +12871,31 @@
               <a:buNone/>
             </a:pPr>
             <a:r>
-              <a:rPr lang="en-US" sz="3400" b="1" dirty="0">
+              <a:rPr lang="en-US" sz="3200" b="1" dirty="0">
                 <a:solidFill>
                   <a:srgbClr val="14213D"/>
                 </a:solidFill>
               </a:rPr>
-              <a:t>Every route correct, including the tricky ones</a:t>
-            </a:r>
-            <a:endParaRPr lang="en-US" sz="3400" dirty="0"/>
-          </a:p>
-        </p:txBody>
-      </p:sp>
-      <p:sp>
-        <p:nvSpPr>
-          <p:cNvPr id="4" name="Shape 2"/>
+              <a:t>Perfect on mixed intent, but cautious on sales</a:t>
+            </a:r>
+            <a:endParaRPr lang="en-US" sz="3200" dirty="0"/>
+          </a:p>
+        </p:txBody>
+      </p:sp>
+      <p:sp>
+        <p:nvSpPr>
+          <p:cNvPr id="6" name="Shape 4"/>
           <p:cNvSpPr/>
           <p:nvPr/>
         </p:nvSpPr>
         <p:spPr>
           <a:xfrm>
-            <a:off x="548640" y="1691640"/>
-            <a:ext cx="3515258" cy="1325880"/>
+            <a:off x="548640" y="1645920"/>
+            <a:ext cx="3515258" cy="1234440"/>
           </a:xfrm>
           <a:prstGeom prst="roundRect">
             <a:avLst>
-              <a:gd name="adj" fmla="val 8276"/>
+              <a:gd name="adj" fmla="val 7407"/>
             </a:avLst>
           </a:prstGeom>
           <a:solidFill>
@@ -10425,14 +12911,14 @@
       </p:sp>
       <p:sp>
         <p:nvSpPr>
-          <p:cNvPr id="5" name="Text 3"/>
+          <p:cNvPr id="7" name="Text 5"/>
           <p:cNvSpPr txBox="1"/>
           <p:nvPr/>
         </p:nvSpPr>
         <p:spPr>
           <a:xfrm>
-            <a:off x="822960" y="1783080"/>
-            <a:ext cx="2966618" cy="685800"/>
+            <a:off x="777240" y="1783080"/>
+            <a:ext cx="3058058" cy="640080"/>
           </a:xfrm>
           <a:prstGeom prst="rect">
             <a:avLst/>
@@ -10448,27 +12934,27 @@
               <a:buNone/>
             </a:pPr>
             <a:r>
-              <a:rPr lang="en-US" sz="3600" b="1" dirty="0">
+              <a:rPr lang="en-US" sz="3200" b="1" dirty="0">
                 <a:solidFill>
                   <a:srgbClr val="14213D"/>
                 </a:solidFill>
               </a:rPr>
-              <a:t>20/20</a:t>
-            </a:r>
-            <a:endParaRPr lang="en-US" sz="3600" dirty="0"/>
-          </a:p>
-        </p:txBody>
-      </p:sp>
-      <p:sp>
-        <p:nvSpPr>
-          <p:cNvPr id="6" name="Text 4"/>
+              <a:t>16 / 20</a:t>
+            </a:r>
+            <a:endParaRPr lang="en-US" sz="3200" dirty="0"/>
+          </a:p>
+        </p:txBody>
+      </p:sp>
+      <p:sp>
+        <p:nvSpPr>
+          <p:cNvPr id="8" name="Text 6"/>
           <p:cNvSpPr txBox="1"/>
           <p:nvPr/>
         </p:nvSpPr>
         <p:spPr>
           <a:xfrm>
-            <a:off x="822960" y="2514600"/>
-            <a:ext cx="2966618" cy="365760"/>
+            <a:off x="777240" y="2423160"/>
+            <a:ext cx="3058058" cy="365760"/>
           </a:xfrm>
           <a:prstGeom prst="rect">
             <a:avLst/>
@@ -10484,31 +12970,31 @@
               <a:buNone/>
             </a:pPr>
             <a:r>
-              <a:rPr lang="en-US" sz="1400" dirty="0">
+              <a:rPr lang="en-US" sz="1300" dirty="0">
                 <a:solidFill>
                   <a:srgbClr val="4A5568"/>
                 </a:solidFill>
               </a:rPr>
-              <a:t>test set</a:t>
-            </a:r>
-            <a:endParaRPr lang="en-US" sz="1400" dirty="0"/>
-          </a:p>
-        </p:txBody>
-      </p:sp>
-      <p:sp>
-        <p:nvSpPr>
-          <p:cNvPr id="7" name="Shape 5"/>
+              <a:t>test set (80%)</a:t>
+            </a:r>
+            <a:endParaRPr lang="en-US" sz="1300" dirty="0"/>
+          </a:p>
+        </p:txBody>
+      </p:sp>
+      <p:sp>
+        <p:nvSpPr>
+          <p:cNvPr id="9" name="Shape 7"/>
           <p:cNvSpPr/>
           <p:nvPr/>
         </p:nvSpPr>
         <p:spPr>
           <a:xfrm>
-            <a:off x="4338218" y="1691640"/>
-            <a:ext cx="3515258" cy="1325880"/>
+            <a:off x="4338218" y="1645920"/>
+            <a:ext cx="3515258" cy="1234440"/>
           </a:xfrm>
           <a:prstGeom prst="roundRect">
             <a:avLst>
-              <a:gd name="adj" fmla="val 8276"/>
+              <a:gd name="adj" fmla="val 7407"/>
             </a:avLst>
           </a:prstGeom>
           <a:solidFill>
@@ -10524,14 +13010,14 @@
       </p:sp>
       <p:sp>
         <p:nvSpPr>
-          <p:cNvPr id="8" name="Text 6"/>
+          <p:cNvPr id="10" name="Text 8"/>
           <p:cNvSpPr txBox="1"/>
           <p:nvPr/>
         </p:nvSpPr>
         <p:spPr>
           <a:xfrm>
-            <a:off x="4612538" y="1783080"/>
-            <a:ext cx="2966618" cy="685800"/>
+            <a:off x="4566818" y="1783080"/>
+            <a:ext cx="3058058" cy="640080"/>
           </a:xfrm>
           <a:prstGeom prst="rect">
             <a:avLst/>
@@ -10547,27 +13033,27 @@
               <a:buNone/>
             </a:pPr>
             <a:r>
-              <a:rPr lang="en-US" sz="3600" b="1" dirty="0">
-                <a:solidFill>
-                  <a:srgbClr val="14213D"/>
-                </a:solidFill>
-              </a:rPr>
-              <a:t>4/4</a:t>
-            </a:r>
-            <a:endParaRPr lang="en-US" sz="3600" dirty="0"/>
-          </a:p>
-        </p:txBody>
-      </p:sp>
-      <p:sp>
-        <p:nvSpPr>
-          <p:cNvPr id="9" name="Text 7"/>
+              <a:rPr lang="en-US" sz="3200" b="1" dirty="0">
+                <a:solidFill>
+                  <a:srgbClr val="1B8A5A"/>
+                </a:solidFill>
+              </a:rPr>
+              <a:t>4 / 4</a:t>
+            </a:r>
+            <a:endParaRPr lang="en-US" sz="3200" dirty="0"/>
+          </a:p>
+        </p:txBody>
+      </p:sp>
+      <p:sp>
+        <p:nvSpPr>
+          <p:cNvPr id="11" name="Text 9"/>
           <p:cNvSpPr txBox="1"/>
           <p:nvPr/>
         </p:nvSpPr>
         <p:spPr>
           <a:xfrm>
-            <a:off x="4612538" y="2514600"/>
-            <a:ext cx="2966618" cy="365760"/>
+            <a:off x="4566818" y="2423160"/>
+            <a:ext cx="3058058" cy="365760"/>
           </a:xfrm>
           <a:prstGeom prst="rect">
             <a:avLst/>
@@ -10583,31 +13069,31 @@
               <a:buNone/>
             </a:pPr>
             <a:r>
-              <a:rPr lang="en-US" sz="1400" dirty="0">
+              <a:rPr lang="en-US" sz="1300" dirty="0">
                 <a:solidFill>
                   <a:srgbClr val="4A5568"/>
                 </a:solidFill>
               </a:rPr>
               <a:t>mixed-intent messages</a:t>
             </a:r>
-            <a:endParaRPr lang="en-US" sz="1400" dirty="0"/>
-          </a:p>
-        </p:txBody>
-      </p:sp>
-      <p:sp>
-        <p:nvSpPr>
-          <p:cNvPr id="10" name="Shape 8"/>
+            <a:endParaRPr lang="en-US" sz="1300" dirty="0"/>
+          </a:p>
+        </p:txBody>
+      </p:sp>
+      <p:sp>
+        <p:nvSpPr>
+          <p:cNvPr id="12" name="Shape 10"/>
           <p:cNvSpPr/>
           <p:nvPr/>
         </p:nvSpPr>
         <p:spPr>
           <a:xfrm>
-            <a:off x="8127797" y="1691640"/>
-            <a:ext cx="3515258" cy="1325880"/>
+            <a:off x="8127797" y="1645920"/>
+            <a:ext cx="3515258" cy="1234440"/>
           </a:xfrm>
           <a:prstGeom prst="roundRect">
             <a:avLst>
-              <a:gd name="adj" fmla="val 8276"/>
+              <a:gd name="adj" fmla="val 7407"/>
             </a:avLst>
           </a:prstGeom>
           <a:solidFill>
@@ -10623,14 +13109,14 @@
       </p:sp>
       <p:sp>
         <p:nvSpPr>
-          <p:cNvPr id="11" name="Text 9"/>
+          <p:cNvPr id="13" name="Text 11"/>
           <p:cNvSpPr txBox="1"/>
           <p:nvPr/>
         </p:nvSpPr>
         <p:spPr>
           <a:xfrm>
-            <a:off x="8402117" y="1783080"/>
-            <a:ext cx="2966618" cy="685800"/>
+            <a:off x="8356397" y="1783080"/>
+            <a:ext cx="3058058" cy="640080"/>
           </a:xfrm>
           <a:prstGeom prst="rect">
             <a:avLst/>
@@ -10646,27 +13132,27 @@
               <a:buNone/>
             </a:pPr>
             <a:r>
-              <a:rPr lang="en-US" sz="3600" b="1" dirty="0">
+              <a:rPr lang="en-US" sz="3200" b="1" dirty="0">
                 <a:solidFill>
                   <a:srgbClr val="14213D"/>
                 </a:solidFill>
               </a:rPr>
-              <a:t>8/8</a:t>
-            </a:r>
-            <a:endParaRPr lang="en-US" sz="3600" dirty="0"/>
-          </a:p>
-        </p:txBody>
-      </p:sp>
-      <p:sp>
-        <p:nvSpPr>
-          <p:cNvPr id="12" name="Text 10"/>
+              <a:t>5 / 8</a:t>
+            </a:r>
+            <a:endParaRPr lang="en-US" sz="3200" dirty="0"/>
+          </a:p>
+        </p:txBody>
+      </p:sp>
+      <p:sp>
+        <p:nvSpPr>
+          <p:cNvPr id="14" name="Text 12"/>
           <p:cNvSpPr txBox="1"/>
           <p:nvPr/>
         </p:nvSpPr>
         <p:spPr>
           <a:xfrm>
-            <a:off x="8402117" y="2514600"/>
-            <a:ext cx="2966618" cy="365760"/>
+            <a:off x="8356397" y="2423160"/>
+            <a:ext cx="3058058" cy="365760"/>
           </a:xfrm>
           <a:prstGeom prst="rect">
             <a:avLst/>
@@ -10682,14 +13168,50 @@
               <a:buNone/>
             </a:pPr>
             <a:r>
-              <a:rPr lang="en-US" sz="1400" dirty="0">
+              <a:rPr lang="en-US" sz="1300" dirty="0">
                 <a:solidFill>
                   <a:srgbClr val="4A5568"/>
                 </a:solidFill>
               </a:rPr>
-              <a:t>new hard messages outside the dataset</a:t>
-            </a:r>
-            <a:endParaRPr lang="en-US" sz="1400" dirty="0"/>
+              <a:t>new hard messages</a:t>
+            </a:r>
+            <a:endParaRPr lang="en-US" sz="1300" dirty="0"/>
+          </a:p>
+        </p:txBody>
+      </p:sp>
+      <p:sp>
+        <p:nvSpPr>
+          <p:cNvPr id="15" name="Text 13"/>
+          <p:cNvSpPr txBox="1"/>
+          <p:nvPr/>
+        </p:nvSpPr>
+        <p:spPr>
+          <a:xfrm>
+            <a:off x="548640" y="3154680"/>
+            <a:ext cx="11094415" cy="365760"/>
+          </a:xfrm>
+          <a:prstGeom prst="rect">
+            <a:avLst/>
+          </a:prstGeom>
+          <a:noFill/>
+          <a:ln/>
+        </p:spPr>
+        <p:txBody>
+          <a:bodyPr wrap="square" lIns="0" tIns="0" rIns="0" bIns="0" rtlCol="0" anchor="t"/>
+          <a:lstStyle/>
+          <a:p>
+            <a:pPr indent="0" marL="0">
+              <a:buNone/>
+            </a:pPr>
+            <a:r>
+              <a:rPr lang="en-US" sz="1500" b="1" dirty="0">
+                <a:solidFill>
+                  <a:srgbClr val="14213D"/>
+                </a:solidFill>
+              </a:rPr>
+              <a:t>Test-set errors — all four are sales messages sent to support:</a:t>
+            </a:r>
+            <a:endParaRPr lang="en-US" sz="1500" dirty="0"/>
           </a:p>
         </p:txBody>
       </p:sp>
@@ -10708,17 +13230,17 @@
           </p:nvPr>
         </p:nvGraphicFramePr>
         <p:xfrm>
-          <a:off x="548640" y="3337560"/>
-          <a:ext cx="11094415" cy="914400"/>
+          <a:off x="548640" y="3566160"/>
+          <a:ext cx="11091672" cy="914400"/>
         </p:xfrm>
         <a:graphic>
           <a:graphicData uri="http://schemas.openxmlformats.org/drawingml/2006/table">
             <a:tbl>
               <a:tblPr/>
               <a:tblGrid>
-                <a:gridCol w="6675120"/>
-                <a:gridCol w="2377440"/>
-                <a:gridCol w="2039112"/>
+                <a:gridCol w="8046720"/>
+                <a:gridCol w="1463040"/>
+                <a:gridCol w="1581912"/>
               </a:tblGrid>
               <a:tr h="0">
                 <a:tc>
@@ -10730,17 +13252,17 @@
                         <a:buNone/>
                       </a:pPr>
                       <a:r>
-                        <a:rPr lang="en-US" sz="1600" b="1" dirty="0">
+                        <a:rPr lang="en-US" sz="1400" b="1" dirty="0">
                           <a:solidFill>
                             <a:srgbClr val="14213D"/>
                           </a:solidFill>
                         </a:rPr>
-                        <a:t>Hard message (not in the 60)</a:t>
+                        <a:t>Message (true label: sales)</a:t>
                       </a:r>
-                      <a:endParaRPr lang="en-US" sz="1600" dirty="0"/>
+                      <a:endParaRPr lang="en-US" sz="1400" dirty="0"/>
                     </a:p>
                   </a:txBody>
-                  <a:tcPr marL="91440" marR="91440" marT="91440" marB="91440" anchor="ctr">
+                  <a:tcPr marL="91440" marR="91440" marT="64008" marB="64008" anchor="ctr">
                     <a:lnL w="9525" cap="flat" cmpd="sng" algn="ctr">
                       <a:solidFill>
                         <a:srgbClr val="D5D8DE"/>
@@ -10791,17 +13313,17 @@
                         <a:buNone/>
                       </a:pPr>
                       <a:r>
-                        <a:rPr lang="en-US" sz="1600" b="1" dirty="0">
+                        <a:rPr lang="en-US" sz="1400" b="1" dirty="0">
                           <a:solidFill>
                             <a:srgbClr val="14213D"/>
                           </a:solidFill>
                         </a:rPr>
-                        <a:t>Decision model</a:t>
+                        <a:t>p_support</a:t>
                       </a:r>
-                      <a:endParaRPr lang="en-US" sz="1600" dirty="0"/>
+                      <a:endParaRPr lang="en-US" sz="1400" dirty="0"/>
                     </a:p>
                   </a:txBody>
-                  <a:tcPr marL="91440" marR="91440" marT="91440" marB="91440" anchor="ctr">
+                  <a:tcPr marL="91440" marR="91440" marT="64008" marB="64008" anchor="ctr">
                     <a:lnL w="9525" cap="flat" cmpd="sng" algn="ctr">
                       <a:solidFill>
                         <a:srgbClr val="D5D8DE"/>
@@ -10852,17 +13374,17 @@
                         <a:buNone/>
                       </a:pPr>
                       <a:r>
-                        <a:rPr lang="en-US" sz="1600" b="1" dirty="0">
+                        <a:rPr lang="en-US" sz="1400" b="1" dirty="0">
                           <a:solidFill>
                             <a:srgbClr val="14213D"/>
                           </a:solidFill>
                         </a:rPr>
-                        <a:t>Why it is hard</a:t>
+                        <a:t>Route</a:t>
                       </a:r>
-                      <a:endParaRPr lang="en-US" sz="1600" dirty="0"/>
+                      <a:endParaRPr lang="en-US" sz="1400" dirty="0"/>
                     </a:p>
                   </a:txBody>
-                  <a:tcPr marL="91440" marR="91440" marT="91440" marB="91440" anchor="ctr">
+                  <a:tcPr marL="91440" marR="91440" marT="64008" marB="64008" anchor="ctr">
                     <a:lnL w="9525" cap="flat" cmpd="sng" algn="ctr">
                       <a:solidFill>
                         <a:srgbClr val="D5D8DE"/>
@@ -10915,17 +13437,17 @@
                         <a:buNone/>
                       </a:pPr>
                       <a:r>
-                        <a:rPr lang="en-US" sz="1600" dirty="0">
+                        <a:rPr lang="en-US" sz="1400" dirty="0">
                           <a:solidFill>
                             <a:srgbClr val="14213D"/>
                           </a:solidFill>
                         </a:rPr>
-                        <a:t>Your quote said 4 weeks, but the CNC we bought in July still isn’t commissioned.</a:t>
+                        <a:t>What packages do you offer for predictive maintenance on 20 motors?</a:t>
                       </a:r>
-                      <a:endParaRPr lang="en-US" sz="1600" dirty="0"/>
+                      <a:endParaRPr lang="en-US" sz="1400" dirty="0"/>
                     </a:p>
                   </a:txBody>
-                  <a:tcPr marL="91440" marR="91440" marT="91440" marB="91440" anchor="ctr">
+                  <a:tcPr marL="91440" marR="91440" marT="64008" marB="64008" anchor="ctr">
                     <a:lnL w="9525" cap="flat" cmpd="sng" algn="ctr">
                       <a:solidFill>
                         <a:srgbClr val="D5D8DE"/>
@@ -10976,17 +13498,17 @@
                         <a:buNone/>
                       </a:pPr>
                       <a:r>
-                        <a:rPr lang="en-US" sz="1600" dirty="0">
+                        <a:rPr lang="en-US" sz="1400" dirty="0">
                           <a:solidFill>
                             <a:srgbClr val="14213D"/>
                           </a:solidFill>
                         </a:rPr>
-                        <a:t>customer_service → 0</a:t>
+                        <a:t>0.98</a:t>
                       </a:r>
-                      <a:endParaRPr lang="en-US" sz="1600" dirty="0"/>
+                      <a:endParaRPr lang="en-US" sz="1400" dirty="0"/>
                     </a:p>
                   </a:txBody>
-                  <a:tcPr marL="91440" marR="91440" marT="91440" marB="91440" anchor="ctr">
+                  <a:tcPr marL="91440" marR="91440" marT="64008" marB="64008" anchor="ctr">
                     <a:lnL w="9525" cap="flat" cmpd="sng" algn="ctr">
                       <a:solidFill>
                         <a:srgbClr val="D5D8DE"/>
@@ -11037,17 +13559,17 @@
                         <a:buNone/>
                       </a:pPr>
                       <a:r>
-                        <a:rPr lang="en-US" sz="1600" dirty="0">
+                        <a:rPr lang="en-US" sz="1400" dirty="0">
                           <a:solidFill>
                             <a:srgbClr val="14213D"/>
                           </a:solidFill>
                         </a:rPr>
-                        <a:t>“quote”, “bought”</a:t>
+                        <a:t>support ✗</a:t>
                       </a:r>
-                      <a:endParaRPr lang="en-US" sz="1600" dirty="0"/>
+                      <a:endParaRPr lang="en-US" sz="1400" dirty="0"/>
                     </a:p>
                   </a:txBody>
-                  <a:tcPr marL="91440" marR="91440" marT="91440" marB="91440" anchor="ctr">
+                  <a:tcPr marL="91440" marR="91440" marT="64008" marB="64008" anchor="ctr">
                     <a:lnL w="9525" cap="flat" cmpd="sng" algn="ctr">
                       <a:solidFill>
                         <a:srgbClr val="D5D8DE"/>
@@ -11100,17 +13622,17 @@
                         <a:buNone/>
                       </a:pPr>
                       <a:r>
-                        <a:rPr lang="en-US" sz="1600" dirty="0">
+                        <a:rPr lang="en-US" sz="1400" dirty="0">
                           <a:solidFill>
                             <a:srgbClr val="14213D"/>
                           </a:solidFill>
                         </a:rPr>
-                        <a:t>We can’t decide between your two compressors — which one is cheaper to run?</a:t>
+                        <a:t>I’d like to upgrade our maintenance contract to the premium tier.</a:t>
                       </a:r>
-                      <a:endParaRPr lang="en-US" sz="1600" dirty="0"/>
+                      <a:endParaRPr lang="en-US" sz="1400" dirty="0"/>
                     </a:p>
                   </a:txBody>
-                  <a:tcPr marL="91440" marR="91440" marT="91440" marB="91440" anchor="ctr">
+                  <a:tcPr marL="91440" marR="91440" marT="64008" marB="64008" anchor="ctr">
                     <a:lnL w="9525" cap="flat" cmpd="sng" algn="ctr">
                       <a:solidFill>
                         <a:srgbClr val="D5D8DE"/>
@@ -11161,17 +13683,17 @@
                         <a:buNone/>
                       </a:pPr>
                       <a:r>
-                        <a:rPr lang="en-US" sz="1600" dirty="0">
+                        <a:rPr lang="en-US" sz="1400" dirty="0">
                           <a:solidFill>
                             <a:srgbClr val="14213D"/>
                           </a:solidFill>
                         </a:rPr>
-                        <a:t>sales → 1</a:t>
+                        <a:t>0.95</a:t>
                       </a:r>
-                      <a:endParaRPr lang="en-US" sz="1600" dirty="0"/>
+                      <a:endParaRPr lang="en-US" sz="1400" dirty="0"/>
                     </a:p>
                   </a:txBody>
-                  <a:tcPr marL="91440" marR="91440" marT="91440" marB="91440" anchor="ctr">
+                  <a:tcPr marL="91440" marR="91440" marT="64008" marB="64008" anchor="ctr">
                     <a:lnL w="9525" cap="flat" cmpd="sng" algn="ctr">
                       <a:solidFill>
                         <a:srgbClr val="D5D8DE"/>
@@ -11222,17 +13744,17 @@
                         <a:buNone/>
                       </a:pPr>
                       <a:r>
-                        <a:rPr lang="en-US" sz="1600" dirty="0">
+                        <a:rPr lang="en-US" sz="1400" dirty="0">
                           <a:solidFill>
                             <a:srgbClr val="14213D"/>
                           </a:solidFill>
                         </a:rPr>
-                        <a:t>“can’t”</a:t>
+                        <a:t>support ✗</a:t>
                       </a:r>
-                      <a:endParaRPr lang="en-US" sz="1600" dirty="0"/>
+                      <a:endParaRPr lang="en-US" sz="1400" dirty="0"/>
                     </a:p>
                   </a:txBody>
-                  <a:tcPr marL="91440" marR="91440" marT="91440" marB="91440" anchor="ctr">
+                  <a:tcPr marL="91440" marR="91440" marT="64008" marB="64008" anchor="ctr">
                     <a:lnL w="9525" cap="flat" cmpd="sng" algn="ctr">
                       <a:solidFill>
                         <a:srgbClr val="D5D8DE"/>
@@ -11285,17 +13807,17 @@
                         <a:buNone/>
                       </a:pPr>
                       <a:r>
-                        <a:rPr lang="en-US" sz="1600" dirty="0">
+                        <a:rPr lang="en-US" sz="1400" dirty="0">
                           <a:solidFill>
                             <a:srgbClr val="14213D"/>
                           </a:solidFill>
                         </a:rPr>
-                        <a:t>Please quote the repair cost for our damaged gearbox.</a:t>
+                        <a:t>Can we move from the basic to the premium service package starting next month?</a:t>
                       </a:r>
-                      <a:endParaRPr lang="en-US" sz="1600" dirty="0"/>
+                      <a:endParaRPr lang="en-US" sz="1400" dirty="0"/>
                     </a:p>
                   </a:txBody>
-                  <a:tcPr marL="91440" marR="91440" marT="91440" marB="91440" anchor="ctr">
+                  <a:tcPr marL="91440" marR="91440" marT="64008" marB="64008" anchor="ctr">
                     <a:lnL w="9525" cap="flat" cmpd="sng" algn="ctr">
                       <a:solidFill>
                         <a:srgbClr val="D5D8DE"/>
@@ -11346,17 +13868,17 @@
                         <a:buNone/>
                       </a:pPr>
                       <a:r>
-                        <a:rPr lang="en-US" sz="1600" dirty="0">
+                        <a:rPr lang="en-US" sz="1400" dirty="0">
                           <a:solidFill>
                             <a:srgbClr val="14213D"/>
                           </a:solidFill>
                         </a:rPr>
-                        <a:t>customer_service → 0</a:t>
+                        <a:t>0.94</a:t>
                       </a:r>
-                      <a:endParaRPr lang="en-US" sz="1600" dirty="0"/>
+                      <a:endParaRPr lang="en-US" sz="1400" dirty="0"/>
                     </a:p>
                   </a:txBody>
-                  <a:tcPr marL="91440" marR="91440" marT="91440" marB="91440" anchor="ctr">
+                  <a:tcPr marL="91440" marR="91440" marT="64008" marB="64008" anchor="ctr">
                     <a:lnL w="9525" cap="flat" cmpd="sng" algn="ctr">
                       <a:solidFill>
                         <a:srgbClr val="D5D8DE"/>
@@ -11407,17 +13929,17 @@
                         <a:buNone/>
                       </a:pPr>
                       <a:r>
-                        <a:rPr lang="en-US" sz="1600" dirty="0">
+                        <a:rPr lang="en-US" sz="1400" dirty="0">
                           <a:solidFill>
                             <a:srgbClr val="14213D"/>
                           </a:solidFill>
                         </a:rPr>
-                        <a:t>“quote” + repair</a:t>
+                        <a:t>support ✗</a:t>
                       </a:r>
-                      <a:endParaRPr lang="en-US" sz="1600" dirty="0"/>
+                      <a:endParaRPr lang="en-US" sz="1400" dirty="0"/>
                     </a:p>
                   </a:txBody>
-                  <a:tcPr marL="91440" marR="91440" marT="91440" marB="91440" anchor="ctr">
+                  <a:tcPr marL="91440" marR="91440" marT="64008" marB="64008" anchor="ctr">
                     <a:lnL w="9525" cap="flat" cmpd="sng" algn="ctr">
                       <a:solidFill>
                         <a:srgbClr val="D5D8DE"/>
@@ -11456,6 +13978,191 @@
                     </a:lnB>
                     <a:solidFill>
                       <a:srgbClr val="FFFFFF"/>
+                    </a:solidFill>
+                  </a:tcPr>
+                </a:tc>
+              </a:tr>
+              <a:tr h="0">
+                <a:tc>
+                  <a:txBody>
+                    <a:bodyPr/>
+                    <a:lstStyle/>
+                    <a:p>
+                      <a:pPr indent="0" marL="0">
+                        <a:buNone/>
+                      </a:pPr>
+                      <a:r>
+                        <a:rPr lang="en-US" sz="1400" dirty="0">
+                          <a:solidFill>
+                            <a:srgbClr val="14213D"/>
+                          </a:solidFill>
+                        </a:rPr>
+                        <a:t>We need your latest chiller brochure with prices.</a:t>
+                      </a:r>
+                      <a:endParaRPr lang="en-US" sz="1400" dirty="0"/>
+                    </a:p>
+                  </a:txBody>
+                  <a:tcPr marL="91440" marR="91440" marT="64008" marB="64008" anchor="ctr">
+                    <a:lnL w="9525" cap="flat" cmpd="sng" algn="ctr">
+                      <a:solidFill>
+                        <a:srgbClr val="D5D8DE"/>
+                      </a:solidFill>
+                      <a:prstDash val="solid"/>
+                      <a:round/>
+                      <a:headEnd type="none" w="med" len="med"/>
+                      <a:tailEnd type="none" w="med" len="med"/>
+                    </a:lnL>
+                    <a:lnR w="9525" cap="flat" cmpd="sng" algn="ctr">
+                      <a:solidFill>
+                        <a:srgbClr val="D5D8DE"/>
+                      </a:solidFill>
+                      <a:prstDash val="solid"/>
+                      <a:round/>
+                      <a:headEnd type="none" w="med" len="med"/>
+                      <a:tailEnd type="none" w="med" len="med"/>
+                    </a:lnR>
+                    <a:lnT w="9525" cap="flat" cmpd="sng" algn="ctr">
+                      <a:solidFill>
+                        <a:srgbClr val="D5D8DE"/>
+                      </a:solidFill>
+                      <a:prstDash val="solid"/>
+                      <a:round/>
+                      <a:headEnd type="none" w="med" len="med"/>
+                      <a:tailEnd type="none" w="med" len="med"/>
+                    </a:lnT>
+                    <a:lnB w="9525" cap="flat" cmpd="sng" algn="ctr">
+                      <a:solidFill>
+                        <a:srgbClr val="D5D8DE"/>
+                      </a:solidFill>
+                      <a:prstDash val="solid"/>
+                      <a:round/>
+                      <a:headEnd type="none" w="med" len="med"/>
+                      <a:tailEnd type="none" w="med" len="med"/>
+                    </a:lnB>
+                    <a:solidFill>
+                      <a:srgbClr val="EEF0F3"/>
+                    </a:solidFill>
+                  </a:tcPr>
+                </a:tc>
+                <a:tc>
+                  <a:txBody>
+                    <a:bodyPr/>
+                    <a:lstStyle/>
+                    <a:p>
+                      <a:pPr indent="0" marL="0">
+                        <a:buNone/>
+                      </a:pPr>
+                      <a:r>
+                        <a:rPr lang="en-US" sz="1400" dirty="0">
+                          <a:solidFill>
+                            <a:srgbClr val="14213D"/>
+                          </a:solidFill>
+                        </a:rPr>
+                        <a:t>0.98</a:t>
+                      </a:r>
+                      <a:endParaRPr lang="en-US" sz="1400" dirty="0"/>
+                    </a:p>
+                  </a:txBody>
+                  <a:tcPr marL="91440" marR="91440" marT="64008" marB="64008" anchor="ctr">
+                    <a:lnL w="9525" cap="flat" cmpd="sng" algn="ctr">
+                      <a:solidFill>
+                        <a:srgbClr val="D5D8DE"/>
+                      </a:solidFill>
+                      <a:prstDash val="solid"/>
+                      <a:round/>
+                      <a:headEnd type="none" w="med" len="med"/>
+                      <a:tailEnd type="none" w="med" len="med"/>
+                    </a:lnL>
+                    <a:lnR w="9525" cap="flat" cmpd="sng" algn="ctr">
+                      <a:solidFill>
+                        <a:srgbClr val="D5D8DE"/>
+                      </a:solidFill>
+                      <a:prstDash val="solid"/>
+                      <a:round/>
+                      <a:headEnd type="none" w="med" len="med"/>
+                      <a:tailEnd type="none" w="med" len="med"/>
+                    </a:lnR>
+                    <a:lnT w="9525" cap="flat" cmpd="sng" algn="ctr">
+                      <a:solidFill>
+                        <a:srgbClr val="D5D8DE"/>
+                      </a:solidFill>
+                      <a:prstDash val="solid"/>
+                      <a:round/>
+                      <a:headEnd type="none" w="med" len="med"/>
+                      <a:tailEnd type="none" w="med" len="med"/>
+                    </a:lnT>
+                    <a:lnB w="9525" cap="flat" cmpd="sng" algn="ctr">
+                      <a:solidFill>
+                        <a:srgbClr val="D5D8DE"/>
+                      </a:solidFill>
+                      <a:prstDash val="solid"/>
+                      <a:round/>
+                      <a:headEnd type="none" w="med" len="med"/>
+                      <a:tailEnd type="none" w="med" len="med"/>
+                    </a:lnB>
+                    <a:solidFill>
+                      <a:srgbClr val="EEF0F3"/>
+                    </a:solidFill>
+                  </a:tcPr>
+                </a:tc>
+                <a:tc>
+                  <a:txBody>
+                    <a:bodyPr/>
+                    <a:lstStyle/>
+                    <a:p>
+                      <a:pPr indent="0" marL="0">
+                        <a:buNone/>
+                      </a:pPr>
+                      <a:r>
+                        <a:rPr lang="en-US" sz="1400" dirty="0">
+                          <a:solidFill>
+                            <a:srgbClr val="14213D"/>
+                          </a:solidFill>
+                        </a:rPr>
+                        <a:t>support ✗</a:t>
+                      </a:r>
+                      <a:endParaRPr lang="en-US" sz="1400" dirty="0"/>
+                    </a:p>
+                  </a:txBody>
+                  <a:tcPr marL="91440" marR="91440" marT="64008" marB="64008" anchor="ctr">
+                    <a:lnL w="9525" cap="flat" cmpd="sng" algn="ctr">
+                      <a:solidFill>
+                        <a:srgbClr val="D5D8DE"/>
+                      </a:solidFill>
+                      <a:prstDash val="solid"/>
+                      <a:round/>
+                      <a:headEnd type="none" w="med" len="med"/>
+                      <a:tailEnd type="none" w="med" len="med"/>
+                    </a:lnL>
+                    <a:lnR w="9525" cap="flat" cmpd="sng" algn="ctr">
+                      <a:solidFill>
+                        <a:srgbClr val="D5D8DE"/>
+                      </a:solidFill>
+                      <a:prstDash val="solid"/>
+                      <a:round/>
+                      <a:headEnd type="none" w="med" len="med"/>
+                      <a:tailEnd type="none" w="med" len="med"/>
+                    </a:lnR>
+                    <a:lnT w="9525" cap="flat" cmpd="sng" algn="ctr">
+                      <a:solidFill>
+                        <a:srgbClr val="D5D8DE"/>
+                      </a:solidFill>
+                      <a:prstDash val="solid"/>
+                      <a:round/>
+                      <a:headEnd type="none" w="med" len="med"/>
+                      <a:tailEnd type="none" w="med" len="med"/>
+                    </a:lnT>
+                    <a:lnB w="9525" cap="flat" cmpd="sng" algn="ctr">
+                      <a:solidFill>
+                        <a:srgbClr val="D5D8DE"/>
+                      </a:solidFill>
+                      <a:prstDash val="solid"/>
+                      <a:round/>
+                      <a:headEnd type="none" w="med" len="med"/>
+                      <a:tailEnd type="none" w="med" len="med"/>
+                    </a:lnB>
+                    <a:solidFill>
+                      <a:srgbClr val="EEF0F3"/>
                     </a:solidFill>
                   </a:tcPr>
                 </a:tc>
@@ -11466,7 +14173,7 @@
       </p:graphicFrame>
       <p:sp>
         <p:nvSpPr>
-          <p:cNvPr id="14" name="Text 11"/>
+          <p:cNvPr id="17" name="Text 14"/>
           <p:cNvSpPr txBox="1"/>
           <p:nvPr/>
         </p:nvSpPr>
@@ -11482,21 +14189,21 @@
           <a:ln/>
         </p:spPr>
         <p:txBody>
-          <a:bodyPr wrap="square" lIns="0" tIns="0" rIns="0" bIns="0" rtlCol="0" anchor="ctr"/>
+          <a:bodyPr wrap="square" lIns="0" tIns="0" rIns="0" bIns="0" rtlCol="0" anchor="t"/>
           <a:lstStyle/>
           <a:p>
             <a:pPr indent="0" marL="0">
               <a:buNone/>
             </a:pPr>
             <a:r>
-              <a:rPr lang="en-US" sz="1100" dirty="0">
+              <a:rPr lang="en-US" sz="1000" dirty="0">
                 <a:solidFill>
                   <a:srgbClr val="6B7689"/>
                 </a:solidFill>
               </a:rPr>
-              <a:t>Moaaz · Decision model · Saved outputs: decision_outputs.json</a:t>
-            </a:r>
-            <a:endParaRPr lang="en-US" sz="1100" dirty="0"/>
+              <a:t>Confusion on test: support 10/10 correct · sales 6/10 correct (4 sent to support)</a:t>
+            </a:r>
+            <a:endParaRPr lang="en-US" sz="1000" dirty="0"/>
           </a:p>
         </p:txBody>
       </p:sp>
@@ -11572,14 +14279,41 @@
       </p:grpSpPr>
       <p:sp>
         <p:nvSpPr>
-          <p:cNvPr id="2" name="Text 0"/>
+          <p:cNvPr id="2" name="Shape 0"/>
+          <p:cNvSpPr/>
+          <p:nvPr/>
+        </p:nvSpPr>
+        <p:spPr>
+          <a:xfrm>
+            <a:off x="548640" y="329184"/>
+            <a:ext cx="960120" cy="274320"/>
+          </a:xfrm>
+          <a:prstGeom prst="roundRect">
+            <a:avLst>
+              <a:gd name="adj" fmla="val 50000"/>
+            </a:avLst>
+          </a:prstGeom>
+          <a:solidFill>
+            <a:srgbClr val="B8451B"/>
+          </a:solidFill>
+          <a:ln w="12700">
+            <a:solidFill>
+              <a:srgbClr val="B8451B"/>
+            </a:solidFill>
+            <a:prstDash val="solid"/>
+          </a:ln>
+        </p:spPr>
+      </p:sp>
+      <p:sp>
+        <p:nvSpPr>
+          <p:cNvPr id="3" name="Text 1"/>
           <p:cNvSpPr txBox="1"/>
           <p:nvPr/>
         </p:nvSpPr>
         <p:spPr>
           <a:xfrm>
-            <a:off x="548640" y="365760"/>
-            <a:ext cx="11094415" cy="274320"/>
+            <a:off x="548640" y="329184"/>
+            <a:ext cx="960120" cy="274320"/>
           </a:xfrm>
           <a:prstGeom prst="rect">
             <a:avLst/>
@@ -11591,11 +14325,47 @@
           <a:bodyPr wrap="square" lIns="0" tIns="0" rIns="0" bIns="0" rtlCol="0" anchor="ctr"/>
           <a:lstStyle/>
           <a:p>
+            <a:pPr algn="ctr" indent="0" marL="0">
+              <a:buNone/>
+            </a:pPr>
+            <a:r>
+              <a:rPr lang="en-US" sz="1000" b="1" spc="100" kern="0" dirty="0">
+                <a:solidFill>
+                  <a:srgbClr val="FFFFFF"/>
+                </a:solidFill>
+              </a:rPr>
+              <a:t>MOAAZ</a:t>
+            </a:r>
+            <a:endParaRPr lang="en-US" sz="1000" dirty="0"/>
+          </a:p>
+        </p:txBody>
+      </p:sp>
+      <p:sp>
+        <p:nvSpPr>
+          <p:cNvPr id="4" name="Text 2"/>
+          <p:cNvSpPr txBox="1"/>
+          <p:nvPr/>
+        </p:nvSpPr>
+        <p:spPr>
+          <a:xfrm>
+            <a:off x="1645920" y="356616"/>
+            <a:ext cx="8229600" cy="274320"/>
+          </a:xfrm>
+          <a:prstGeom prst="rect">
+            <a:avLst/>
+          </a:prstGeom>
+          <a:noFill/>
+          <a:ln/>
+        </p:spPr>
+        <p:txBody>
+          <a:bodyPr wrap="square" lIns="0" tIns="0" rIns="0" bIns="0" rtlCol="0" anchor="t"/>
+          <a:lstStyle/>
+          <a:p>
             <a:pPr indent="0" marL="0">
               <a:buNone/>
             </a:pPr>
             <a:r>
-              <a:rPr lang="en-US" sz="1200" b="1" spc="200" kern="0" dirty="0">
+              <a:rPr lang="en-US" sz="1100" b="1" spc="200" kern="0" dirty="0">
                 <a:solidFill>
                   <a:srgbClr val="B8451B"/>
                 </a:solidFill>
@@ -11603,15 +14373,15 @@
                 <a:ea typeface="Courier New" pitchFamily="34" charset="-122"/>
                 <a:cs typeface="Courier New" pitchFamily="34" charset="-120"/>
               </a:rPr>
-              <a:t>DECISION MODEL · WHAT THE RESULT DOES AND DOESN’T SHOW</a:t>
-            </a:r>
-            <a:endParaRPr lang="en-US" sz="1200" dirty="0"/>
-          </a:p>
-        </p:txBody>
-      </p:sp>
-      <p:sp>
-        <p:nvSpPr>
-          <p:cNvPr id="3" name="Text 0"/>
+              <a:t>DECISION MODEL · WHAT IT SHOWS</a:t>
+            </a:r>
+            <a:endParaRPr lang="en-US" sz="1100" dirty="0"/>
+          </a:p>
+        </p:txBody>
+      </p:sp>
+      <p:sp>
+        <p:nvSpPr>
+          <p:cNvPr id="5" name="Text 0"/>
           <p:cNvSpPr/>
           <p:nvPr>
             <p:ph idx="100" type="title" hasCustomPrompt="1"/>
@@ -11619,8 +14389,8 @@
         </p:nvSpPr>
         <p:spPr>
           <a:xfrm>
-            <a:off x="548640" y="685800"/>
-            <a:ext cx="11094415" cy="822960"/>
+            <a:off x="548640" y="713232"/>
+            <a:ext cx="11094415" cy="777240"/>
           </a:xfrm>
           <a:prstGeom prst="rect">
             <a:avLst/>
@@ -11636,31 +14406,31 @@
               <a:buNone/>
             </a:pPr>
             <a:r>
-              <a:rPr lang="en-US" sz="3400" b="1" dirty="0">
+              <a:rPr lang="en-US" sz="3200" b="1" dirty="0">
                 <a:solidFill>
                   <a:srgbClr val="14213D"/>
                 </a:solidFill>
               </a:rPr>
-              <a:t>A perfect score with honest caveats</a:t>
-            </a:r>
-            <a:endParaRPr lang="en-US" sz="3400" dirty="0"/>
-          </a:p>
-        </p:txBody>
-      </p:sp>
-      <p:sp>
-        <p:nvSpPr>
-          <p:cNvPr id="4" name="Shape 2"/>
+              <a:t>It reads meaning, but its scores need care</a:t>
+            </a:r>
+            <a:endParaRPr lang="en-US" sz="3200" dirty="0"/>
+          </a:p>
+        </p:txBody>
+      </p:sp>
+      <p:sp>
+        <p:nvSpPr>
+          <p:cNvPr id="6" name="Shape 4"/>
           <p:cNvSpPr/>
           <p:nvPr/>
         </p:nvSpPr>
         <p:spPr>
           <a:xfrm>
-            <a:off x="548640" y="1783080"/>
-            <a:ext cx="5410048" cy="3017520"/>
+            <a:off x="548640" y="1691640"/>
+            <a:ext cx="5410048" cy="3566160"/>
           </a:xfrm>
           <a:prstGeom prst="roundRect">
             <a:avLst>
-              <a:gd name="adj" fmla="val 3636"/>
+              <a:gd name="adj" fmla="val 2564"/>
             </a:avLst>
           </a:prstGeom>
           <a:solidFill>
@@ -11676,13 +14446,13 @@
       </p:sp>
       <p:sp>
         <p:nvSpPr>
-          <p:cNvPr id="5" name="Text 3"/>
+          <p:cNvPr id="7" name="Text 5"/>
           <p:cNvSpPr txBox="1"/>
           <p:nvPr/>
         </p:nvSpPr>
         <p:spPr>
           <a:xfrm>
-            <a:off x="868680" y="2011680"/>
+            <a:off x="868680" y="1874520"/>
             <a:ext cx="4769968" cy="365760"/>
           </a:xfrm>
           <a:prstGeom prst="rect">
@@ -11699,27 +14469,27 @@
               <a:buNone/>
             </a:pPr>
             <a:r>
-              <a:rPr lang="en-US" sz="1800" b="1" dirty="0">
-                <a:solidFill>
-                  <a:srgbClr val="14213D"/>
-                </a:solidFill>
-              </a:rPr>
-              <a:t>What it shows</a:t>
-            </a:r>
-            <a:endParaRPr lang="en-US" sz="1800" dirty="0"/>
-          </a:p>
-        </p:txBody>
-      </p:sp>
-      <p:sp>
-        <p:nvSpPr>
-          <p:cNvPr id="6" name="Text 4"/>
+              <a:rPr lang="en-US" sz="1900" b="1" dirty="0">
+                <a:solidFill>
+                  <a:srgbClr val="1B8A5A"/>
+                </a:solidFill>
+              </a:rPr>
+              <a:t>Strengths</a:t>
+            </a:r>
+            <a:endParaRPr lang="en-US" sz="1900" dirty="0"/>
+          </a:p>
+        </p:txBody>
+      </p:sp>
+      <p:sp>
+        <p:nvSpPr>
+          <p:cNvPr id="8" name="Text 6"/>
           <p:cNvSpPr txBox="1"/>
           <p:nvPr/>
         </p:nvSpPr>
         <p:spPr>
           <a:xfrm>
-            <a:off x="868680" y="2514600"/>
-            <a:ext cx="4769968" cy="2103120"/>
+            <a:off x="868680" y="2377440"/>
+            <a:ext cx="4769968" cy="2743200"/>
           </a:xfrm>
           <a:prstGeom prst="rect">
             <a:avLst/>
@@ -11733,7 +14503,7 @@
           <a:p>
             <a:pPr marL="342900" indent="-342900">
               <a:spcAft>
-                <a:spcPts val="800"/>
+                <a:spcPts val="1000"/>
               </a:spcAft>
               <a:buSzPct val="100000"/>
               <a:buChar char="•"/>
@@ -11744,14 +14514,14 @@
                   <a:srgbClr val="4A5568"/>
                 </a:solidFill>
               </a:rPr>
-              <a:t>It reads meaning, so negation and mixed intent work</a:t>
+              <a:t>Gets the “problems first” rule: 4/4 mixed intent</a:t>
             </a:r>
             <a:endParaRPr lang="en-US" sz="1500" dirty="0"/>
           </a:p>
           <a:p>
             <a:pPr marL="342900" indent="-342900">
               <a:spcAft>
-                <a:spcPts val="800"/>
+                <a:spcPts val="1000"/>
               </a:spcAft>
               <a:buSzPct val="100000"/>
               <a:buChar char="•"/>
@@ -11762,14 +14532,14 @@
                   <a:srgbClr val="4A5568"/>
                 </a:solidFill>
               </a:rPr>
-              <a:t>The business rule lives in one sentence we can edit</a:t>
+              <a:t>Errors lean to support — the safer mistake for KIO</a:t>
             </a:r>
             <a:endParaRPr lang="en-US" sz="1500" dirty="0"/>
           </a:p>
           <a:p>
             <a:pPr marL="342900" indent="-342900">
               <a:spcAft>
-                <a:spcPts val="800"/>
+                <a:spcPts val="1000"/>
               </a:spcAft>
               <a:buSzPct val="100000"/>
               <a:buChar char="•"/>
@@ -11780,26 +14550,44 @@
                   <a:srgbClr val="4A5568"/>
                 </a:solidFill>
               </a:rPr>
-              <a:t>No training data needed to start</a:t>
+              <a:t>No training data needed; rules are plain text</a:t>
             </a:r>
             <a:endParaRPr lang="en-US" sz="1500" dirty="0"/>
           </a:p>
-        </p:txBody>
-      </p:sp>
-      <p:sp>
-        <p:nvSpPr>
-          <p:cNvPr id="7" name="Shape 5"/>
+          <a:p>
+            <a:pPr marL="342900" indent="-342900">
+              <a:spcAft>
+                <a:spcPts val="1000"/>
+              </a:spcAft>
+              <a:buSzPct val="100000"/>
+              <a:buChar char="•"/>
+            </a:pPr>
+            <a:r>
+              <a:rPr lang="en-US" sz="1500" dirty="0">
+                <a:solidFill>
+                  <a:srgbClr val="4A5568"/>
+                </a:solidFill>
+              </a:rPr>
+              <a:t>Free and open-source (MIT)</a:t>
+            </a:r>
+            <a:endParaRPr lang="en-US" sz="1500" dirty="0"/>
+          </a:p>
+        </p:txBody>
+      </p:sp>
+      <p:sp>
+        <p:nvSpPr>
+          <p:cNvPr id="9" name="Shape 7"/>
           <p:cNvSpPr/>
           <p:nvPr/>
         </p:nvSpPr>
         <p:spPr>
           <a:xfrm>
-            <a:off x="6233008" y="1783080"/>
-            <a:ext cx="5410048" cy="3017520"/>
+            <a:off x="6233008" y="1691640"/>
+            <a:ext cx="5410048" cy="3566160"/>
           </a:xfrm>
           <a:prstGeom prst="roundRect">
             <a:avLst>
-              <a:gd name="adj" fmla="val 3636"/>
+              <a:gd name="adj" fmla="val 2564"/>
             </a:avLst>
           </a:prstGeom>
           <a:solidFill>
@@ -11815,13 +14603,13 @@
       </p:sp>
       <p:sp>
         <p:nvSpPr>
-          <p:cNvPr id="8" name="Text 6"/>
+          <p:cNvPr id="10" name="Text 8"/>
           <p:cNvSpPr txBox="1"/>
           <p:nvPr/>
         </p:nvSpPr>
         <p:spPr>
           <a:xfrm>
-            <a:off x="6553048" y="2011680"/>
+            <a:off x="6553048" y="1874520"/>
             <a:ext cx="4769968" cy="365760"/>
           </a:xfrm>
           <a:prstGeom prst="rect">
@@ -11838,27 +14626,27 @@
               <a:buNone/>
             </a:pPr>
             <a:r>
-              <a:rPr lang="en-US" sz="1800" b="1" dirty="0">
-                <a:solidFill>
-                  <a:srgbClr val="14213D"/>
-                </a:solidFill>
-              </a:rPr>
-              <a:t>What to be careful about</a:t>
-            </a:r>
-            <a:endParaRPr lang="en-US" sz="1800" dirty="0"/>
-          </a:p>
-        </p:txBody>
-      </p:sp>
-      <p:sp>
-        <p:nvSpPr>
-          <p:cNvPr id="9" name="Text 7"/>
+              <a:rPr lang="en-US" sz="1900" b="1" dirty="0">
+                <a:solidFill>
+                  <a:srgbClr val="B8451B"/>
+                </a:solidFill>
+              </a:rPr>
+              <a:t>Weaknesses</a:t>
+            </a:r>
+            <a:endParaRPr lang="en-US" sz="1900" dirty="0"/>
+          </a:p>
+        </p:txBody>
+      </p:sp>
+      <p:sp>
+        <p:nvSpPr>
+          <p:cNvPr id="11" name="Text 9"/>
           <p:cNvSpPr txBox="1"/>
           <p:nvPr/>
         </p:nvSpPr>
         <p:spPr>
           <a:xfrm>
-            <a:off x="6553048" y="2514600"/>
-            <a:ext cx="4769968" cy="2103120"/>
+            <a:off x="6553048" y="2377440"/>
+            <a:ext cx="4769968" cy="2743200"/>
           </a:xfrm>
           <a:prstGeom prst="rect">
             <a:avLst/>
@@ -11872,7 +14660,7 @@
           <a:p>
             <a:pPr marL="342900" indent="-342900">
               <a:spcAft>
-                <a:spcPts val="800"/>
+                <a:spcPts val="1000"/>
               </a:spcAft>
               <a:buSzPct val="100000"/>
               <a:buChar char="•"/>
@@ -11883,14 +14671,14 @@
                   <a:srgbClr val="4A5568"/>
                 </a:solidFill>
               </a:rPr>
-              <a:t>Not a blind test: the same AI helped write the labels</a:t>
+              <a:t>p_support is high for almost every message, so the threshold had to be 0.90</a:t>
             </a:r>
             <a:endParaRPr lang="en-US" sz="1500" dirty="0"/>
           </a:p>
           <a:p>
             <a:pPr marL="342900" indent="-342900">
               <a:spcAft>
-                <a:spcPts val="800"/>
+                <a:spcPts val="1000"/>
               </a:spcAft>
               <a:buSzPct val="100000"/>
               <a:buChar char="•"/>
@@ -11901,14 +14689,14 @@
                   <a:srgbClr val="4A5568"/>
                 </a:solidFill>
               </a:rPr>
-              <a:t>Only 28 messages scored; one error changes it by 4–12 points</a:t>
+              <a:t>Words like “maintenance” or “service” pull sales messages to support</a:t>
             </a:r>
             <a:endParaRPr lang="en-US" sz="1500" dirty="0"/>
           </a:p>
           <a:p>
             <a:pPr marL="342900" indent="-342900">
               <a:spcAft>
-                <a:spcPts val="800"/>
+                <a:spcPts val="1000"/>
               </a:spcAft>
               <a:buSzPct val="100000"/>
               <a:buChar char="•"/>
@@ -11919,22 +14707,40 @@
                   <a:srgbClr val="4A5568"/>
                 </a:solidFill>
               </a:rPr>
-              <a:t>Costs money per call, adds network latency, depends on a vendor</a:t>
+              <a:t>Slower: ~1 s per message on CPU vs. milliseconds</a:t>
             </a:r>
             <a:endParaRPr lang="en-US" sz="1500" dirty="0"/>
           </a:p>
-        </p:txBody>
-      </p:sp>
-      <p:sp>
-        <p:nvSpPr>
-          <p:cNvPr id="10" name="Text 8"/>
+          <a:p>
+            <a:pPr marL="342900" indent="-342900">
+              <a:spcAft>
+                <a:spcPts val="1000"/>
+              </a:spcAft>
+              <a:buSzPct val="100000"/>
+              <a:buChar char="•"/>
+            </a:pPr>
+            <a:r>
+              <a:rPr lang="en-US" sz="1500" dirty="0">
+                <a:solidFill>
+                  <a:srgbClr val="4A5568"/>
+                </a:solidFill>
+              </a:rPr>
+              <a:t>Only 28 scored messages — one error moves accuracy 4–12 points</a:t>
+            </a:r>
+            <a:endParaRPr lang="en-US" sz="1500" dirty="0"/>
+          </a:p>
+        </p:txBody>
+      </p:sp>
+      <p:sp>
+        <p:nvSpPr>
+          <p:cNvPr id="12" name="Text 10"/>
           <p:cNvSpPr txBox="1"/>
           <p:nvPr/>
         </p:nvSpPr>
         <p:spPr>
           <a:xfrm>
-            <a:off x="548640" y="5074920"/>
-            <a:ext cx="11094415" cy="457200"/>
+            <a:off x="548640" y="5486400"/>
+            <a:ext cx="11094415" cy="548640"/>
           </a:xfrm>
           <a:prstGeom prst="rect">
             <a:avLst/>
@@ -11950,20 +14756,20 @@
               <a:buNone/>
             </a:pPr>
             <a:r>
-              <a:rPr lang="en-US" sz="1600" dirty="0">
+              <a:rPr lang="en-US" sz="1500" dirty="0">
                 <a:solidFill>
                   <a:srgbClr val="4A5568"/>
                 </a:solidFill>
               </a:rPr>
-              <a:t>Next step for a fair test: we label a fresh batch by hand, then run Jev and Claude on it.</a:t>
-            </a:r>
-            <a:endParaRPr lang="en-US" sz="1600" dirty="0"/>
-          </a:p>
-        </p:txBody>
-      </p:sp>
-      <p:sp>
-        <p:nvSpPr>
-          <p:cNvPr id="11" name="Text 9"/>
+              <a:t>Fix we would try next: rewrite the sales option to mention service contracts and upgrades, then re-tune t on training data.</a:t>
+            </a:r>
+            <a:endParaRPr lang="en-US" sz="1500" dirty="0"/>
+          </a:p>
+        </p:txBody>
+      </p:sp>
+      <p:sp>
+        <p:nvSpPr>
+          <p:cNvPr id="13" name="Text 11"/>
           <p:cNvSpPr txBox="1"/>
           <p:nvPr/>
         </p:nvSpPr>
@@ -11979,21 +14785,21 @@
           <a:ln/>
         </p:spPr>
         <p:txBody>
-          <a:bodyPr wrap="square" lIns="0" tIns="0" rIns="0" bIns="0" rtlCol="0" anchor="ctr"/>
+          <a:bodyPr wrap="square" lIns="0" tIns="0" rIns="0" bIns="0" rtlCol="0" anchor="t"/>
           <a:lstStyle/>
           <a:p>
             <a:pPr indent="0" marL="0">
               <a:buNone/>
             </a:pPr>
             <a:r>
-              <a:rPr lang="en-US" sz="1100" dirty="0">
+              <a:rPr lang="en-US" sz="1000" dirty="0">
                 <a:solidFill>
                   <a:srgbClr val="6B7689"/>
                 </a:solidFill>
               </a:rPr>
-              <a:t>Moaaz · Decision model · Hand over to Omar</a:t>
-            </a:r>
-            <a:endParaRPr lang="en-US" sz="1100" dirty="0"/>
+              <a:t>Hand over to Omar</a:t>
+            </a:r>
+            <a:endParaRPr lang="en-US" sz="1000" dirty="0"/>
           </a:p>
         </p:txBody>
       </p:sp>
@@ -12069,14 +14875,41 @@
       </p:grpSpPr>
       <p:sp>
         <p:nvSpPr>
-          <p:cNvPr id="2" name="Text 0"/>
+          <p:cNvPr id="2" name="Shape 0"/>
+          <p:cNvSpPr/>
+          <p:nvPr/>
+        </p:nvSpPr>
+        <p:spPr>
+          <a:xfrm>
+            <a:off x="548640" y="329184"/>
+            <a:ext cx="960120" cy="274320"/>
+          </a:xfrm>
+          <a:prstGeom prst="roundRect">
+            <a:avLst>
+              <a:gd name="adj" fmla="val 50000"/>
+            </a:avLst>
+          </a:prstGeom>
+          <a:solidFill>
+            <a:srgbClr val="1B8A5A"/>
+          </a:solidFill>
+          <a:ln w="12700">
+            <a:solidFill>
+              <a:srgbClr val="1B8A5A"/>
+            </a:solidFill>
+            <a:prstDash val="solid"/>
+          </a:ln>
+        </p:spPr>
+      </p:sp>
+      <p:sp>
+        <p:nvSpPr>
+          <p:cNvPr id="3" name="Text 1"/>
           <p:cNvSpPr txBox="1"/>
           <p:nvPr/>
         </p:nvSpPr>
         <p:spPr>
           <a:xfrm>
-            <a:off x="548640" y="365760"/>
-            <a:ext cx="11094415" cy="274320"/>
+            <a:off x="548640" y="329184"/>
+            <a:ext cx="960120" cy="274320"/>
           </a:xfrm>
           <a:prstGeom prst="rect">
             <a:avLst/>
@@ -12088,13 +14921,49 @@
           <a:bodyPr wrap="square" lIns="0" tIns="0" rIns="0" bIns="0" rtlCol="0" anchor="ctr"/>
           <a:lstStyle/>
           <a:p>
+            <a:pPr algn="ctr" indent="0" marL="0">
+              <a:buNone/>
+            </a:pPr>
+            <a:r>
+              <a:rPr lang="en-US" sz="1000" b="1" spc="100" kern="0" dirty="0">
+                <a:solidFill>
+                  <a:srgbClr val="FFFFFF"/>
+                </a:solidFill>
+              </a:rPr>
+              <a:t>OMAR</a:t>
+            </a:r>
+            <a:endParaRPr lang="en-US" sz="1000" dirty="0"/>
+          </a:p>
+        </p:txBody>
+      </p:sp>
+      <p:sp>
+        <p:nvSpPr>
+          <p:cNvPr id="4" name="Text 2"/>
+          <p:cNvSpPr txBox="1"/>
+          <p:nvPr/>
+        </p:nvSpPr>
+        <p:spPr>
+          <a:xfrm>
+            <a:off x="1645920" y="356616"/>
+            <a:ext cx="8229600" cy="274320"/>
+          </a:xfrm>
+          <a:prstGeom prst="rect">
+            <a:avLst/>
+          </a:prstGeom>
+          <a:noFill/>
+          <a:ln/>
+        </p:spPr>
+        <p:txBody>
+          <a:bodyPr wrap="square" lIns="0" tIns="0" rIns="0" bIns="0" rtlCol="0" anchor="t"/>
+          <a:lstStyle/>
+          <a:p>
             <a:pPr indent="0" marL="0">
               <a:buNone/>
             </a:pPr>
             <a:r>
-              <a:rPr lang="en-US" sz="1200" b="1" spc="200" kern="0" dirty="0">
-                <a:solidFill>
-                  <a:srgbClr val="2A78D6"/>
+              <a:rPr lang="en-US" sz="1100" b="1" spc="200" kern="0" dirty="0">
+                <a:solidFill>
+                  <a:srgbClr val="1B8A5A"/>
                 </a:solidFill>
                 <a:latin typeface="Courier New" pitchFamily="34" charset="0"/>
                 <a:ea typeface="Courier New" pitchFamily="34" charset="-122"/>
@@ -12102,13 +14971,13 @@
               </a:rPr>
               <a:t>TRADITIONAL ML · MODEL</a:t>
             </a:r>
-            <a:endParaRPr lang="en-US" sz="1200" dirty="0"/>
-          </a:p>
-        </p:txBody>
-      </p:sp>
-      <p:sp>
-        <p:nvSpPr>
-          <p:cNvPr id="3" name="Text 0"/>
+            <a:endParaRPr lang="en-US" sz="1100" dirty="0"/>
+          </a:p>
+        </p:txBody>
+      </p:sp>
+      <p:sp>
+        <p:nvSpPr>
+          <p:cNvPr id="5" name="Text 0"/>
           <p:cNvSpPr/>
           <p:nvPr>
             <p:ph idx="100" type="title" hasCustomPrompt="1"/>
@@ -12116,8 +14985,8 @@
         </p:nvSpPr>
         <p:spPr>
           <a:xfrm>
-            <a:off x="548640" y="685800"/>
-            <a:ext cx="11094415" cy="822960"/>
+            <a:off x="548640" y="713232"/>
+            <a:ext cx="11094415" cy="777240"/>
           </a:xfrm>
           <a:prstGeom prst="rect">
             <a:avLst/>
@@ -12133,31 +15002,31 @@
               <a:buNone/>
             </a:pPr>
             <a:r>
-              <a:rPr lang="en-US" sz="3400" b="1" dirty="0">
+              <a:rPr lang="en-US" sz="3200" b="1" dirty="0">
                 <a:solidFill>
                   <a:srgbClr val="14213D"/>
                 </a:solidFill>
               </a:rPr>
               <a:t>Two numbers per message, a curved boundary</a:t>
             </a:r>
-            <a:endParaRPr lang="en-US" sz="3400" dirty="0"/>
-          </a:p>
-        </p:txBody>
-      </p:sp>
-      <p:sp>
-        <p:nvSpPr>
-          <p:cNvPr id="4" name="Shape 2"/>
+            <a:endParaRPr lang="en-US" sz="3200" dirty="0"/>
+          </a:p>
+        </p:txBody>
+      </p:sp>
+      <p:sp>
+        <p:nvSpPr>
+          <p:cNvPr id="6" name="Shape 4"/>
           <p:cNvSpPr/>
           <p:nvPr/>
         </p:nvSpPr>
         <p:spPr>
           <a:xfrm>
-            <a:off x="548640" y="1783080"/>
-            <a:ext cx="3515258" cy="3291840"/>
+            <a:off x="548640" y="1737360"/>
+            <a:ext cx="3515258" cy="3200400"/>
           </a:xfrm>
           <a:prstGeom prst="roundRect">
             <a:avLst>
-              <a:gd name="adj" fmla="val 3333"/>
+              <a:gd name="adj" fmla="val 2857"/>
             </a:avLst>
           </a:prstGeom>
           <a:solidFill>
@@ -12173,13 +15042,13 @@
       </p:sp>
       <p:sp>
         <p:nvSpPr>
-          <p:cNvPr id="5" name="Text 3"/>
+          <p:cNvPr id="7" name="Text 5"/>
           <p:cNvSpPr txBox="1"/>
           <p:nvPr/>
         </p:nvSpPr>
         <p:spPr>
           <a:xfrm>
-            <a:off x="822960" y="1965960"/>
+            <a:off x="822960" y="1920240"/>
             <a:ext cx="2966618" cy="274320"/>
           </a:xfrm>
           <a:prstGeom prst="rect">
@@ -12198,7 +15067,7 @@
             <a:r>
               <a:rPr lang="en-US" sz="1200" b="1" dirty="0">
                 <a:solidFill>
-                  <a:srgbClr val="2A78D6"/>
+                  <a:srgbClr val="1B8A5A"/>
                 </a:solidFill>
                 <a:latin typeface="Courier New" pitchFamily="34" charset="0"/>
                 <a:ea typeface="Courier New" pitchFamily="34" charset="-122"/>
@@ -12212,13 +15081,13 @@
       </p:sp>
       <p:sp>
         <p:nvSpPr>
-          <p:cNvPr id="6" name="Text 4"/>
+          <p:cNvPr id="8" name="Text 6"/>
           <p:cNvSpPr txBox="1"/>
           <p:nvPr/>
         </p:nvSpPr>
         <p:spPr>
           <a:xfrm>
-            <a:off x="822960" y="2331720"/>
+            <a:off x="822960" y="2286000"/>
             <a:ext cx="2966618" cy="640080"/>
           </a:xfrm>
           <a:prstGeom prst="rect">
@@ -12248,14 +15117,14 @@
       </p:sp>
       <p:sp>
         <p:nvSpPr>
-          <p:cNvPr id="7" name="Text 5"/>
+          <p:cNvPr id="9" name="Text 7"/>
           <p:cNvSpPr txBox="1"/>
           <p:nvPr/>
         </p:nvSpPr>
         <p:spPr>
           <a:xfrm>
-            <a:off x="822960" y="3017520"/>
-            <a:ext cx="2966618" cy="1920240"/>
+            <a:off x="822960" y="2971800"/>
+            <a:ext cx="2966618" cy="1828800"/>
           </a:xfrm>
           <a:prstGeom prst="rect">
             <a:avLst/>
@@ -12276,7 +15145,7 @@
                   <a:srgbClr val="4A5568"/>
                 </a:solidFill>
               </a:rPr>
-              <a:t>Counts of generic problem cues (error, leak, late, warranty…) and purchase cues (quote, price, buy, demo…). A cue right after no / not / don’t counts −1, so “no issues” lowers support.</a:t>
+              <a:t>Count of problem cues (error, leak, late, warranty…) and purchase cues (quote, price, buy, demo…). A cue right after no / not / don’t counts −1.</a:t>
             </a:r>
             <a:endParaRPr lang="en-US" sz="1400" dirty="0"/>
           </a:p>
@@ -12284,18 +15153,18 @@
       </p:sp>
       <p:sp>
         <p:nvSpPr>
-          <p:cNvPr id="8" name="Shape 6"/>
+          <p:cNvPr id="10" name="Shape 8"/>
           <p:cNvSpPr/>
           <p:nvPr/>
         </p:nvSpPr>
         <p:spPr>
           <a:xfrm>
-            <a:off x="4338218" y="1783080"/>
-            <a:ext cx="3515258" cy="3291840"/>
+            <a:off x="4338218" y="1737360"/>
+            <a:ext cx="3515258" cy="3200400"/>
           </a:xfrm>
           <a:prstGeom prst="roundRect">
             <a:avLst>
-              <a:gd name="adj" fmla="val 3333"/>
+              <a:gd name="adj" fmla="val 2857"/>
             </a:avLst>
           </a:prstGeom>
           <a:solidFill>
@@ -12311,13 +15180,13 @@
       </p:sp>
       <p:sp>
         <p:nvSpPr>
-          <p:cNvPr id="9" name="Text 7"/>
+          <p:cNvPr id="11" name="Text 9"/>
           <p:cNvSpPr txBox="1"/>
           <p:nvPr/>
         </p:nvSpPr>
         <p:spPr>
           <a:xfrm>
-            <a:off x="4612538" y="1965960"/>
+            <a:off x="4612538" y="1920240"/>
             <a:ext cx="2966618" cy="274320"/>
           </a:xfrm>
           <a:prstGeom prst="rect">
@@ -12336,7 +15205,7 @@
             <a:r>
               <a:rPr lang="en-US" sz="1200" b="1" dirty="0">
                 <a:solidFill>
-                  <a:srgbClr val="2A78D6"/>
+                  <a:srgbClr val="1B8A5A"/>
                 </a:solidFill>
                 <a:latin typeface="Courier New" pitchFamily="34" charset="0"/>
                 <a:ea typeface="Courier New" pitchFamily="34" charset="-122"/>
@@ -12350,13 +15219,13 @@
       </p:sp>
       <p:sp>
         <p:nvSpPr>
-          <p:cNvPr id="10" name="Text 8"/>
+          <p:cNvPr id="12" name="Text 10"/>
           <p:cNvSpPr txBox="1"/>
           <p:nvPr/>
         </p:nvSpPr>
         <p:spPr>
           <a:xfrm>
-            <a:off x="4612538" y="2331720"/>
+            <a:off x="4612538" y="2286000"/>
             <a:ext cx="2966618" cy="640080"/>
           </a:xfrm>
           <a:prstGeom prst="rect">
@@ -12386,14 +15255,14 @@
       </p:sp>
       <p:sp>
         <p:nvSpPr>
-          <p:cNvPr id="11" name="Text 9"/>
+          <p:cNvPr id="13" name="Text 11"/>
           <p:cNvSpPr txBox="1"/>
           <p:nvPr/>
         </p:nvSpPr>
         <p:spPr>
           <a:xfrm>
-            <a:off x="4612538" y="3017520"/>
-            <a:ext cx="2966618" cy="1920240"/>
+            <a:off x="4612538" y="2971800"/>
+            <a:ext cx="2966618" cy="1828800"/>
           </a:xfrm>
           <a:prstGeom prst="rect">
             <a:avLst/>
@@ -12414,7 +15283,7 @@
                   <a:srgbClr val="4A5568"/>
                 </a:solidFill>
               </a:rPr>
-              <a:t>StandardScaler → PolynomialFeatures(2): x₁, x₂, x₁², x₁x₂, x₂² → LogisticRegression(C = 1). Flag 1 when P(sales) ≥ 0.5.</a:t>
+              <a:t>StandardScaler → PolynomialFeatures(2): x₁, x₂, x₁², x₁x₂, x₂² → LogisticRegression(C = 1). Flag 1 if P(sales) ≥ 0.5.</a:t>
             </a:r>
             <a:endParaRPr lang="en-US" sz="1400" dirty="0"/>
           </a:p>
@@ -12422,18 +15291,18 @@
       </p:sp>
       <p:sp>
         <p:nvSpPr>
-          <p:cNvPr id="12" name="Shape 10"/>
+          <p:cNvPr id="14" name="Shape 12"/>
           <p:cNvSpPr/>
           <p:nvPr/>
         </p:nvSpPr>
         <p:spPr>
           <a:xfrm>
-            <a:off x="8127797" y="1783080"/>
-            <a:ext cx="3515258" cy="3291840"/>
+            <a:off x="8127797" y="1737360"/>
+            <a:ext cx="3515258" cy="3200400"/>
           </a:xfrm>
           <a:prstGeom prst="roundRect">
             <a:avLst>
-              <a:gd name="adj" fmla="val 3333"/>
+              <a:gd name="adj" fmla="val 2857"/>
             </a:avLst>
           </a:prstGeom>
           <a:solidFill>
@@ -12449,13 +15318,13 @@
       </p:sp>
       <p:sp>
         <p:nvSpPr>
-          <p:cNvPr id="13" name="Text 11"/>
+          <p:cNvPr id="15" name="Text 13"/>
           <p:cNvSpPr txBox="1"/>
           <p:nvPr/>
         </p:nvSpPr>
         <p:spPr>
           <a:xfrm>
-            <a:off x="8402117" y="1965960"/>
+            <a:off x="8402117" y="1920240"/>
             <a:ext cx="2966618" cy="274320"/>
           </a:xfrm>
           <a:prstGeom prst="rect">
@@ -12474,7 +15343,7 @@
             <a:r>
               <a:rPr lang="en-US" sz="1200" b="1" dirty="0">
                 <a:solidFill>
-                  <a:srgbClr val="2A78D6"/>
+                  <a:srgbClr val="1B8A5A"/>
                 </a:solidFill>
                 <a:latin typeface="Courier New" pitchFamily="34" charset="0"/>
                 <a:ea typeface="Courier New" pitchFamily="34" charset="-122"/>
@@ -12488,86 +15357,14 @@
       </p:sp>
       <p:sp>
         <p:nvSpPr>
-          <p:cNvPr id="14" name="Text 12"/>
-          <p:cNvSpPr txBox="1"/>
-          <p:nvPr/>
-        </p:nvSpPr>
-        <p:spPr>
-          <a:xfrm>
-            <a:off x="8402117" y="2331720"/>
-            <a:ext cx="2966618" cy="640080"/>
-          </a:xfrm>
-          <a:prstGeom prst="rect">
-            <a:avLst/>
-          </a:prstGeom>
-          <a:noFill/>
-          <a:ln/>
-        </p:spPr>
-        <p:txBody>
-          <a:bodyPr wrap="square" lIns="0" tIns="0" rIns="0" bIns="0" rtlCol="0" anchor="t"/>
-          <a:lstStyle/>
-          <a:p>
-            <a:pPr indent="0" marL="0">
-              <a:buNone/>
-            </a:pPr>
-            <a:r>
-              <a:rPr lang="en-US" sz="1700" b="1" dirty="0">
-                <a:solidFill>
-                  <a:srgbClr val="14213D"/>
-                </a:solidFill>
-              </a:rPr>
-              <a:t>40 messages, scikit-learn</a:t>
-            </a:r>
-            <a:endParaRPr lang="en-US" sz="1700" dirty="0"/>
-          </a:p>
-        </p:txBody>
-      </p:sp>
-      <p:sp>
-        <p:nvSpPr>
-          <p:cNvPr id="15" name="Text 13"/>
-          <p:cNvSpPr txBox="1"/>
-          <p:nvPr/>
-        </p:nvSpPr>
-        <p:spPr>
-          <a:xfrm>
-            <a:off x="8402117" y="3017520"/>
-            <a:ext cx="2966618" cy="1920240"/>
-          </a:xfrm>
-          <a:prstGeom prst="rect">
-            <a:avLst/>
-          </a:prstGeom>
-          <a:noFill/>
-          <a:ln/>
-        </p:spPr>
-        <p:txBody>
-          <a:bodyPr wrap="square" lIns="0" tIns="0" rIns="0" bIns="0" rtlCol="0" anchor="t"/>
-          <a:lstStyle/>
-          <a:p>
-            <a:pPr indent="0" marL="0">
-              <a:buNone/>
-            </a:pPr>
-            <a:r>
-              <a:rPr lang="en-US" sz="1400" dirty="0">
-                <a:solidFill>
-                  <a:srgbClr val="4A5568"/>
-                </a:solidFill>
-              </a:rPr>
-              <a:t>Train accuracy 38/40. Test accuracy 20/20. Over 200 random group splits: 96% on average (85% at worst).</a:t>
-            </a:r>
-            <a:endParaRPr lang="en-US" sz="1400" dirty="0"/>
-          </a:p>
-        </p:txBody>
-      </p:sp>
-      <p:sp>
-        <p:nvSpPr>
           <p:cNvPr id="16" name="Text 14"/>
           <p:cNvSpPr txBox="1"/>
           <p:nvPr/>
         </p:nvSpPr>
         <p:spPr>
           <a:xfrm>
-            <a:off x="548640" y="5303520"/>
-            <a:ext cx="11094415" cy="640080"/>
+            <a:off x="8402117" y="2286000"/>
+            <a:ext cx="2966618" cy="640080"/>
           </a:xfrm>
           <a:prstGeom prst="rect">
             <a:avLst/>
@@ -12583,14 +15380,14 @@
               <a:buNone/>
             </a:pPr>
             <a:r>
-              <a:rPr lang="en-US" sz="1500" dirty="0">
-                <a:solidFill>
-                  <a:srgbClr val="4A5568"/>
-                </a:solidFill>
-              </a:rPr>
-              <a:t>First try, word weights learned from the 40 messages: only 40% on test. Forty examples are too few to learn vocabulary, so we switched to cue counts.</a:t>
-            </a:r>
-            <a:endParaRPr lang="en-US" sz="1500" dirty="0"/>
+              <a:rPr lang="en-US" sz="1700" b="1" dirty="0">
+                <a:solidFill>
+                  <a:srgbClr val="14213D"/>
+                </a:solidFill>
+              </a:rPr>
+              <a:t>40 messages, scikit-learn</a:t>
+            </a:r>
+            <a:endParaRPr lang="en-US" sz="1700" dirty="0"/>
           </a:p>
         </p:txBody>
       </p:sp>
@@ -12602,6 +15399,78 @@
         </p:nvSpPr>
         <p:spPr>
           <a:xfrm>
+            <a:off x="8402117" y="2971800"/>
+            <a:ext cx="2966618" cy="1828800"/>
+          </a:xfrm>
+          <a:prstGeom prst="rect">
+            <a:avLst/>
+          </a:prstGeom>
+          <a:noFill/>
+          <a:ln/>
+        </p:spPr>
+        <p:txBody>
+          <a:bodyPr wrap="square" lIns="0" tIns="0" rIns="0" bIns="0" rtlCol="0" anchor="t"/>
+          <a:lstStyle/>
+          <a:p>
+            <a:pPr indent="0" marL="0">
+              <a:buNone/>
+            </a:pPr>
+            <a:r>
+              <a:rPr lang="en-US" sz="1400" dirty="0">
+                <a:solidFill>
+                  <a:srgbClr val="4A5568"/>
+                </a:solidFill>
+              </a:rPr>
+              <a:t>Train 38/40. Learned weights: x₁ −1.72, x₂ +1.41 — problem cues push to support, purchase cues to sales.</a:t>
+            </a:r>
+            <a:endParaRPr lang="en-US" sz="1400" dirty="0"/>
+          </a:p>
+        </p:txBody>
+      </p:sp>
+      <p:sp>
+        <p:nvSpPr>
+          <p:cNvPr id="18" name="Text 16"/>
+          <p:cNvSpPr txBox="1"/>
+          <p:nvPr/>
+        </p:nvSpPr>
+        <p:spPr>
+          <a:xfrm>
+            <a:off x="548640" y="5120640"/>
+            <a:ext cx="11094415" cy="914400"/>
+          </a:xfrm>
+          <a:prstGeom prst="rect">
+            <a:avLst/>
+          </a:prstGeom>
+          <a:noFill/>
+          <a:ln/>
+        </p:spPr>
+        <p:txBody>
+          <a:bodyPr wrap="square" lIns="0" tIns="0" rIns="0" bIns="0" rtlCol="0" anchor="t"/>
+          <a:lstStyle/>
+          <a:p>
+            <a:pPr indent="0" marL="0">
+              <a:buNone/>
+            </a:pPr>
+            <a:r>
+              <a:rPr lang="en-US" sz="1400" dirty="0">
+                <a:solidFill>
+                  <a:srgbClr val="4A5568"/>
+                </a:solidFill>
+              </a:rPr>
+              <a:t>We first tried learning a weight per word from the 40 messages: 40% on test. Forty examples are too few to learn vocabulary, so we moved to cue counts. An SVM with a degree-2 polynomial kernel on the same features scored 95% on test, 50% on the hard messages.</a:t>
+            </a:r>
+            <a:endParaRPr lang="en-US" sz="1400" dirty="0"/>
+          </a:p>
+        </p:txBody>
+      </p:sp>
+      <p:sp>
+        <p:nvSpPr>
+          <p:cNvPr id="19" name="Text 17"/>
+          <p:cNvSpPr txBox="1"/>
+          <p:nvPr/>
+        </p:nvSpPr>
+        <p:spPr>
+          <a:xfrm>
             <a:off x="548640" y="6400800"/>
             <a:ext cx="10180015" cy="274320"/>
           </a:xfrm>
@@ -12612,21 +15481,21 @@
           <a:ln/>
         </p:spPr>
         <p:txBody>
-          <a:bodyPr wrap="square" lIns="0" tIns="0" rIns="0" bIns="0" rtlCol="0" anchor="ctr"/>
+          <a:bodyPr wrap="square" lIns="0" tIns="0" rIns="0" bIns="0" rtlCol="0" anchor="t"/>
           <a:lstStyle/>
           <a:p>
             <a:pPr indent="0" marL="0">
               <a:buNone/>
             </a:pPr>
             <a:r>
-              <a:rPr lang="en-US" sz="1100" dirty="0">
+              <a:rPr lang="en-US" sz="1000" dirty="0">
                 <a:solidFill>
                   <a:srgbClr val="6B7689"/>
                 </a:solidFill>
               </a:rPr>
-              <a:t>Omar · ML classifier · Code: features.py, ml_router.py</a:t>
-            </a:r>
-            <a:endParaRPr lang="en-US" sz="1100" dirty="0"/>
+              <a:t>Notebook: KIO_Routing.ipynb, section 2</a:t>
+            </a:r>
+            <a:endParaRPr lang="en-US" sz="1000" dirty="0"/>
           </a:p>
         </p:txBody>
       </p:sp>
